--- a/assets/module-0-intro/mod-0-lecture-3-arduino-installation.pptx
+++ b/assets/module-0-intro/mod-0-lecture-3-arduino-installation.pptx
@@ -5,7 +5,7 @@
     <p:sldMasterId id="2147483660" r:id="rId1"/>
   </p:sldMasterIdLst>
   <p:notesMasterIdLst>
-    <p:notesMasterId r:id="rId19"/>
+    <p:notesMasterId r:id="rId21"/>
   </p:notesMasterIdLst>
   <p:sldIdLst>
     <p:sldId id="263" r:id="rId2"/>
@@ -16,15 +16,17 @@
     <p:sldId id="266" r:id="rId7"/>
     <p:sldId id="265" r:id="rId8"/>
     <p:sldId id="267" r:id="rId9"/>
-    <p:sldId id="268" r:id="rId10"/>
-    <p:sldId id="269" r:id="rId11"/>
-    <p:sldId id="270" r:id="rId12"/>
-    <p:sldId id="272" r:id="rId13"/>
-    <p:sldId id="276" r:id="rId14"/>
-    <p:sldId id="257" r:id="rId15"/>
-    <p:sldId id="259" r:id="rId16"/>
-    <p:sldId id="260" r:id="rId17"/>
-    <p:sldId id="277" r:id="rId18"/>
+    <p:sldId id="279" r:id="rId10"/>
+    <p:sldId id="268" r:id="rId11"/>
+    <p:sldId id="269" r:id="rId12"/>
+    <p:sldId id="270" r:id="rId13"/>
+    <p:sldId id="272" r:id="rId14"/>
+    <p:sldId id="276" r:id="rId15"/>
+    <p:sldId id="278" r:id="rId16"/>
+    <p:sldId id="257" r:id="rId17"/>
+    <p:sldId id="259" r:id="rId18"/>
+    <p:sldId id="260" r:id="rId19"/>
+    <p:sldId id="277" r:id="rId20"/>
   </p:sldIdLst>
   <p:sldSz cx="12192000" cy="6858000"/>
   <p:notesSz cx="6858000" cy="9144000"/>
@@ -213,7 +215,7 @@
           <a:p>
             <a:fld id="{AB3190B2-75FE-3B4D-97E4-FA7B0E625342}" type="datetimeFigureOut">
               <a:rPr lang="en-US" smtClean="0"/>
-              <a:t>8/29/25</a:t>
+              <a:t>1/19/2026</a:t>
             </a:fld>
             <a:endParaRPr lang="en-US"/>
           </a:p>
@@ -725,7 +727,7 @@
           <a:p>
             <a:fld id="{7C65A655-3FFE-460B-9705-8E515D426F54}" type="datetime1">
               <a:rPr lang="en-US" smtClean="0"/>
-              <a:t>8/29/25</a:t>
+              <a:t>1/19/2026</a:t>
             </a:fld>
             <a:endParaRPr lang="en-US"/>
           </a:p>
@@ -935,7 +937,7 @@
           <a:p>
             <a:fld id="{F4546C6D-E384-488B-8EC7-0E77255F2527}" type="datetimeFigureOut">
               <a:rPr lang="en-US" smtClean="0"/>
-              <a:t>8/29/25</a:t>
+              <a:t>1/19/2026</a:t>
             </a:fld>
             <a:endParaRPr lang="en-US"/>
           </a:p>
@@ -1561,6 +1563,209 @@
           <a:chExt cx="0" cy="0"/>
         </a:xfrm>
       </p:grpSpPr>
+      <p:sp>
+        <p:nvSpPr>
+          <p:cNvPr id="5" name="TextBox 4">
+            <a:extLst>
+              <a:ext uri="{FF2B5EF4-FFF2-40B4-BE49-F238E27FC236}">
+                <a16:creationId xmlns:a16="http://schemas.microsoft.com/office/drawing/2014/main" id="{6901EFBD-F767-0021-3DA3-21CE8CC7E94E}"/>
+              </a:ext>
+            </a:extLst>
+          </p:cNvPr>
+          <p:cNvSpPr txBox="1"/>
+          <p:nvPr/>
+        </p:nvSpPr>
+        <p:spPr>
+          <a:xfrm>
+            <a:off x="2807110" y="228289"/>
+            <a:ext cx="6145160" cy="523220"/>
+          </a:xfrm>
+          <a:prstGeom prst="rect">
+            <a:avLst/>
+          </a:prstGeom>
+          <a:noFill/>
+        </p:spPr>
+        <p:txBody>
+          <a:bodyPr wrap="square">
+            <a:spAutoFit/>
+          </a:bodyPr>
+          <a:lstStyle/>
+          <a:p>
+            <a:r>
+              <a:rPr lang="en-US" sz="2800" dirty="0"/>
+              <a:t>Streaming Sensor Data to a Web App</a:t>
+            </a:r>
+          </a:p>
+        </p:txBody>
+      </p:sp>
+      <p:sp>
+        <p:nvSpPr>
+          <p:cNvPr id="6" name="TextBox 5">
+            <a:extLst>
+              <a:ext uri="{FF2B5EF4-FFF2-40B4-BE49-F238E27FC236}">
+                <a16:creationId xmlns:a16="http://schemas.microsoft.com/office/drawing/2014/main" id="{033F3A53-0848-A541-3A21-95F39E63FA9C}"/>
+              </a:ext>
+            </a:extLst>
+          </p:cNvPr>
+          <p:cNvSpPr txBox="1"/>
+          <p:nvPr/>
+        </p:nvSpPr>
+        <p:spPr>
+          <a:xfrm>
+            <a:off x="344128" y="777154"/>
+            <a:ext cx="9704440" cy="1569660"/>
+          </a:xfrm>
+          <a:prstGeom prst="rect">
+            <a:avLst/>
+          </a:prstGeom>
+          <a:noFill/>
+        </p:spPr>
+        <p:txBody>
+          <a:bodyPr wrap="square" rtlCol="0">
+            <a:spAutoFit/>
+          </a:bodyPr>
+          <a:lstStyle/>
+          <a:p>
+            <a:pPr marL="342900" indent="-342900">
+              <a:buAutoNum type="arabicPeriod"/>
+            </a:pPr>
+            <a:r>
+              <a:rPr lang="en-US" sz="2400" dirty="0"/>
+              <a:t>Let’s start using Arduino Cloud </a:t>
+            </a:r>
+            <a:r>
+              <a:rPr lang="en-US" sz="2400" dirty="0">
+                <a:hlinkClick r:id="rId2"/>
+              </a:rPr>
+              <a:t>https://cloud.arduino.cc/?gad_source=1&amp;gbraid=0AAAAACbEa84ofzTu6ZqKTNrvfC00iYeOK&amp;gclid=CjwKCAjwlbu2BhA3EiwA3yXyuyRs52Pa6IMOnlhxourjC6ZlovP8tXgo2qfPTzjIE3rKl_pymK4kmxoCDSMQAvD_BwE</a:t>
+            </a:r>
+            <a:endParaRPr lang="en-US" sz="2400" dirty="0"/>
+          </a:p>
+        </p:txBody>
+      </p:sp>
+      <p:pic>
+        <p:nvPicPr>
+          <p:cNvPr id="8" name="Picture 7" descr="A screenshot of a computer&#10;&#10;Description automatically generated">
+            <a:extLst>
+              <a:ext uri="{FF2B5EF4-FFF2-40B4-BE49-F238E27FC236}">
+                <a16:creationId xmlns:a16="http://schemas.microsoft.com/office/drawing/2014/main" id="{BB286569-7715-2BB8-15D8-D8BF25B58AAA}"/>
+              </a:ext>
+            </a:extLst>
+          </p:cNvPr>
+          <p:cNvPicPr>
+            <a:picLocks noChangeAspect="1"/>
+          </p:cNvPicPr>
+          <p:nvPr/>
+        </p:nvPicPr>
+        <p:blipFill>
+          <a:blip r:embed="rId3">
+            <a:extLst>
+              <a:ext uri="{28A0092B-C50C-407E-A947-70E740481C1C}">
+                <a14:useLocalDpi xmlns:a14="http://schemas.microsoft.com/office/drawing/2010/main" val="0"/>
+              </a:ext>
+            </a:extLst>
+          </a:blip>
+          <a:stretch>
+            <a:fillRect/>
+          </a:stretch>
+        </p:blipFill>
+        <p:spPr>
+          <a:xfrm>
+            <a:off x="7580672" y="2539165"/>
+            <a:ext cx="4395018" cy="2401482"/>
+          </a:xfrm>
+          <a:prstGeom prst="rect">
+            <a:avLst/>
+          </a:prstGeom>
+        </p:spPr>
+      </p:pic>
+      <p:sp>
+        <p:nvSpPr>
+          <p:cNvPr id="9" name="TextBox 8">
+            <a:extLst>
+              <a:ext uri="{FF2B5EF4-FFF2-40B4-BE49-F238E27FC236}">
+                <a16:creationId xmlns:a16="http://schemas.microsoft.com/office/drawing/2014/main" id="{811CE4E2-602D-61FC-1E39-5982E78E02E0}"/>
+              </a:ext>
+            </a:extLst>
+          </p:cNvPr>
+          <p:cNvSpPr txBox="1"/>
+          <p:nvPr/>
+        </p:nvSpPr>
+        <p:spPr>
+          <a:xfrm>
+            <a:off x="344127" y="2861188"/>
+            <a:ext cx="7452855" cy="2400657"/>
+          </a:xfrm>
+          <a:prstGeom prst="rect">
+            <a:avLst/>
+          </a:prstGeom>
+          <a:noFill/>
+        </p:spPr>
+        <p:txBody>
+          <a:bodyPr wrap="square" rtlCol="0">
+            <a:spAutoFit/>
+          </a:bodyPr>
+          <a:lstStyle/>
+          <a:p>
+            <a:r>
+              <a:rPr lang="en-US" sz="2400" dirty="0"/>
+              <a:t>2. You need to install Arduino Cloud Agent:</a:t>
+            </a:r>
+            <a:br>
+              <a:rPr lang="en-US" dirty="0"/>
+            </a:br>
+            <a:r>
+              <a:rPr lang="en-US" dirty="0">
+                <a:solidFill>
+                  <a:schemeClr val="tx2">
+                    <a:lumMod val="50000"/>
+                  </a:schemeClr>
+                </a:solidFill>
+              </a:rPr>
+              <a:t>You need Arduino cloud agent to be able to detect or interact with your Arduino board, because web browsers don’t have direct access to your computer’s hardware. </a:t>
+            </a:r>
+          </a:p>
+          <a:p>
+            <a:r>
+              <a:rPr lang="en-US" sz="2400" dirty="0">
+                <a:hlinkClick r:id="rId4"/>
+              </a:rPr>
+              <a:t>https://support.arduino.cc/hc/en-us/articles/360014869820-Install-the-Arduino-Create-Agent</a:t>
+            </a:r>
+            <a:endParaRPr lang="en-US" sz="2400" dirty="0"/>
+          </a:p>
+        </p:txBody>
+      </p:sp>
+    </p:spTree>
+    <p:extLst>
+      <p:ext uri="{BB962C8B-B14F-4D97-AF65-F5344CB8AC3E}">
+        <p14:creationId xmlns:p14="http://schemas.microsoft.com/office/powerpoint/2010/main" val="2246603001"/>
+      </p:ext>
+    </p:extLst>
+  </p:cSld>
+  <p:clrMapOvr>
+    <a:masterClrMapping/>
+  </p:clrMapOvr>
+</p:sld>
+</file>
+
+<file path=ppt/slides/slide11.xml><?xml version="1.0" encoding="utf-8"?>
+<p:sld xmlns:a="http://schemas.openxmlformats.org/drawingml/2006/main" xmlns:r="http://schemas.openxmlformats.org/officeDocument/2006/relationships" xmlns:p="http://schemas.openxmlformats.org/presentationml/2006/main">
+  <p:cSld>
+    <p:spTree>
+      <p:nvGrpSpPr>
+        <p:cNvPr id="1" name=""/>
+        <p:cNvGrpSpPr/>
+        <p:nvPr/>
+      </p:nvGrpSpPr>
+      <p:grpSpPr>
+        <a:xfrm>
+          <a:off x="0" y="0"/>
+          <a:ext cx="0" cy="0"/>
+          <a:chOff x="0" y="0"/>
+          <a:chExt cx="0" cy="0"/>
+        </a:xfrm>
+      </p:grpSpPr>
       <p:grpSp>
         <p:nvGrpSpPr>
           <p:cNvPr id="13" name="Group 12">
@@ -1864,7 +2069,7 @@
 </p:sld>
 </file>
 
-<file path=ppt/slides/slide11.xml><?xml version="1.0" encoding="utf-8"?>
+<file path=ppt/slides/slide12.xml><?xml version="1.0" encoding="utf-8"?>
 <p:sld xmlns:a="http://schemas.openxmlformats.org/drawingml/2006/main" xmlns:r="http://schemas.openxmlformats.org/officeDocument/2006/relationships" xmlns:p="http://schemas.openxmlformats.org/presentationml/2006/main">
   <p:cSld>
     <p:spTree>
@@ -2044,7 +2249,7 @@
 </p:sld>
 </file>
 
-<file path=ppt/slides/slide12.xml><?xml version="1.0" encoding="utf-8"?>
+<file path=ppt/slides/slide13.xml><?xml version="1.0" encoding="utf-8"?>
 <p:sld xmlns:a="http://schemas.openxmlformats.org/drawingml/2006/main" xmlns:r="http://schemas.openxmlformats.org/officeDocument/2006/relationships" xmlns:p="http://schemas.openxmlformats.org/presentationml/2006/main">
   <p:cSld>
     <p:spTree>
@@ -2287,7 +2492,7 @@
 </p:sld>
 </file>
 
-<file path=ppt/slides/slide13.xml><?xml version="1.0" encoding="utf-8"?>
+<file path=ppt/slides/slide14.xml><?xml version="1.0" encoding="utf-8"?>
 <p:sld xmlns:a="http://schemas.openxmlformats.org/drawingml/2006/main" xmlns:r="http://schemas.openxmlformats.org/officeDocument/2006/relationships" xmlns:p="http://schemas.openxmlformats.org/presentationml/2006/main">
   <p:cSld>
     <p:spTree>
@@ -2515,7 +2720,269 @@
 </p:sld>
 </file>
 
-<file path=ppt/slides/slide14.xml><?xml version="1.0" encoding="utf-8"?>
+<file path=ppt/slides/slide15.xml><?xml version="1.0" encoding="utf-8"?>
+<p:sld xmlns:a="http://schemas.openxmlformats.org/drawingml/2006/main" xmlns:r="http://schemas.openxmlformats.org/officeDocument/2006/relationships" xmlns:p="http://schemas.openxmlformats.org/presentationml/2006/main">
+  <p:cSld>
+    <p:spTree>
+      <p:nvGrpSpPr>
+        <p:cNvPr id="1" name="">
+          <a:extLst>
+            <a:ext uri="{FF2B5EF4-FFF2-40B4-BE49-F238E27FC236}">
+              <a16:creationId xmlns:a16="http://schemas.microsoft.com/office/drawing/2014/main" id="{622F81C9-E395-46DA-46EF-3A95608E6E3B}"/>
+            </a:ext>
+          </a:extLst>
+        </p:cNvPr>
+        <p:cNvGrpSpPr/>
+        <p:nvPr/>
+      </p:nvGrpSpPr>
+      <p:grpSpPr>
+        <a:xfrm>
+          <a:off x="0" y="0"/>
+          <a:ext cx="0" cy="0"/>
+          <a:chOff x="0" y="0"/>
+          <a:chExt cx="0" cy="0"/>
+        </a:xfrm>
+      </p:grpSpPr>
+      <p:sp>
+        <p:nvSpPr>
+          <p:cNvPr id="4" name="TextBox 3">
+            <a:extLst>
+              <a:ext uri="{FF2B5EF4-FFF2-40B4-BE49-F238E27FC236}">
+                <a16:creationId xmlns:a16="http://schemas.microsoft.com/office/drawing/2014/main" id="{14E84F60-52DF-1554-8009-3D200F7E70EB}"/>
+              </a:ext>
+            </a:extLst>
+          </p:cNvPr>
+          <p:cNvSpPr txBox="1"/>
+          <p:nvPr/>
+        </p:nvSpPr>
+        <p:spPr>
+          <a:xfrm>
+            <a:off x="2654709" y="195833"/>
+            <a:ext cx="6243486" cy="523220"/>
+          </a:xfrm>
+          <a:prstGeom prst="rect">
+            <a:avLst/>
+          </a:prstGeom>
+          <a:noFill/>
+        </p:spPr>
+        <p:txBody>
+          <a:bodyPr wrap="square" rtlCol="0">
+            <a:spAutoFit/>
+          </a:bodyPr>
+          <a:lstStyle/>
+          <a:p>
+            <a:pPr algn="ctr"/>
+            <a:r>
+              <a:rPr lang="en-US" sz="2800" dirty="0"/>
+              <a:t>Using the Serial Plotter</a:t>
+            </a:r>
+          </a:p>
+        </p:txBody>
+      </p:sp>
+      <p:sp>
+        <p:nvSpPr>
+          <p:cNvPr id="13" name="TextBox 12">
+            <a:extLst>
+              <a:ext uri="{FF2B5EF4-FFF2-40B4-BE49-F238E27FC236}">
+                <a16:creationId xmlns:a16="http://schemas.microsoft.com/office/drawing/2014/main" id="{4D725B8F-F04E-B9B2-91F4-3D7667A3D9F0}"/>
+              </a:ext>
+            </a:extLst>
+          </p:cNvPr>
+          <p:cNvSpPr txBox="1"/>
+          <p:nvPr/>
+        </p:nvSpPr>
+        <p:spPr>
+          <a:xfrm>
+            <a:off x="789056" y="1503946"/>
+            <a:ext cx="3963418" cy="1200329"/>
+          </a:xfrm>
+          <a:prstGeom prst="rect">
+            <a:avLst/>
+          </a:prstGeom>
+          <a:noFill/>
+        </p:spPr>
+        <p:txBody>
+          <a:bodyPr wrap="square">
+            <a:spAutoFit/>
+          </a:bodyPr>
+          <a:lstStyle/>
+          <a:p>
+            <a:pPr marL="285750" indent="-285750">
+              <a:buFontTx/>
+              <a:buChar char="-"/>
+            </a:pPr>
+            <a:r>
+              <a:rPr lang="en-US" sz="1800" dirty="0"/>
+              <a:t>Just like Serial monitor</a:t>
+            </a:r>
+          </a:p>
+          <a:p>
+            <a:pPr marL="285750" indent="-285750">
+              <a:buFontTx/>
+              <a:buChar char="-"/>
+            </a:pPr>
+            <a:r>
+              <a:rPr lang="en-US" dirty="0"/>
+              <a:t>Plots values with time in x axis</a:t>
+            </a:r>
+          </a:p>
+          <a:p>
+            <a:pPr marL="285750" indent="-285750">
+              <a:buFontTx/>
+              <a:buChar char="-"/>
+            </a:pPr>
+            <a:r>
+              <a:rPr lang="en-US" sz="1800" dirty="0"/>
+              <a:t>Use </a:t>
+            </a:r>
+            <a:r>
+              <a:rPr lang="en-US" sz="1800" dirty="0" err="1"/>
+              <a:t>Serial.println</a:t>
+            </a:r>
+            <a:r>
+              <a:rPr lang="en-US" sz="1800" dirty="0"/>
+              <a:t>() instead of </a:t>
+            </a:r>
+            <a:r>
+              <a:rPr lang="en-US" sz="1800" dirty="0" err="1"/>
+              <a:t>Serial.print</a:t>
+            </a:r>
+            <a:r>
+              <a:rPr lang="en-US" sz="1800" dirty="0"/>
+              <a:t>()</a:t>
+            </a:r>
+          </a:p>
+        </p:txBody>
+      </p:sp>
+      <p:pic>
+        <p:nvPicPr>
+          <p:cNvPr id="5" name="Picture 4" descr="A screenshot of a graph">
+            <a:extLst>
+              <a:ext uri="{FF2B5EF4-FFF2-40B4-BE49-F238E27FC236}">
+                <a16:creationId xmlns:a16="http://schemas.microsoft.com/office/drawing/2014/main" id="{7ECEEC65-95B8-8524-BBF8-C7B6571D4430}"/>
+              </a:ext>
+            </a:extLst>
+          </p:cNvPr>
+          <p:cNvPicPr>
+            <a:picLocks noChangeAspect="1"/>
+          </p:cNvPicPr>
+          <p:nvPr/>
+        </p:nvPicPr>
+        <p:blipFill>
+          <a:blip r:embed="rId2">
+            <a:extLst>
+              <a:ext uri="{28A0092B-C50C-407E-A947-70E740481C1C}">
+                <a14:useLocalDpi xmlns:a14="http://schemas.microsoft.com/office/drawing/2010/main" val="0"/>
+              </a:ext>
+            </a:extLst>
+          </a:blip>
+          <a:stretch>
+            <a:fillRect/>
+          </a:stretch>
+        </p:blipFill>
+        <p:spPr>
+          <a:xfrm>
+            <a:off x="5089001" y="1407691"/>
+            <a:ext cx="6600872" cy="4093434"/>
+          </a:xfrm>
+          <a:prstGeom prst="rect">
+            <a:avLst/>
+          </a:prstGeom>
+        </p:spPr>
+      </p:pic>
+      <p:sp>
+        <p:nvSpPr>
+          <p:cNvPr id="8" name="TextBox 7">
+            <a:extLst>
+              <a:ext uri="{FF2B5EF4-FFF2-40B4-BE49-F238E27FC236}">
+                <a16:creationId xmlns:a16="http://schemas.microsoft.com/office/drawing/2014/main" id="{CF377AD5-D695-57AF-3925-24CD28B34D23}"/>
+              </a:ext>
+            </a:extLst>
+          </p:cNvPr>
+          <p:cNvSpPr txBox="1"/>
+          <p:nvPr/>
+        </p:nvSpPr>
+        <p:spPr>
+          <a:xfrm>
+            <a:off x="1228208" y="3105834"/>
+            <a:ext cx="3085114" cy="646331"/>
+          </a:xfrm>
+          <a:prstGeom prst="rect">
+            <a:avLst/>
+          </a:prstGeom>
+          <a:noFill/>
+        </p:spPr>
+        <p:txBody>
+          <a:bodyPr wrap="square">
+            <a:spAutoFit/>
+          </a:bodyPr>
+          <a:lstStyle/>
+          <a:p>
+            <a:r>
+              <a:rPr lang="en-US" sz="1800" dirty="0"/>
+              <a:t>Your serial plotter output should look like this</a:t>
+            </a:r>
+          </a:p>
+        </p:txBody>
+      </p:sp>
+      <p:cxnSp>
+        <p:nvCxnSpPr>
+          <p:cNvPr id="9" name="Straight Arrow Connector 8">
+            <a:extLst>
+              <a:ext uri="{FF2B5EF4-FFF2-40B4-BE49-F238E27FC236}">
+                <a16:creationId xmlns:a16="http://schemas.microsoft.com/office/drawing/2014/main" id="{20A9C3EA-AB6B-C55D-B4BC-69A748F301A1}"/>
+              </a:ext>
+            </a:extLst>
+          </p:cNvPr>
+          <p:cNvCxnSpPr>
+            <a:cxnSpLocks/>
+            <a:stCxn id="8" idx="3"/>
+            <a:endCxn id="5" idx="1"/>
+          </p:cNvCxnSpPr>
+          <p:nvPr/>
+        </p:nvCxnSpPr>
+        <p:spPr>
+          <a:xfrm>
+            <a:off x="4313322" y="3429000"/>
+            <a:ext cx="775679" cy="25408"/>
+          </a:xfrm>
+          <a:prstGeom prst="straightConnector1">
+            <a:avLst/>
+          </a:prstGeom>
+          <a:ln>
+            <a:tailEnd type="triangle"/>
+          </a:ln>
+          <a:effectLst/>
+        </p:spPr>
+        <p:style>
+          <a:lnRef idx="2">
+            <a:schemeClr val="dk1"/>
+          </a:lnRef>
+          <a:fillRef idx="0">
+            <a:schemeClr val="dk1"/>
+          </a:fillRef>
+          <a:effectRef idx="1">
+            <a:schemeClr val="dk1"/>
+          </a:effectRef>
+          <a:fontRef idx="minor">
+            <a:schemeClr val="tx1"/>
+          </a:fontRef>
+        </p:style>
+      </p:cxnSp>
+    </p:spTree>
+    <p:extLst>
+      <p:ext uri="{BB962C8B-B14F-4D97-AF65-F5344CB8AC3E}">
+        <p14:creationId xmlns:p14="http://schemas.microsoft.com/office/powerpoint/2010/main" val="2327076991"/>
+      </p:ext>
+    </p:extLst>
+  </p:cSld>
+  <p:clrMapOvr>
+    <a:masterClrMapping/>
+  </p:clrMapOvr>
+</p:sld>
+</file>
+
+<file path=ppt/slides/slide16.xml><?xml version="1.0" encoding="utf-8"?>
 <p:sld xmlns:a="http://schemas.openxmlformats.org/drawingml/2006/main" xmlns:r="http://schemas.openxmlformats.org/officeDocument/2006/relationships" xmlns:p="http://schemas.openxmlformats.org/presentationml/2006/main">
   <p:cSld>
     <p:spTree>
@@ -2800,7 +3267,7 @@
 </p:sld>
 </file>
 
-<file path=ppt/slides/slide15.xml><?xml version="1.0" encoding="utf-8"?>
+<file path=ppt/slides/slide17.xml><?xml version="1.0" encoding="utf-8"?>
 <p:sld xmlns:a="http://schemas.openxmlformats.org/drawingml/2006/main" xmlns:r="http://schemas.openxmlformats.org/officeDocument/2006/relationships" xmlns:p="http://schemas.openxmlformats.org/presentationml/2006/main">
   <p:cSld>
     <p:spTree>
@@ -2995,7 +3462,7 @@
 </p:sld>
 </file>
 
-<file path=ppt/slides/slide16.xml><?xml version="1.0" encoding="utf-8"?>
+<file path=ppt/slides/slide18.xml><?xml version="1.0" encoding="utf-8"?>
 <p:sld xmlns:a="http://schemas.openxmlformats.org/drawingml/2006/main" xmlns:r="http://schemas.openxmlformats.org/officeDocument/2006/relationships" xmlns:p="http://schemas.openxmlformats.org/presentationml/2006/main">
   <p:cSld>
     <p:spTree>
@@ -3203,7 +3670,7 @@
 </p:sld>
 </file>
 
-<file path=ppt/slides/slide17.xml><?xml version="1.0" encoding="utf-8"?>
+<file path=ppt/slides/slide19.xml><?xml version="1.0" encoding="utf-8"?>
 <p:sld xmlns:a="http://schemas.openxmlformats.org/drawingml/2006/main" xmlns:r="http://schemas.openxmlformats.org/officeDocument/2006/relationships" xmlns:p="http://schemas.openxmlformats.org/presentationml/2006/main">
   <p:cSld>
     <p:spTree>
@@ -3277,7 +3744,7 @@
         <p:spPr>
           <a:xfrm>
             <a:off x="489020" y="864158"/>
-            <a:ext cx="11213960" cy="1508105"/>
+            <a:ext cx="11213960" cy="5386090"/>
           </a:xfrm>
           <a:prstGeom prst="rect">
             <a:avLst/>
@@ -3331,8 +3798,200 @@
                   </a:schemeClr>
                 </a:solidFill>
               </a:rPr>
-              <a:t>Hint:  This is how to define a function in the C programming language.</a:t>
-            </a:r>
+              <a:t>Hint 1:  This is how to define a function in the C programming language.</a:t>
+            </a:r>
+          </a:p>
+          <a:p>
+            <a:pPr marL="285750" indent="-285750">
+              <a:buFont typeface="Arial" panose="020B0604020202020204" pitchFamily="34" charset="0"/>
+              <a:buChar char="•"/>
+            </a:pPr>
+            <a:endParaRPr lang="en-US" dirty="0">
+              <a:solidFill>
+                <a:schemeClr val="bg2">
+                  <a:lumMod val="10000"/>
+                </a:schemeClr>
+              </a:solidFill>
+            </a:endParaRPr>
+          </a:p>
+          <a:p>
+            <a:pPr marL="285750" indent="-285750">
+              <a:buFont typeface="Arial" panose="020B0604020202020204" pitchFamily="34" charset="0"/>
+              <a:buChar char="•"/>
+            </a:pPr>
+            <a:endParaRPr lang="en-US" dirty="0">
+              <a:solidFill>
+                <a:schemeClr val="bg2">
+                  <a:lumMod val="10000"/>
+                </a:schemeClr>
+              </a:solidFill>
+            </a:endParaRPr>
+          </a:p>
+          <a:p>
+            <a:pPr marL="285750" indent="-285750">
+              <a:buFont typeface="Arial" panose="020B0604020202020204" pitchFamily="34" charset="0"/>
+              <a:buChar char="•"/>
+            </a:pPr>
+            <a:endParaRPr lang="en-US" dirty="0">
+              <a:solidFill>
+                <a:schemeClr val="bg2">
+                  <a:lumMod val="10000"/>
+                </a:schemeClr>
+              </a:solidFill>
+            </a:endParaRPr>
+          </a:p>
+          <a:p>
+            <a:pPr marL="285750" indent="-285750">
+              <a:buFont typeface="Arial" panose="020B0604020202020204" pitchFamily="34" charset="0"/>
+              <a:buChar char="•"/>
+            </a:pPr>
+            <a:endParaRPr lang="en-US" dirty="0">
+              <a:solidFill>
+                <a:schemeClr val="bg2">
+                  <a:lumMod val="10000"/>
+                </a:schemeClr>
+              </a:solidFill>
+            </a:endParaRPr>
+          </a:p>
+          <a:p>
+            <a:pPr marL="285750" indent="-285750">
+              <a:buFont typeface="Arial" panose="020B0604020202020204" pitchFamily="34" charset="0"/>
+              <a:buChar char="•"/>
+            </a:pPr>
+            <a:endParaRPr lang="en-US" dirty="0">
+              <a:solidFill>
+                <a:schemeClr val="bg2">
+                  <a:lumMod val="10000"/>
+                </a:schemeClr>
+              </a:solidFill>
+            </a:endParaRPr>
+          </a:p>
+          <a:p>
+            <a:pPr marL="285750" indent="-285750">
+              <a:buFont typeface="Arial" panose="020B0604020202020204" pitchFamily="34" charset="0"/>
+              <a:buChar char="•"/>
+            </a:pPr>
+            <a:endParaRPr lang="en-US" dirty="0">
+              <a:solidFill>
+                <a:schemeClr val="bg2">
+                  <a:lumMod val="10000"/>
+                </a:schemeClr>
+              </a:solidFill>
+            </a:endParaRPr>
+          </a:p>
+          <a:p>
+            <a:pPr marL="285750" indent="-285750">
+              <a:buFont typeface="Arial" panose="020B0604020202020204" pitchFamily="34" charset="0"/>
+              <a:buChar char="•"/>
+            </a:pPr>
+            <a:endParaRPr lang="en-US" dirty="0">
+              <a:solidFill>
+                <a:schemeClr val="bg2">
+                  <a:lumMod val="10000"/>
+                </a:schemeClr>
+              </a:solidFill>
+            </a:endParaRPr>
+          </a:p>
+          <a:p>
+            <a:pPr marL="285750" indent="-285750">
+              <a:buFont typeface="Arial" panose="020B0604020202020204" pitchFamily="34" charset="0"/>
+              <a:buChar char="•"/>
+            </a:pPr>
+            <a:endParaRPr lang="en-US" dirty="0">
+              <a:solidFill>
+                <a:schemeClr val="bg2">
+                  <a:lumMod val="10000"/>
+                </a:schemeClr>
+              </a:solidFill>
+            </a:endParaRPr>
+          </a:p>
+          <a:p>
+            <a:pPr marL="285750" indent="-285750">
+              <a:buFont typeface="Arial" panose="020B0604020202020204" pitchFamily="34" charset="0"/>
+              <a:buChar char="•"/>
+            </a:pPr>
+            <a:endParaRPr lang="en-US" dirty="0">
+              <a:solidFill>
+                <a:schemeClr val="bg2">
+                  <a:lumMod val="10000"/>
+                </a:schemeClr>
+              </a:solidFill>
+            </a:endParaRPr>
+          </a:p>
+          <a:p>
+            <a:pPr marL="285750" indent="-285750">
+              <a:buFont typeface="Arial" panose="020B0604020202020204" pitchFamily="34" charset="0"/>
+              <a:buChar char="•"/>
+            </a:pPr>
+            <a:endParaRPr lang="en-US" dirty="0">
+              <a:solidFill>
+                <a:schemeClr val="bg2">
+                  <a:lumMod val="10000"/>
+                </a:schemeClr>
+              </a:solidFill>
+            </a:endParaRPr>
+          </a:p>
+          <a:p>
+            <a:pPr marL="285750" indent="-285750">
+              <a:buFont typeface="Arial" panose="020B0604020202020204" pitchFamily="34" charset="0"/>
+              <a:buChar char="•"/>
+            </a:pPr>
+            <a:endParaRPr lang="en-US" dirty="0">
+              <a:solidFill>
+                <a:schemeClr val="bg2">
+                  <a:lumMod val="10000"/>
+                </a:schemeClr>
+              </a:solidFill>
+            </a:endParaRPr>
+          </a:p>
+          <a:p>
+            <a:pPr marL="285750" indent="-285750">
+              <a:buFont typeface="Arial" panose="020B0604020202020204" pitchFamily="34" charset="0"/>
+              <a:buChar char="•"/>
+            </a:pPr>
+            <a:r>
+              <a:rPr lang="en-US" dirty="0">
+                <a:solidFill>
+                  <a:schemeClr val="bg2">
+                    <a:lumMod val="10000"/>
+                  </a:schemeClr>
+                </a:solidFill>
+              </a:rPr>
+              <a:t>Hint 2: In C / Arduino, you cannot use ^ for exponentiation. Instead, you must use the pow() function from &lt;</a:t>
+            </a:r>
+            <a:r>
+              <a:rPr lang="en-US" dirty="0" err="1">
+                <a:solidFill>
+                  <a:schemeClr val="bg2">
+                    <a:lumMod val="10000"/>
+                  </a:schemeClr>
+                </a:solidFill>
+              </a:rPr>
+              <a:t>math.h</a:t>
+            </a:r>
+            <a:r>
+              <a:rPr lang="en-US" dirty="0">
+                <a:solidFill>
+                  <a:schemeClr val="bg2">
+                    <a:lumMod val="10000"/>
+                  </a:schemeClr>
+                </a:solidFill>
+              </a:rPr>
+              <a:t>&gt;: pow(base, exponent)</a:t>
+            </a:r>
+          </a:p>
+          <a:p>
+            <a:pPr marL="285750" indent="-285750">
+              <a:buFont typeface="Arial" panose="020B0604020202020204" pitchFamily="34" charset="0"/>
+              <a:buChar char="•"/>
+            </a:pPr>
+            <a:endParaRPr lang="en-US" dirty="0">
+              <a:solidFill>
+                <a:schemeClr val="bg2">
+                  <a:lumMod val="10000"/>
+                </a:schemeClr>
+              </a:solidFill>
+            </a:endParaRPr>
           </a:p>
           <a:p>
             <a:pPr marL="1200150" lvl="2" indent="-285750">
@@ -3386,8 +4045,8 @@
         </p:blipFill>
         <p:spPr bwMode="auto">
           <a:xfrm>
-            <a:off x="1288116" y="1893302"/>
-            <a:ext cx="7102850" cy="3225897"/>
+            <a:off x="1288116" y="1760961"/>
+            <a:ext cx="6183495" cy="2808354"/>
           </a:xfrm>
           <a:prstGeom prst="rect">
             <a:avLst/>
@@ -6367,7 +7026,7 @@
           <p:cNvPr id="5" name="TextBox 4">
             <a:extLst>
               <a:ext uri="{FF2B5EF4-FFF2-40B4-BE49-F238E27FC236}">
-                <a16:creationId xmlns:a16="http://schemas.microsoft.com/office/drawing/2014/main" id="{6901EFBD-F767-0021-3DA3-21CE8CC7E94E}"/>
+                <a16:creationId xmlns:a16="http://schemas.microsoft.com/office/drawing/2014/main" id="{6234100F-A861-29C7-40AA-6BC623D7AF11}"/>
               </a:ext>
             </a:extLst>
           </p:cNvPr>
@@ -6376,8 +7035,8 @@
         </p:nvSpPr>
         <p:spPr>
           <a:xfrm>
-            <a:off x="2807110" y="228289"/>
-            <a:ext cx="6145160" cy="523220"/>
+            <a:off x="4380271" y="685824"/>
+            <a:ext cx="6145160" cy="5078313"/>
           </a:xfrm>
           <a:prstGeom prst="rect">
             <a:avLst/>
@@ -6391,9 +7050,879 @@
           <a:lstStyle/>
           <a:p>
             <a:r>
-              <a:rPr lang="en-US" sz="2800" dirty="0"/>
-              <a:t>Streaming Sensor Data to a Web App</a:t>
-            </a:r>
+              <a:rPr lang="en-US" b="0" dirty="0">
+                <a:solidFill>
+                  <a:srgbClr val="95A5A6"/>
+                </a:solidFill>
+                <a:effectLst/>
+                <a:highlight>
+                  <a:srgbClr val="FFFFFF"/>
+                </a:highlight>
+                <a:latin typeface="Consolas" panose="020B0609020204030204" pitchFamily="49" charset="0"/>
+              </a:rPr>
+              <a:t>// Pin number for the built-in LED</a:t>
+            </a:r>
+            <a:endParaRPr lang="en-US" b="0" dirty="0">
+              <a:solidFill>
+                <a:srgbClr val="4E5B61"/>
+              </a:solidFill>
+              <a:effectLst/>
+              <a:highlight>
+                <a:srgbClr val="FFFFFF"/>
+              </a:highlight>
+              <a:latin typeface="Consolas" panose="020B0609020204030204" pitchFamily="49" charset="0"/>
+            </a:endParaRPr>
+          </a:p>
+          <a:p>
+            <a:r>
+              <a:rPr lang="en-US" b="0" dirty="0">
+                <a:solidFill>
+                  <a:srgbClr val="00979D"/>
+                </a:solidFill>
+                <a:effectLst/>
+                <a:highlight>
+                  <a:srgbClr val="FFFFFF"/>
+                </a:highlight>
+                <a:latin typeface="Consolas" panose="020B0609020204030204" pitchFamily="49" charset="0"/>
+              </a:rPr>
+              <a:t>const</a:t>
+            </a:r>
+            <a:r>
+              <a:rPr lang="en-US" b="0" dirty="0">
+                <a:solidFill>
+                  <a:srgbClr val="4E5B61"/>
+                </a:solidFill>
+                <a:effectLst/>
+                <a:highlight>
+                  <a:srgbClr val="FFFFFF"/>
+                </a:highlight>
+                <a:latin typeface="Consolas" panose="020B0609020204030204" pitchFamily="49" charset="0"/>
+              </a:rPr>
+              <a:t> </a:t>
+            </a:r>
+            <a:r>
+              <a:rPr lang="en-US" b="0" dirty="0">
+                <a:solidFill>
+                  <a:srgbClr val="00979D"/>
+                </a:solidFill>
+                <a:effectLst/>
+                <a:highlight>
+                  <a:srgbClr val="FFFFFF"/>
+                </a:highlight>
+                <a:latin typeface="Consolas" panose="020B0609020204030204" pitchFamily="49" charset="0"/>
+              </a:rPr>
+              <a:t>int</a:t>
+            </a:r>
+            <a:r>
+              <a:rPr lang="en-US" b="0" dirty="0">
+                <a:solidFill>
+                  <a:srgbClr val="4E5B61"/>
+                </a:solidFill>
+                <a:effectLst/>
+                <a:highlight>
+                  <a:srgbClr val="FFFFFF"/>
+                </a:highlight>
+                <a:latin typeface="Consolas" panose="020B0609020204030204" pitchFamily="49" charset="0"/>
+              </a:rPr>
+              <a:t> ledPin = </a:t>
+            </a:r>
+            <a:r>
+              <a:rPr lang="en-US" b="0" dirty="0">
+                <a:solidFill>
+                  <a:srgbClr val="005C5F"/>
+                </a:solidFill>
+                <a:effectLst/>
+                <a:highlight>
+                  <a:srgbClr val="FFFFFF"/>
+                </a:highlight>
+                <a:latin typeface="Consolas" panose="020B0609020204030204" pitchFamily="49" charset="0"/>
+              </a:rPr>
+              <a:t>13</a:t>
+            </a:r>
+            <a:r>
+              <a:rPr lang="en-US" b="0" dirty="0">
+                <a:solidFill>
+                  <a:srgbClr val="4E5B61"/>
+                </a:solidFill>
+                <a:effectLst/>
+                <a:highlight>
+                  <a:srgbClr val="FFFFFF"/>
+                </a:highlight>
+                <a:latin typeface="Consolas" panose="020B0609020204030204" pitchFamily="49" charset="0"/>
+              </a:rPr>
+              <a:t>;</a:t>
+            </a:r>
+          </a:p>
+          <a:p>
+            <a:br>
+              <a:rPr lang="en-US" b="0" dirty="0">
+                <a:solidFill>
+                  <a:srgbClr val="4E5B61"/>
+                </a:solidFill>
+                <a:effectLst/>
+                <a:highlight>
+                  <a:srgbClr val="FFFFFF"/>
+                </a:highlight>
+                <a:latin typeface="Consolas" panose="020B0609020204030204" pitchFamily="49" charset="0"/>
+              </a:rPr>
+            </a:br>
+            <a:r>
+              <a:rPr lang="en-US" b="0" dirty="0">
+                <a:solidFill>
+                  <a:srgbClr val="00979D"/>
+                </a:solidFill>
+                <a:effectLst/>
+                <a:highlight>
+                  <a:srgbClr val="FFFFFF"/>
+                </a:highlight>
+                <a:latin typeface="Consolas" panose="020B0609020204030204" pitchFamily="49" charset="0"/>
+              </a:rPr>
+              <a:t>void</a:t>
+            </a:r>
+            <a:r>
+              <a:rPr lang="en-US" b="0" dirty="0">
+                <a:solidFill>
+                  <a:srgbClr val="4E5B61"/>
+                </a:solidFill>
+                <a:effectLst/>
+                <a:highlight>
+                  <a:srgbClr val="FFFFFF"/>
+                </a:highlight>
+                <a:latin typeface="Consolas" panose="020B0609020204030204" pitchFamily="49" charset="0"/>
+              </a:rPr>
+              <a:t> </a:t>
+            </a:r>
+            <a:r>
+              <a:rPr lang="en-US" b="0" dirty="0">
+                <a:solidFill>
+                  <a:srgbClr val="D35400"/>
+                </a:solidFill>
+                <a:effectLst/>
+                <a:highlight>
+                  <a:srgbClr val="FFFFFF"/>
+                </a:highlight>
+                <a:latin typeface="Consolas" panose="020B0609020204030204" pitchFamily="49" charset="0"/>
+              </a:rPr>
+              <a:t>setup</a:t>
+            </a:r>
+            <a:r>
+              <a:rPr lang="en-US" b="0" dirty="0">
+                <a:solidFill>
+                  <a:srgbClr val="434F54"/>
+                </a:solidFill>
+                <a:effectLst/>
+                <a:highlight>
+                  <a:srgbClr val="FFFFFF"/>
+                </a:highlight>
+                <a:latin typeface="Consolas" panose="020B0609020204030204" pitchFamily="49" charset="0"/>
+              </a:rPr>
+              <a:t>()</a:t>
+            </a:r>
+            <a:r>
+              <a:rPr lang="en-US" b="0" dirty="0">
+                <a:solidFill>
+                  <a:srgbClr val="4E5B61"/>
+                </a:solidFill>
+                <a:effectLst/>
+                <a:highlight>
+                  <a:srgbClr val="FFFFFF"/>
+                </a:highlight>
+                <a:latin typeface="Consolas" panose="020B0609020204030204" pitchFamily="49" charset="0"/>
+              </a:rPr>
+              <a:t> </a:t>
+            </a:r>
+            <a:r>
+              <a:rPr lang="en-US" b="0" dirty="0">
+                <a:solidFill>
+                  <a:srgbClr val="434F54"/>
+                </a:solidFill>
+                <a:effectLst/>
+                <a:highlight>
+                  <a:srgbClr val="FFFFFF"/>
+                </a:highlight>
+                <a:latin typeface="Consolas" panose="020B0609020204030204" pitchFamily="49" charset="0"/>
+              </a:rPr>
+              <a:t>{</a:t>
+            </a:r>
+            <a:endParaRPr lang="en-US" b="0" dirty="0">
+              <a:solidFill>
+                <a:srgbClr val="4E5B61"/>
+              </a:solidFill>
+              <a:effectLst/>
+              <a:highlight>
+                <a:srgbClr val="FFFFFF"/>
+              </a:highlight>
+              <a:latin typeface="Consolas" panose="020B0609020204030204" pitchFamily="49" charset="0"/>
+            </a:endParaRPr>
+          </a:p>
+          <a:p>
+            <a:r>
+              <a:rPr lang="en-US" b="0" dirty="0">
+                <a:solidFill>
+                  <a:srgbClr val="95A5A6"/>
+                </a:solidFill>
+                <a:effectLst/>
+                <a:highlight>
+                  <a:srgbClr val="FFFFFF"/>
+                </a:highlight>
+                <a:latin typeface="Consolas" panose="020B0609020204030204" pitchFamily="49" charset="0"/>
+              </a:rPr>
+              <a:t>  // initialize digital pin 13 as an output.</a:t>
+            </a:r>
+            <a:endParaRPr lang="en-US" b="0" dirty="0">
+              <a:solidFill>
+                <a:srgbClr val="4E5B61"/>
+              </a:solidFill>
+              <a:effectLst/>
+              <a:highlight>
+                <a:srgbClr val="FFFFFF"/>
+              </a:highlight>
+              <a:latin typeface="Consolas" panose="020B0609020204030204" pitchFamily="49" charset="0"/>
+            </a:endParaRPr>
+          </a:p>
+          <a:p>
+            <a:r>
+              <a:rPr lang="en-US" b="0" dirty="0">
+                <a:solidFill>
+                  <a:srgbClr val="4E5B61"/>
+                </a:solidFill>
+                <a:effectLst/>
+                <a:highlight>
+                  <a:srgbClr val="FFFFFF"/>
+                </a:highlight>
+                <a:latin typeface="Consolas" panose="020B0609020204030204" pitchFamily="49" charset="0"/>
+              </a:rPr>
+              <a:t>  </a:t>
+            </a:r>
+            <a:r>
+              <a:rPr lang="en-US" b="0" dirty="0">
+                <a:solidFill>
+                  <a:srgbClr val="D35400"/>
+                </a:solidFill>
+                <a:effectLst/>
+                <a:highlight>
+                  <a:srgbClr val="FFFFFF"/>
+                </a:highlight>
+                <a:latin typeface="Consolas" panose="020B0609020204030204" pitchFamily="49" charset="0"/>
+              </a:rPr>
+              <a:t>pinMode</a:t>
+            </a:r>
+            <a:r>
+              <a:rPr lang="en-US" b="0" dirty="0">
+                <a:solidFill>
+                  <a:srgbClr val="434F54"/>
+                </a:solidFill>
+                <a:effectLst/>
+                <a:highlight>
+                  <a:srgbClr val="FFFFFF"/>
+                </a:highlight>
+                <a:latin typeface="Consolas" panose="020B0609020204030204" pitchFamily="49" charset="0"/>
+              </a:rPr>
+              <a:t>(</a:t>
+            </a:r>
+            <a:r>
+              <a:rPr lang="en-US" b="0" dirty="0">
+                <a:solidFill>
+                  <a:srgbClr val="4E5B61"/>
+                </a:solidFill>
+                <a:effectLst/>
+                <a:highlight>
+                  <a:srgbClr val="FFFFFF"/>
+                </a:highlight>
+                <a:latin typeface="Consolas" panose="020B0609020204030204" pitchFamily="49" charset="0"/>
+              </a:rPr>
+              <a:t>ledPin, OUTPUT</a:t>
+            </a:r>
+            <a:r>
+              <a:rPr lang="en-US" b="0" dirty="0">
+                <a:solidFill>
+                  <a:srgbClr val="434F54"/>
+                </a:solidFill>
+                <a:effectLst/>
+                <a:highlight>
+                  <a:srgbClr val="FFFFFF"/>
+                </a:highlight>
+                <a:latin typeface="Consolas" panose="020B0609020204030204" pitchFamily="49" charset="0"/>
+              </a:rPr>
+              <a:t>)</a:t>
+            </a:r>
+            <a:r>
+              <a:rPr lang="en-US" b="0" dirty="0">
+                <a:solidFill>
+                  <a:srgbClr val="4E5B61"/>
+                </a:solidFill>
+                <a:effectLst/>
+                <a:highlight>
+                  <a:srgbClr val="FFFFFF"/>
+                </a:highlight>
+                <a:latin typeface="Consolas" panose="020B0609020204030204" pitchFamily="49" charset="0"/>
+              </a:rPr>
+              <a:t>;</a:t>
+            </a:r>
+          </a:p>
+          <a:p>
+            <a:r>
+              <a:rPr lang="en-US" b="0" dirty="0">
+                <a:solidFill>
+                  <a:srgbClr val="434F54"/>
+                </a:solidFill>
+                <a:effectLst/>
+                <a:highlight>
+                  <a:srgbClr val="FFFFFF"/>
+                </a:highlight>
+                <a:latin typeface="Consolas" panose="020B0609020204030204" pitchFamily="49" charset="0"/>
+              </a:rPr>
+              <a:t>}</a:t>
+            </a:r>
+            <a:endParaRPr lang="en-US" b="0" dirty="0">
+              <a:solidFill>
+                <a:srgbClr val="4E5B61"/>
+              </a:solidFill>
+              <a:effectLst/>
+              <a:highlight>
+                <a:srgbClr val="FFFFFF"/>
+              </a:highlight>
+              <a:latin typeface="Consolas" panose="020B0609020204030204" pitchFamily="49" charset="0"/>
+            </a:endParaRPr>
+          </a:p>
+          <a:p>
+            <a:br>
+              <a:rPr lang="en-US" b="0" dirty="0">
+                <a:solidFill>
+                  <a:srgbClr val="4E5B61"/>
+                </a:solidFill>
+                <a:effectLst/>
+                <a:highlight>
+                  <a:srgbClr val="FFFFFF"/>
+                </a:highlight>
+                <a:latin typeface="Consolas" panose="020B0609020204030204" pitchFamily="49" charset="0"/>
+              </a:rPr>
+            </a:br>
+            <a:r>
+              <a:rPr lang="en-US" b="0" dirty="0">
+                <a:solidFill>
+                  <a:srgbClr val="00979D"/>
+                </a:solidFill>
+                <a:effectLst/>
+                <a:highlight>
+                  <a:srgbClr val="FFFFFF"/>
+                </a:highlight>
+                <a:latin typeface="Consolas" panose="020B0609020204030204" pitchFamily="49" charset="0"/>
+              </a:rPr>
+              <a:t>void</a:t>
+            </a:r>
+            <a:r>
+              <a:rPr lang="en-US" b="0" dirty="0">
+                <a:solidFill>
+                  <a:srgbClr val="4E5B61"/>
+                </a:solidFill>
+                <a:effectLst/>
+                <a:highlight>
+                  <a:srgbClr val="FFFFFF"/>
+                </a:highlight>
+                <a:latin typeface="Consolas" panose="020B0609020204030204" pitchFamily="49" charset="0"/>
+              </a:rPr>
+              <a:t> </a:t>
+            </a:r>
+            <a:r>
+              <a:rPr lang="en-US" b="0" dirty="0">
+                <a:solidFill>
+                  <a:srgbClr val="D35400"/>
+                </a:solidFill>
+                <a:effectLst/>
+                <a:highlight>
+                  <a:srgbClr val="FFFFFF"/>
+                </a:highlight>
+                <a:latin typeface="Consolas" panose="020B0609020204030204" pitchFamily="49" charset="0"/>
+              </a:rPr>
+              <a:t>loop</a:t>
+            </a:r>
+            <a:r>
+              <a:rPr lang="en-US" b="0" dirty="0">
+                <a:solidFill>
+                  <a:srgbClr val="434F54"/>
+                </a:solidFill>
+                <a:effectLst/>
+                <a:highlight>
+                  <a:srgbClr val="FFFFFF"/>
+                </a:highlight>
+                <a:latin typeface="Consolas" panose="020B0609020204030204" pitchFamily="49" charset="0"/>
+              </a:rPr>
+              <a:t>()</a:t>
+            </a:r>
+            <a:r>
+              <a:rPr lang="en-US" b="0" dirty="0">
+                <a:solidFill>
+                  <a:srgbClr val="4E5B61"/>
+                </a:solidFill>
+                <a:effectLst/>
+                <a:highlight>
+                  <a:srgbClr val="FFFFFF"/>
+                </a:highlight>
+                <a:latin typeface="Consolas" panose="020B0609020204030204" pitchFamily="49" charset="0"/>
+              </a:rPr>
+              <a:t> </a:t>
+            </a:r>
+            <a:r>
+              <a:rPr lang="en-US" b="0" dirty="0">
+                <a:solidFill>
+                  <a:srgbClr val="434F54"/>
+                </a:solidFill>
+                <a:effectLst/>
+                <a:highlight>
+                  <a:srgbClr val="FFFFFF"/>
+                </a:highlight>
+                <a:latin typeface="Consolas" panose="020B0609020204030204" pitchFamily="49" charset="0"/>
+              </a:rPr>
+              <a:t>{</a:t>
+            </a:r>
+            <a:endParaRPr lang="en-US" b="0" dirty="0">
+              <a:solidFill>
+                <a:srgbClr val="4E5B61"/>
+              </a:solidFill>
+              <a:effectLst/>
+              <a:highlight>
+                <a:srgbClr val="FFFFFF"/>
+              </a:highlight>
+              <a:latin typeface="Consolas" panose="020B0609020204030204" pitchFamily="49" charset="0"/>
+            </a:endParaRPr>
+          </a:p>
+          <a:p>
+            <a:r>
+              <a:rPr lang="en-US" b="0" dirty="0">
+                <a:solidFill>
+                  <a:srgbClr val="4E5B61"/>
+                </a:solidFill>
+                <a:effectLst/>
+                <a:highlight>
+                  <a:srgbClr val="FFFFFF"/>
+                </a:highlight>
+                <a:latin typeface="Consolas" panose="020B0609020204030204" pitchFamily="49" charset="0"/>
+              </a:rPr>
+              <a:t>  </a:t>
+            </a:r>
+            <a:r>
+              <a:rPr lang="en-US" b="0" dirty="0">
+                <a:solidFill>
+                  <a:srgbClr val="D35400"/>
+                </a:solidFill>
+                <a:effectLst/>
+                <a:highlight>
+                  <a:srgbClr val="FFFFFF"/>
+                </a:highlight>
+                <a:latin typeface="Consolas" panose="020B0609020204030204" pitchFamily="49" charset="0"/>
+              </a:rPr>
+              <a:t>digitalWrite</a:t>
+            </a:r>
+            <a:r>
+              <a:rPr lang="en-US" b="0" dirty="0">
+                <a:solidFill>
+                  <a:srgbClr val="434F54"/>
+                </a:solidFill>
+                <a:effectLst/>
+                <a:highlight>
+                  <a:srgbClr val="FFFFFF"/>
+                </a:highlight>
+                <a:latin typeface="Consolas" panose="020B0609020204030204" pitchFamily="49" charset="0"/>
+              </a:rPr>
+              <a:t>(</a:t>
+            </a:r>
+            <a:r>
+              <a:rPr lang="en-US" b="0" dirty="0">
+                <a:solidFill>
+                  <a:srgbClr val="4E5B61"/>
+                </a:solidFill>
+                <a:effectLst/>
+                <a:highlight>
+                  <a:srgbClr val="FFFFFF"/>
+                </a:highlight>
+                <a:latin typeface="Consolas" panose="020B0609020204030204" pitchFamily="49" charset="0"/>
+              </a:rPr>
+              <a:t>ledPin, HIGH</a:t>
+            </a:r>
+            <a:r>
+              <a:rPr lang="en-US" b="0" dirty="0">
+                <a:solidFill>
+                  <a:srgbClr val="434F54"/>
+                </a:solidFill>
+                <a:effectLst/>
+                <a:highlight>
+                  <a:srgbClr val="FFFFFF"/>
+                </a:highlight>
+                <a:latin typeface="Consolas" panose="020B0609020204030204" pitchFamily="49" charset="0"/>
+              </a:rPr>
+              <a:t>)</a:t>
+            </a:r>
+            <a:r>
+              <a:rPr lang="en-US" b="0" dirty="0">
+                <a:solidFill>
+                  <a:srgbClr val="4E5B61"/>
+                </a:solidFill>
+                <a:effectLst/>
+                <a:highlight>
+                  <a:srgbClr val="FFFFFF"/>
+                </a:highlight>
+                <a:latin typeface="Consolas" panose="020B0609020204030204" pitchFamily="49" charset="0"/>
+              </a:rPr>
+              <a:t>;</a:t>
+            </a:r>
+            <a:r>
+              <a:rPr lang="en-US" b="0" dirty="0">
+                <a:solidFill>
+                  <a:srgbClr val="95A5A6"/>
+                </a:solidFill>
+                <a:effectLst/>
+                <a:highlight>
+                  <a:srgbClr val="FFFFFF"/>
+                </a:highlight>
+                <a:latin typeface="Consolas" panose="020B0609020204030204" pitchFamily="49" charset="0"/>
+              </a:rPr>
+              <a:t>  // turn the LED on (HIGH is the voltage level)</a:t>
+            </a:r>
+            <a:endParaRPr lang="en-US" b="0" dirty="0">
+              <a:solidFill>
+                <a:srgbClr val="4E5B61"/>
+              </a:solidFill>
+              <a:effectLst/>
+              <a:highlight>
+                <a:srgbClr val="FFFFFF"/>
+              </a:highlight>
+              <a:latin typeface="Consolas" panose="020B0609020204030204" pitchFamily="49" charset="0"/>
+            </a:endParaRPr>
+          </a:p>
+          <a:p>
+            <a:r>
+              <a:rPr lang="en-US" b="0" dirty="0">
+                <a:solidFill>
+                  <a:srgbClr val="4E5B61"/>
+                </a:solidFill>
+                <a:effectLst/>
+                <a:highlight>
+                  <a:srgbClr val="FFFFFF"/>
+                </a:highlight>
+                <a:latin typeface="Consolas" panose="020B0609020204030204" pitchFamily="49" charset="0"/>
+              </a:rPr>
+              <a:t>  </a:t>
+            </a:r>
+            <a:r>
+              <a:rPr lang="en-US" b="0" dirty="0">
+                <a:solidFill>
+                  <a:srgbClr val="D35400"/>
+                </a:solidFill>
+                <a:effectLst/>
+                <a:highlight>
+                  <a:srgbClr val="FFFFFF"/>
+                </a:highlight>
+                <a:latin typeface="Consolas" panose="020B0609020204030204" pitchFamily="49" charset="0"/>
+              </a:rPr>
+              <a:t>delay</a:t>
+            </a:r>
+            <a:r>
+              <a:rPr lang="en-US" b="0" dirty="0">
+                <a:solidFill>
+                  <a:srgbClr val="434F54"/>
+                </a:solidFill>
+                <a:effectLst/>
+                <a:highlight>
+                  <a:srgbClr val="FFFFFF"/>
+                </a:highlight>
+                <a:latin typeface="Consolas" panose="020B0609020204030204" pitchFamily="49" charset="0"/>
+              </a:rPr>
+              <a:t>(</a:t>
+            </a:r>
+            <a:r>
+              <a:rPr lang="en-US" b="0" dirty="0">
+                <a:solidFill>
+                  <a:srgbClr val="005C5F"/>
+                </a:solidFill>
+                <a:effectLst/>
+                <a:highlight>
+                  <a:srgbClr val="FFFFFF"/>
+                </a:highlight>
+                <a:latin typeface="Consolas" panose="020B0609020204030204" pitchFamily="49" charset="0"/>
+              </a:rPr>
+              <a:t>1000</a:t>
+            </a:r>
+            <a:r>
+              <a:rPr lang="en-US" b="0" dirty="0">
+                <a:solidFill>
+                  <a:srgbClr val="434F54"/>
+                </a:solidFill>
+                <a:effectLst/>
+                <a:highlight>
+                  <a:srgbClr val="FFFFFF"/>
+                </a:highlight>
+                <a:latin typeface="Consolas" panose="020B0609020204030204" pitchFamily="49" charset="0"/>
+              </a:rPr>
+              <a:t>)</a:t>
+            </a:r>
+            <a:r>
+              <a:rPr lang="en-US" b="0" dirty="0">
+                <a:solidFill>
+                  <a:srgbClr val="4E5B61"/>
+                </a:solidFill>
+                <a:effectLst/>
+                <a:highlight>
+                  <a:srgbClr val="FFFFFF"/>
+                </a:highlight>
+                <a:latin typeface="Consolas" panose="020B0609020204030204" pitchFamily="49" charset="0"/>
+              </a:rPr>
+              <a:t>;</a:t>
+            </a:r>
+            <a:r>
+              <a:rPr lang="en-US" b="0" dirty="0">
+                <a:solidFill>
+                  <a:srgbClr val="95A5A6"/>
+                </a:solidFill>
+                <a:effectLst/>
+                <a:highlight>
+                  <a:srgbClr val="FFFFFF"/>
+                </a:highlight>
+                <a:latin typeface="Consolas" panose="020B0609020204030204" pitchFamily="49" charset="0"/>
+              </a:rPr>
+              <a:t>                 // wait for a second</a:t>
+            </a:r>
+            <a:endParaRPr lang="en-US" b="0" dirty="0">
+              <a:solidFill>
+                <a:srgbClr val="4E5B61"/>
+              </a:solidFill>
+              <a:effectLst/>
+              <a:highlight>
+                <a:srgbClr val="FFFFFF"/>
+              </a:highlight>
+              <a:latin typeface="Consolas" panose="020B0609020204030204" pitchFamily="49" charset="0"/>
+            </a:endParaRPr>
+          </a:p>
+          <a:p>
+            <a:r>
+              <a:rPr lang="en-US" b="0" dirty="0">
+                <a:solidFill>
+                  <a:srgbClr val="4E5B61"/>
+                </a:solidFill>
+                <a:effectLst/>
+                <a:highlight>
+                  <a:srgbClr val="FFFFFF"/>
+                </a:highlight>
+                <a:latin typeface="Consolas" panose="020B0609020204030204" pitchFamily="49" charset="0"/>
+              </a:rPr>
+              <a:t>  </a:t>
+            </a:r>
+            <a:r>
+              <a:rPr lang="en-US" b="0" dirty="0">
+                <a:solidFill>
+                  <a:srgbClr val="D35400"/>
+                </a:solidFill>
+                <a:effectLst/>
+                <a:highlight>
+                  <a:srgbClr val="FFFFFF"/>
+                </a:highlight>
+                <a:latin typeface="Consolas" panose="020B0609020204030204" pitchFamily="49" charset="0"/>
+              </a:rPr>
+              <a:t>digitalWrite</a:t>
+            </a:r>
+            <a:r>
+              <a:rPr lang="en-US" b="0" dirty="0">
+                <a:solidFill>
+                  <a:srgbClr val="434F54"/>
+                </a:solidFill>
+                <a:effectLst/>
+                <a:highlight>
+                  <a:srgbClr val="FFFFFF"/>
+                </a:highlight>
+                <a:latin typeface="Consolas" panose="020B0609020204030204" pitchFamily="49" charset="0"/>
+              </a:rPr>
+              <a:t>(</a:t>
+            </a:r>
+            <a:r>
+              <a:rPr lang="en-US" b="0" dirty="0">
+                <a:solidFill>
+                  <a:srgbClr val="4E5B61"/>
+                </a:solidFill>
+                <a:effectLst/>
+                <a:highlight>
+                  <a:srgbClr val="FFFFFF"/>
+                </a:highlight>
+                <a:latin typeface="Consolas" panose="020B0609020204030204" pitchFamily="49" charset="0"/>
+              </a:rPr>
+              <a:t>ledPin, LOW</a:t>
+            </a:r>
+            <a:r>
+              <a:rPr lang="en-US" b="0" dirty="0">
+                <a:solidFill>
+                  <a:srgbClr val="434F54"/>
+                </a:solidFill>
+                <a:effectLst/>
+                <a:highlight>
+                  <a:srgbClr val="FFFFFF"/>
+                </a:highlight>
+                <a:latin typeface="Consolas" panose="020B0609020204030204" pitchFamily="49" charset="0"/>
+              </a:rPr>
+              <a:t>)</a:t>
+            </a:r>
+            <a:r>
+              <a:rPr lang="en-US" b="0" dirty="0">
+                <a:solidFill>
+                  <a:srgbClr val="4E5B61"/>
+                </a:solidFill>
+                <a:effectLst/>
+                <a:highlight>
+                  <a:srgbClr val="FFFFFF"/>
+                </a:highlight>
+                <a:latin typeface="Consolas" panose="020B0609020204030204" pitchFamily="49" charset="0"/>
+              </a:rPr>
+              <a:t>;</a:t>
+            </a:r>
+            <a:r>
+              <a:rPr lang="en-US" b="0" dirty="0">
+                <a:solidFill>
+                  <a:srgbClr val="95A5A6"/>
+                </a:solidFill>
+                <a:effectLst/>
+                <a:highlight>
+                  <a:srgbClr val="FFFFFF"/>
+                </a:highlight>
+                <a:latin typeface="Consolas" panose="020B0609020204030204" pitchFamily="49" charset="0"/>
+              </a:rPr>
+              <a:t>   // turn the LED off by making the voltage LOW</a:t>
+            </a:r>
+            <a:endParaRPr lang="en-US" b="0" dirty="0">
+              <a:solidFill>
+                <a:srgbClr val="4E5B61"/>
+              </a:solidFill>
+              <a:effectLst/>
+              <a:highlight>
+                <a:srgbClr val="FFFFFF"/>
+              </a:highlight>
+              <a:latin typeface="Consolas" panose="020B0609020204030204" pitchFamily="49" charset="0"/>
+            </a:endParaRPr>
+          </a:p>
+          <a:p>
+            <a:r>
+              <a:rPr lang="en-US" b="0" dirty="0">
+                <a:solidFill>
+                  <a:srgbClr val="4E5B61"/>
+                </a:solidFill>
+                <a:effectLst/>
+                <a:highlight>
+                  <a:srgbClr val="FFFFFF"/>
+                </a:highlight>
+                <a:latin typeface="Consolas" panose="020B0609020204030204" pitchFamily="49" charset="0"/>
+              </a:rPr>
+              <a:t>  </a:t>
+            </a:r>
+            <a:r>
+              <a:rPr lang="en-US" b="0" dirty="0">
+                <a:solidFill>
+                  <a:srgbClr val="D35400"/>
+                </a:solidFill>
+                <a:effectLst/>
+                <a:highlight>
+                  <a:srgbClr val="FFFFFF"/>
+                </a:highlight>
+                <a:latin typeface="Consolas" panose="020B0609020204030204" pitchFamily="49" charset="0"/>
+              </a:rPr>
+              <a:t>delay</a:t>
+            </a:r>
+            <a:r>
+              <a:rPr lang="en-US" b="0" dirty="0">
+                <a:solidFill>
+                  <a:srgbClr val="434F54"/>
+                </a:solidFill>
+                <a:effectLst/>
+                <a:highlight>
+                  <a:srgbClr val="FFFFFF"/>
+                </a:highlight>
+                <a:latin typeface="Consolas" panose="020B0609020204030204" pitchFamily="49" charset="0"/>
+              </a:rPr>
+              <a:t>(</a:t>
+            </a:r>
+            <a:r>
+              <a:rPr lang="en-US" b="0" dirty="0">
+                <a:solidFill>
+                  <a:srgbClr val="005C5F"/>
+                </a:solidFill>
+                <a:effectLst/>
+                <a:highlight>
+                  <a:srgbClr val="FFFFFF"/>
+                </a:highlight>
+                <a:latin typeface="Consolas" panose="020B0609020204030204" pitchFamily="49" charset="0"/>
+              </a:rPr>
+              <a:t>1000</a:t>
+            </a:r>
+            <a:r>
+              <a:rPr lang="en-US" b="0" dirty="0">
+                <a:solidFill>
+                  <a:srgbClr val="434F54"/>
+                </a:solidFill>
+                <a:effectLst/>
+                <a:highlight>
+                  <a:srgbClr val="FFFFFF"/>
+                </a:highlight>
+                <a:latin typeface="Consolas" panose="020B0609020204030204" pitchFamily="49" charset="0"/>
+              </a:rPr>
+              <a:t>)</a:t>
+            </a:r>
+            <a:r>
+              <a:rPr lang="en-US" b="0" dirty="0">
+                <a:solidFill>
+                  <a:srgbClr val="4E5B61"/>
+                </a:solidFill>
+                <a:effectLst/>
+                <a:highlight>
+                  <a:srgbClr val="FFFFFF"/>
+                </a:highlight>
+                <a:latin typeface="Consolas" panose="020B0609020204030204" pitchFamily="49" charset="0"/>
+              </a:rPr>
+              <a:t>;</a:t>
+            </a:r>
+            <a:r>
+              <a:rPr lang="en-US" b="0" dirty="0">
+                <a:solidFill>
+                  <a:srgbClr val="95A5A6"/>
+                </a:solidFill>
+                <a:effectLst/>
+                <a:highlight>
+                  <a:srgbClr val="FFFFFF"/>
+                </a:highlight>
+                <a:latin typeface="Consolas" panose="020B0609020204030204" pitchFamily="49" charset="0"/>
+              </a:rPr>
+              <a:t>                 // wait for a second</a:t>
+            </a:r>
+            <a:endParaRPr lang="en-US" b="0" dirty="0">
+              <a:solidFill>
+                <a:srgbClr val="4E5B61"/>
+              </a:solidFill>
+              <a:effectLst/>
+              <a:highlight>
+                <a:srgbClr val="FFFFFF"/>
+              </a:highlight>
+              <a:latin typeface="Consolas" panose="020B0609020204030204" pitchFamily="49" charset="0"/>
+            </a:endParaRPr>
+          </a:p>
+          <a:p>
+            <a:r>
+              <a:rPr lang="en-US" b="0" dirty="0">
+                <a:solidFill>
+                  <a:srgbClr val="434F54"/>
+                </a:solidFill>
+                <a:effectLst/>
+                <a:highlight>
+                  <a:srgbClr val="FFFFFF"/>
+                </a:highlight>
+                <a:latin typeface="Consolas" panose="020B0609020204030204" pitchFamily="49" charset="0"/>
+              </a:rPr>
+              <a:t>}</a:t>
+            </a:r>
+            <a:endParaRPr lang="en-US" b="0" dirty="0">
+              <a:solidFill>
+                <a:srgbClr val="4E5B61"/>
+              </a:solidFill>
+              <a:effectLst/>
+              <a:highlight>
+                <a:srgbClr val="FFFFFF"/>
+              </a:highlight>
+              <a:latin typeface="Consolas" panose="020B0609020204030204" pitchFamily="49" charset="0"/>
+            </a:endParaRPr>
           </a:p>
         </p:txBody>
       </p:sp>
@@ -6402,7 +7931,7 @@
           <p:cNvPr id="6" name="TextBox 5">
             <a:extLst>
               <a:ext uri="{FF2B5EF4-FFF2-40B4-BE49-F238E27FC236}">
-                <a16:creationId xmlns:a16="http://schemas.microsoft.com/office/drawing/2014/main" id="{033F3A53-0848-A541-3A21-95F39E63FA9C}"/>
+                <a16:creationId xmlns:a16="http://schemas.microsoft.com/office/drawing/2014/main" id="{69E9ADFA-8FA1-7696-4A38-FBA113937576}"/>
               </a:ext>
             </a:extLst>
           </p:cNvPr>
@@ -6411,8 +7940,8 @@
         </p:nvSpPr>
         <p:spPr>
           <a:xfrm>
-            <a:off x="344128" y="777154"/>
-            <a:ext cx="9704440" cy="1569660"/>
+            <a:off x="347494" y="3640456"/>
+            <a:ext cx="3195485" cy="830997"/>
           </a:xfrm>
           <a:prstGeom prst="rect">
             <a:avLst/>
@@ -6425,120 +7954,105 @@
           </a:bodyPr>
           <a:lstStyle/>
           <a:p>
-            <a:pPr marL="342900" indent="-342900">
-              <a:buAutoNum type="arabicPeriod"/>
-            </a:pPr>
             <a:r>
               <a:rPr lang="en-US" sz="2400" dirty="0"/>
-              <a:t>Let’s start using Arduino Cloud </a:t>
-            </a:r>
-            <a:r>
-              <a:rPr lang="en-US" sz="2400" dirty="0">
-                <a:hlinkClick r:id="rId2"/>
-              </a:rPr>
-              <a:t>https://cloud.arduino.cc/?gad_source=1&amp;gbraid=0AAAAACbEa84ofzTu6ZqKTNrvfC00iYeOK&amp;gclid=CjwKCAjwlbu2BhA3EiwA3yXyuyRs52Pa6IMOnlhxourjC6ZlovP8tXgo2qfPTzjIE3rKl_pymK4kmxoCDSMQAvD_BwE</a:t>
-            </a:r>
-            <a:endParaRPr lang="en-US" sz="2400" dirty="0"/>
+              <a:t>Notice: The frequency of the LED is 0.5 Hz</a:t>
+            </a:r>
           </a:p>
         </p:txBody>
       </p:sp>
-      <p:pic>
-        <p:nvPicPr>
-          <p:cNvPr id="8" name="Picture 7" descr="A screenshot of a computer&#10;&#10;Description automatically generated">
+      <p:sp>
+        <p:nvSpPr>
+          <p:cNvPr id="7" name="Arrow: Right 6">
             <a:extLst>
               <a:ext uri="{FF2B5EF4-FFF2-40B4-BE49-F238E27FC236}">
-                <a16:creationId xmlns:a16="http://schemas.microsoft.com/office/drawing/2014/main" id="{BB286569-7715-2BB8-15D8-D8BF25B58AAA}"/>
+                <a16:creationId xmlns:a16="http://schemas.microsoft.com/office/drawing/2014/main" id="{7A795859-E7CF-B970-08F2-1C6E163586C8}"/>
               </a:ext>
             </a:extLst>
           </p:cNvPr>
-          <p:cNvPicPr>
-            <a:picLocks noChangeAspect="1"/>
-          </p:cNvPicPr>
-          <p:nvPr/>
-        </p:nvPicPr>
-        <p:blipFill>
-          <a:blip r:embed="rId3">
-            <a:extLst>
-              <a:ext uri="{28A0092B-C50C-407E-A947-70E740481C1C}">
-                <a14:useLocalDpi xmlns:a14="http://schemas.microsoft.com/office/drawing/2010/main" val="0"/>
-              </a:ext>
-            </a:extLst>
-          </a:blip>
-          <a:stretch>
-            <a:fillRect/>
-          </a:stretch>
-        </p:blipFill>
-        <p:spPr>
-          <a:xfrm>
-            <a:off x="7580672" y="2539165"/>
-            <a:ext cx="4395018" cy="2401482"/>
-          </a:xfrm>
-          <a:prstGeom prst="rect">
-            <a:avLst/>
-          </a:prstGeom>
-        </p:spPr>
-      </p:pic>
-      <p:sp>
-        <p:nvSpPr>
-          <p:cNvPr id="9" name="TextBox 8">
-            <a:extLst>
-              <a:ext uri="{FF2B5EF4-FFF2-40B4-BE49-F238E27FC236}">
-                <a16:creationId xmlns:a16="http://schemas.microsoft.com/office/drawing/2014/main" id="{811CE4E2-602D-61FC-1E39-5982E78E02E0}"/>
-              </a:ext>
-            </a:extLst>
-          </p:cNvPr>
-          <p:cNvSpPr txBox="1"/>
+          <p:cNvSpPr/>
           <p:nvPr/>
         </p:nvSpPr>
         <p:spPr>
           <a:xfrm>
-            <a:off x="344127" y="2861188"/>
-            <a:ext cx="7452855" cy="2400657"/>
+            <a:off x="3395495" y="3785683"/>
+            <a:ext cx="1248694" cy="220833"/>
           </a:xfrm>
-          <a:prstGeom prst="rect">
+          <a:prstGeom prst="rightArrow">
             <a:avLst/>
           </a:prstGeom>
-          <a:noFill/>
         </p:spPr>
+        <p:style>
+          <a:lnRef idx="1">
+            <a:schemeClr val="dk1"/>
+          </a:lnRef>
+          <a:fillRef idx="3">
+            <a:schemeClr val="dk1"/>
+          </a:fillRef>
+          <a:effectRef idx="2">
+            <a:schemeClr val="dk1"/>
+          </a:effectRef>
+          <a:fontRef idx="minor">
+            <a:schemeClr val="lt1"/>
+          </a:fontRef>
+        </p:style>
         <p:txBody>
-          <a:bodyPr wrap="square" rtlCol="0">
-            <a:spAutoFit/>
-          </a:bodyPr>
+          <a:bodyPr rtlCol="0" anchor="ctr"/>
           <a:lstStyle/>
           <a:p>
-            <a:r>
-              <a:rPr lang="en-US" sz="2400" dirty="0"/>
-              <a:t>2. You need to install Arduino Cloud Agent:</a:t>
-            </a:r>
-            <a:br>
-              <a:rPr lang="en-US" dirty="0"/>
-            </a:br>
-            <a:r>
-              <a:rPr lang="en-US" dirty="0">
-                <a:solidFill>
-                  <a:schemeClr val="tx2">
-                    <a:lumMod val="50000"/>
-                  </a:schemeClr>
-                </a:solidFill>
-              </a:rPr>
-              <a:t>You need Arduino cloud agent to be able to detect or interact with your Arduino board, because web browsers don’t have direct access to your computer’s hardware. </a:t>
-            </a:r>
-          </a:p>
-          <a:p>
-            <a:r>
-              <a:rPr lang="en-US" sz="2400" dirty="0">
-                <a:hlinkClick r:id="rId4"/>
-              </a:rPr>
-              <a:t>https://support.arduino.cc/hc/en-us/articles/360014869820-Install-the-Arduino-Create-Agent</a:t>
-            </a:r>
-            <a:endParaRPr lang="en-US" sz="2400" dirty="0"/>
+            <a:pPr algn="ctr"/>
+            <a:endParaRPr lang="en-US"/>
+          </a:p>
+        </p:txBody>
+      </p:sp>
+      <p:sp>
+        <p:nvSpPr>
+          <p:cNvPr id="2" name="Arrow: Right 1">
+            <a:extLst>
+              <a:ext uri="{FF2B5EF4-FFF2-40B4-BE49-F238E27FC236}">
+                <a16:creationId xmlns:a16="http://schemas.microsoft.com/office/drawing/2014/main" id="{7E170278-051F-2251-B184-5A9C7F9580C0}"/>
+              </a:ext>
+            </a:extLst>
+          </p:cNvPr>
+          <p:cNvSpPr/>
+          <p:nvPr/>
+        </p:nvSpPr>
+        <p:spPr>
+          <a:xfrm rot="2618650">
+            <a:off x="3163855" y="4373184"/>
+            <a:ext cx="1711974" cy="217346"/>
+          </a:xfrm>
+          <a:prstGeom prst="rightArrow">
+            <a:avLst/>
+          </a:prstGeom>
+        </p:spPr>
+        <p:style>
+          <a:lnRef idx="1">
+            <a:schemeClr val="dk1"/>
+          </a:lnRef>
+          <a:fillRef idx="3">
+            <a:schemeClr val="dk1"/>
+          </a:fillRef>
+          <a:effectRef idx="2">
+            <a:schemeClr val="dk1"/>
+          </a:effectRef>
+          <a:fontRef idx="minor">
+            <a:schemeClr val="lt1"/>
+          </a:fontRef>
+        </p:style>
+        <p:txBody>
+          <a:bodyPr rtlCol="0" anchor="ctr"/>
+          <a:lstStyle/>
+          <a:p>
+            <a:pPr algn="ctr"/>
+            <a:endParaRPr lang="en-US"/>
           </a:p>
         </p:txBody>
       </p:sp>
     </p:spTree>
     <p:extLst>
       <p:ext uri="{BB962C8B-B14F-4D97-AF65-F5344CB8AC3E}">
-        <p14:creationId xmlns:p14="http://schemas.microsoft.com/office/powerpoint/2010/main" val="2246603001"/>
+        <p14:creationId xmlns:p14="http://schemas.microsoft.com/office/powerpoint/2010/main" val="707570833"/>
       </p:ext>
     </p:extLst>
   </p:cSld>

--- a/assets/module-0-intro/mod-0-lecture-3-arduino-installation.pptx
+++ b/assets/module-0-intro/mod-0-lecture-3-arduino-installation.pptx
@@ -2,31 +2,34 @@
 <file path=ppt/presentation.xml><?xml version="1.0" encoding="utf-8"?>
 <p:presentation xmlns:a="http://schemas.openxmlformats.org/drawingml/2006/main" xmlns:r="http://schemas.openxmlformats.org/officeDocument/2006/relationships" xmlns:p="http://schemas.openxmlformats.org/presentationml/2006/main" saveSubsetFonts="1">
   <p:sldMasterIdLst>
-    <p:sldMasterId id="2147483660" r:id="rId1"/>
+    <p:sldMasterId id="2147483660" r:id="rId4"/>
   </p:sldMasterIdLst>
   <p:notesMasterIdLst>
-    <p:notesMasterId r:id="rId21"/>
+    <p:notesMasterId r:id="rId27"/>
   </p:notesMasterIdLst>
   <p:sldIdLst>
-    <p:sldId id="263" r:id="rId2"/>
-    <p:sldId id="262" r:id="rId3"/>
-    <p:sldId id="275" r:id="rId4"/>
-    <p:sldId id="264" r:id="rId5"/>
-    <p:sldId id="271" r:id="rId6"/>
-    <p:sldId id="266" r:id="rId7"/>
-    <p:sldId id="265" r:id="rId8"/>
-    <p:sldId id="267" r:id="rId9"/>
-    <p:sldId id="279" r:id="rId10"/>
-    <p:sldId id="268" r:id="rId11"/>
-    <p:sldId id="269" r:id="rId12"/>
-    <p:sldId id="270" r:id="rId13"/>
-    <p:sldId id="272" r:id="rId14"/>
-    <p:sldId id="276" r:id="rId15"/>
-    <p:sldId id="278" r:id="rId16"/>
-    <p:sldId id="257" r:id="rId17"/>
-    <p:sldId id="259" r:id="rId18"/>
-    <p:sldId id="260" r:id="rId19"/>
-    <p:sldId id="277" r:id="rId20"/>
+    <p:sldId id="263" r:id="rId5"/>
+    <p:sldId id="262" r:id="rId6"/>
+    <p:sldId id="275" r:id="rId7"/>
+    <p:sldId id="264" r:id="rId8"/>
+    <p:sldId id="271" r:id="rId9"/>
+    <p:sldId id="266" r:id="rId10"/>
+    <p:sldId id="265" r:id="rId11"/>
+    <p:sldId id="267" r:id="rId12"/>
+    <p:sldId id="279" r:id="rId13"/>
+    <p:sldId id="276" r:id="rId14"/>
+    <p:sldId id="278" r:id="rId15"/>
+    <p:sldId id="257" r:id="rId16"/>
+    <p:sldId id="259" r:id="rId17"/>
+    <p:sldId id="260" r:id="rId18"/>
+    <p:sldId id="268" r:id="rId19"/>
+    <p:sldId id="269" r:id="rId20"/>
+    <p:sldId id="280" r:id="rId21"/>
+    <p:sldId id="270" r:id="rId22"/>
+    <p:sldId id="281" r:id="rId23"/>
+    <p:sldId id="282" r:id="rId24"/>
+    <p:sldId id="272" r:id="rId25"/>
+    <p:sldId id="277" r:id="rId26"/>
   </p:sldIdLst>
   <p:sldSz cx="12192000" cy="6858000"/>
   <p:notesSz cx="6858000" cy="9144000"/>
@@ -133,6 +136,63 @@
 </p:presentation>
 </file>
 
+<file path=ppt/ink/ink1.xml><?xml version="1.0" encoding="utf-8"?>
+<inkml:ink xmlns:inkml="http://www.w3.org/2003/InkML">
+  <inkml:definitions>
+    <inkml:context xml:id="ctx0">
+      <inkml:inkSource xml:id="inkSrc0">
+        <inkml:traceFormat>
+          <inkml:channel name="X" type="integer" max="4480" units="cm"/>
+          <inkml:channel name="Y" type="integer" max="1440" units="cm"/>
+          <inkml:channel name="T" type="integer" max="2.14748E9" units="dev"/>
+        </inkml:traceFormat>
+        <inkml:channelProperties>
+          <inkml:channelProperty channel="X" name="resolution" value="130.23256" units="1/cm"/>
+          <inkml:channelProperty channel="Y" name="resolution" value="74.22681" units="1/cm"/>
+          <inkml:channelProperty channel="T" name="resolution" value="1" units="1/dev"/>
+        </inkml:channelProperties>
+      </inkml:inkSource>
+      <inkml:timestamp xml:id="ts0" timeString="2026-01-20T23:17:13.465"/>
+    </inkml:context>
+    <inkml:brush xml:id="br0">
+      <inkml:brushProperty name="width" value="0.05292" units="cm"/>
+      <inkml:brushProperty name="height" value="0.05292" units="cm"/>
+      <inkml:brushProperty name="color" value="#FF0000"/>
+    </inkml:brush>
+  </inkml:definitions>
+  <inkml:trace contextRef="#ctx0" brushRef="#br0">6555 4515 0</inkml:trace>
+  <inkml:trace contextRef="#ctx0" brushRef="#br0" timeOffset="4827.79">11935 6164 0</inkml:trace>
+</inkml:ink>
+</file>
+
+<file path=ppt/ink/ink2.xml><?xml version="1.0" encoding="utf-8"?>
+<inkml:ink xmlns:inkml="http://www.w3.org/2003/InkML">
+  <inkml:definitions>
+    <inkml:context xml:id="ctx0">
+      <inkml:inkSource xml:id="inkSrc0">
+        <inkml:traceFormat>
+          <inkml:channel name="X" type="integer" max="4480" units="cm"/>
+          <inkml:channel name="Y" type="integer" max="1440" units="cm"/>
+          <inkml:channel name="T" type="integer" max="2.14748E9" units="dev"/>
+        </inkml:traceFormat>
+        <inkml:channelProperties>
+          <inkml:channelProperty channel="X" name="resolution" value="130.23256" units="1/cm"/>
+          <inkml:channelProperty channel="Y" name="resolution" value="74.22681" units="1/cm"/>
+          <inkml:channelProperty channel="T" name="resolution" value="1" units="1/dev"/>
+        </inkml:channelProperties>
+      </inkml:inkSource>
+      <inkml:timestamp xml:id="ts0" timeString="2026-01-20T23:35:30.991"/>
+    </inkml:context>
+    <inkml:brush xml:id="br0">
+      <inkml:brushProperty name="width" value="0.05292" units="cm"/>
+      <inkml:brushProperty name="height" value="0.05292" units="cm"/>
+      <inkml:brushProperty name="color" value="#FF0000"/>
+    </inkml:brush>
+  </inkml:definitions>
+  <inkml:trace contextRef="#ctx0" brushRef="#br0">9956 11730 0</inkml:trace>
+</inkml:ink>
+</file>
+
 <file path=ppt/notesMasters/notesMaster1.xml><?xml version="1.0" encoding="utf-8"?>
 <p:notesMaster xmlns:a="http://schemas.openxmlformats.org/drawingml/2006/main" xmlns:r="http://schemas.openxmlformats.org/officeDocument/2006/relationships" xmlns:p="http://schemas.openxmlformats.org/presentationml/2006/main">
   <p:cSld>
@@ -215,7 +275,7 @@
           <a:p>
             <a:fld id="{AB3190B2-75FE-3B4D-97E4-FA7B0E625342}" type="datetimeFigureOut">
               <a:rPr lang="en-US" smtClean="0"/>
-              <a:t>1/19/2026</a:t>
+              <a:t>1/26/2026</a:t>
             </a:fld>
             <a:endParaRPr lang="en-US"/>
           </a:p>
@@ -727,7 +787,7 @@
           <a:p>
             <a:fld id="{7C65A655-3FFE-460B-9705-8E515D426F54}" type="datetime1">
               <a:rPr lang="en-US" smtClean="0"/>
-              <a:t>1/19/2026</a:t>
+              <a:t>1/26/2026</a:t>
             </a:fld>
             <a:endParaRPr lang="en-US"/>
           </a:p>
@@ -937,7 +997,7 @@
           <a:p>
             <a:fld id="{F4546C6D-E384-488B-8EC7-0E77255F2527}" type="datetimeFigureOut">
               <a:rPr lang="en-US" smtClean="0"/>
-              <a:t>1/19/2026</a:t>
+              <a:t>1/26/2026</a:t>
             </a:fld>
             <a:endParaRPr lang="en-US"/>
           </a:p>
@@ -1551,6 +1611,1286 @@
   <p:cSld>
     <p:spTree>
       <p:nvGrpSpPr>
+        <p:cNvPr id="1" name="">
+          <a:extLst>
+            <a:ext uri="{FF2B5EF4-FFF2-40B4-BE49-F238E27FC236}">
+              <a16:creationId xmlns:a16="http://schemas.microsoft.com/office/drawing/2014/main" id="{622F81C9-E395-46DA-46EF-3A95608E6E3B}"/>
+            </a:ext>
+          </a:extLst>
+        </p:cNvPr>
+        <p:cNvGrpSpPr/>
+        <p:nvPr/>
+      </p:nvGrpSpPr>
+      <p:grpSpPr>
+        <a:xfrm>
+          <a:off x="0" y="0"/>
+          <a:ext cx="0" cy="0"/>
+          <a:chOff x="0" y="0"/>
+          <a:chExt cx="0" cy="0"/>
+        </a:xfrm>
+      </p:grpSpPr>
+      <p:sp>
+        <p:nvSpPr>
+          <p:cNvPr id="3" name="TextBox 2">
+            <a:extLst>
+              <a:ext uri="{FF2B5EF4-FFF2-40B4-BE49-F238E27FC236}">
+                <a16:creationId xmlns:a16="http://schemas.microsoft.com/office/drawing/2014/main" id="{9034C2C8-4EEB-BA59-E965-DA2CF9E9FCB5}"/>
+              </a:ext>
+            </a:extLst>
+          </p:cNvPr>
+          <p:cNvSpPr txBox="1"/>
+          <p:nvPr/>
+        </p:nvSpPr>
+        <p:spPr>
+          <a:xfrm>
+            <a:off x="587829" y="942592"/>
+            <a:ext cx="6139542" cy="923330"/>
+          </a:xfrm>
+          <a:prstGeom prst="rect">
+            <a:avLst/>
+          </a:prstGeom>
+          <a:noFill/>
+        </p:spPr>
+        <p:txBody>
+          <a:bodyPr wrap="square">
+            <a:spAutoFit/>
+          </a:bodyPr>
+          <a:lstStyle/>
+          <a:p>
+            <a:pPr marL="342900" indent="-342900">
+              <a:buFont typeface="Arial" panose="020B0604020202020204" pitchFamily="34" charset="0"/>
+              <a:buChar char="•"/>
+            </a:pPr>
+            <a:r>
+              <a:rPr lang="en-US" sz="1800" dirty="0"/>
+              <a:t>Testing pressure sensor</a:t>
+            </a:r>
+          </a:p>
+          <a:p>
+            <a:r>
+              <a:rPr lang="en-US" sz="1800" dirty="0">
+                <a:hlinkClick r:id="rId2"/>
+              </a:rPr>
+              <a:t>https://app.arduino.cc/sketches/4573b54c-d240-41b0-94a4-4ac0dca97e66?view-mode=preview</a:t>
+            </a:r>
+            <a:endParaRPr lang="en-US" sz="1800" dirty="0"/>
+          </a:p>
+        </p:txBody>
+      </p:sp>
+      <p:sp>
+        <p:nvSpPr>
+          <p:cNvPr id="4" name="TextBox 3">
+            <a:extLst>
+              <a:ext uri="{FF2B5EF4-FFF2-40B4-BE49-F238E27FC236}">
+                <a16:creationId xmlns:a16="http://schemas.microsoft.com/office/drawing/2014/main" id="{14E84F60-52DF-1554-8009-3D200F7E70EB}"/>
+              </a:ext>
+            </a:extLst>
+          </p:cNvPr>
+          <p:cNvSpPr txBox="1"/>
+          <p:nvPr/>
+        </p:nvSpPr>
+        <p:spPr>
+          <a:xfrm>
+            <a:off x="2654709" y="195833"/>
+            <a:ext cx="6243486" cy="523220"/>
+          </a:xfrm>
+          <a:prstGeom prst="rect">
+            <a:avLst/>
+          </a:prstGeom>
+          <a:noFill/>
+        </p:spPr>
+        <p:txBody>
+          <a:bodyPr wrap="square" rtlCol="0">
+            <a:spAutoFit/>
+          </a:bodyPr>
+          <a:lstStyle/>
+          <a:p>
+            <a:pPr algn="ctr"/>
+            <a:r>
+              <a:rPr lang="en-US" sz="2800" dirty="0"/>
+              <a:t>Using the Serial Monitor</a:t>
+            </a:r>
+          </a:p>
+        </p:txBody>
+      </p:sp>
+      <p:pic>
+        <p:nvPicPr>
+          <p:cNvPr id="6" name="Picture 5">
+            <a:extLst>
+              <a:ext uri="{FF2B5EF4-FFF2-40B4-BE49-F238E27FC236}">
+                <a16:creationId xmlns:a16="http://schemas.microsoft.com/office/drawing/2014/main" id="{7A76D8E6-1AD9-9F8E-F839-199E19BDFB35}"/>
+              </a:ext>
+            </a:extLst>
+          </p:cNvPr>
+          <p:cNvPicPr>
+            <a:picLocks noChangeAspect="1"/>
+          </p:cNvPicPr>
+          <p:nvPr/>
+        </p:nvPicPr>
+        <p:blipFill>
+          <a:blip r:embed="rId3"/>
+          <a:stretch>
+            <a:fillRect/>
+          </a:stretch>
+        </p:blipFill>
+        <p:spPr>
+          <a:xfrm>
+            <a:off x="7313161" y="942592"/>
+            <a:ext cx="4462013" cy="4288971"/>
+          </a:xfrm>
+          <a:prstGeom prst="rect">
+            <a:avLst/>
+          </a:prstGeom>
+        </p:spPr>
+      </p:pic>
+      <p:sp>
+        <p:nvSpPr>
+          <p:cNvPr id="13" name="TextBox 12">
+            <a:extLst>
+              <a:ext uri="{FF2B5EF4-FFF2-40B4-BE49-F238E27FC236}">
+                <a16:creationId xmlns:a16="http://schemas.microsoft.com/office/drawing/2014/main" id="{4D725B8F-F04E-B9B2-91F4-3D7667A3D9F0}"/>
+              </a:ext>
+            </a:extLst>
+          </p:cNvPr>
+          <p:cNvSpPr txBox="1"/>
+          <p:nvPr/>
+        </p:nvSpPr>
+        <p:spPr>
+          <a:xfrm>
+            <a:off x="1522981" y="3320534"/>
+            <a:ext cx="4573019" cy="369332"/>
+          </a:xfrm>
+          <a:prstGeom prst="rect">
+            <a:avLst/>
+          </a:prstGeom>
+          <a:noFill/>
+        </p:spPr>
+        <p:txBody>
+          <a:bodyPr wrap="square">
+            <a:spAutoFit/>
+          </a:bodyPr>
+          <a:lstStyle/>
+          <a:p>
+            <a:r>
+              <a:rPr lang="en-US" sz="1800" dirty="0"/>
+              <a:t>Your serial monitor output should look like this</a:t>
+            </a:r>
+          </a:p>
+        </p:txBody>
+      </p:sp>
+      <p:cxnSp>
+        <p:nvCxnSpPr>
+          <p:cNvPr id="15" name="Straight Arrow Connector 14">
+            <a:extLst>
+              <a:ext uri="{FF2B5EF4-FFF2-40B4-BE49-F238E27FC236}">
+                <a16:creationId xmlns:a16="http://schemas.microsoft.com/office/drawing/2014/main" id="{DD7E77A0-645D-5E3A-D792-327603742F47}"/>
+              </a:ext>
+            </a:extLst>
+          </p:cNvPr>
+          <p:cNvCxnSpPr>
+            <a:cxnSpLocks/>
+            <a:stCxn id="13" idx="3"/>
+          </p:cNvCxnSpPr>
+          <p:nvPr/>
+        </p:nvCxnSpPr>
+        <p:spPr>
+          <a:xfrm>
+            <a:off x="6096000" y="3505200"/>
+            <a:ext cx="1217161" cy="0"/>
+          </a:xfrm>
+          <a:prstGeom prst="straightConnector1">
+            <a:avLst/>
+          </a:prstGeom>
+          <a:ln>
+            <a:tailEnd type="triangle"/>
+          </a:ln>
+          <a:effectLst/>
+        </p:spPr>
+        <p:style>
+          <a:lnRef idx="2">
+            <a:schemeClr val="dk1"/>
+          </a:lnRef>
+          <a:fillRef idx="0">
+            <a:schemeClr val="dk1"/>
+          </a:fillRef>
+          <a:effectRef idx="1">
+            <a:schemeClr val="dk1"/>
+          </a:effectRef>
+          <a:fontRef idx="minor">
+            <a:schemeClr val="tx1"/>
+          </a:fontRef>
+        </p:style>
+      </p:cxnSp>
+      <mc:AlternateContent xmlns:mc="http://schemas.openxmlformats.org/markup-compatibility/2006" xmlns:p14="http://schemas.microsoft.com/office/powerpoint/2010/main">
+        <mc:Choice Requires="p14">
+          <p:contentPart p14:bwMode="auto" r:id="rId4">
+            <p14:nvContentPartPr>
+              <p14:cNvPr id="2" name="Ink 1">
+                <a:extLst>
+                  <a:ext uri="{FF2B5EF4-FFF2-40B4-BE49-F238E27FC236}">
+                    <a16:creationId xmlns:a16="http://schemas.microsoft.com/office/drawing/2014/main" id="{B9839A57-012F-E8A4-0F3A-84176680A697}"/>
+                  </a:ext>
+                </a:extLst>
+              </p14:cNvPr>
+              <p14:cNvContentPartPr/>
+              <p14:nvPr/>
+            </p14:nvContentPartPr>
+            <p14:xfrm>
+              <a:off x="2359800" y="1625400"/>
+              <a:ext cx="1937160" cy="594000"/>
+            </p14:xfrm>
+          </p:contentPart>
+        </mc:Choice>
+        <mc:Fallback xmlns="">
+          <p:pic>
+            <p:nvPicPr>
+              <p:cNvPr id="2" name="Ink 1">
+                <a:extLst>
+                  <a:ext uri="{FF2B5EF4-FFF2-40B4-BE49-F238E27FC236}">
+                    <a16:creationId xmlns:a16="http://schemas.microsoft.com/office/drawing/2014/main" id="{B9839A57-012F-E8A4-0F3A-84176680A697}"/>
+                  </a:ext>
+                </a:extLst>
+              </p:cNvPr>
+              <p:cNvPicPr/>
+              <p:nvPr/>
+            </p:nvPicPr>
+            <p:blipFill>
+              <a:blip r:embed="rId5"/>
+              <a:stretch>
+                <a:fillRect/>
+              </a:stretch>
+            </p:blipFill>
+            <p:spPr>
+              <a:xfrm>
+                <a:off x="2350440" y="1616040"/>
+                <a:ext cx="1955880" cy="612720"/>
+              </a:xfrm>
+              <a:prstGeom prst="rect">
+                <a:avLst/>
+              </a:prstGeom>
+            </p:spPr>
+          </p:pic>
+        </mc:Fallback>
+      </mc:AlternateContent>
+    </p:spTree>
+    <p:extLst>
+      <p:ext uri="{BB962C8B-B14F-4D97-AF65-F5344CB8AC3E}">
+        <p14:creationId xmlns:p14="http://schemas.microsoft.com/office/powerpoint/2010/main" val="1904014361"/>
+      </p:ext>
+    </p:extLst>
+  </p:cSld>
+  <p:clrMapOvr>
+    <a:masterClrMapping/>
+  </p:clrMapOvr>
+</p:sld>
+</file>
+
+<file path=ppt/slides/slide11.xml><?xml version="1.0" encoding="utf-8"?>
+<p:sld xmlns:a="http://schemas.openxmlformats.org/drawingml/2006/main" xmlns:r="http://schemas.openxmlformats.org/officeDocument/2006/relationships" xmlns:p="http://schemas.openxmlformats.org/presentationml/2006/main">
+  <p:cSld>
+    <p:spTree>
+      <p:nvGrpSpPr>
+        <p:cNvPr id="1" name="">
+          <a:extLst>
+            <a:ext uri="{FF2B5EF4-FFF2-40B4-BE49-F238E27FC236}">
+              <a16:creationId xmlns:a16="http://schemas.microsoft.com/office/drawing/2014/main" id="{622F81C9-E395-46DA-46EF-3A95608E6E3B}"/>
+            </a:ext>
+          </a:extLst>
+        </p:cNvPr>
+        <p:cNvGrpSpPr/>
+        <p:nvPr/>
+      </p:nvGrpSpPr>
+      <p:grpSpPr>
+        <a:xfrm>
+          <a:off x="0" y="0"/>
+          <a:ext cx="0" cy="0"/>
+          <a:chOff x="0" y="0"/>
+          <a:chExt cx="0" cy="0"/>
+        </a:xfrm>
+      </p:grpSpPr>
+      <p:sp>
+        <p:nvSpPr>
+          <p:cNvPr id="4" name="TextBox 3">
+            <a:extLst>
+              <a:ext uri="{FF2B5EF4-FFF2-40B4-BE49-F238E27FC236}">
+                <a16:creationId xmlns:a16="http://schemas.microsoft.com/office/drawing/2014/main" id="{14E84F60-52DF-1554-8009-3D200F7E70EB}"/>
+              </a:ext>
+            </a:extLst>
+          </p:cNvPr>
+          <p:cNvSpPr txBox="1"/>
+          <p:nvPr/>
+        </p:nvSpPr>
+        <p:spPr>
+          <a:xfrm>
+            <a:off x="2654709" y="195833"/>
+            <a:ext cx="6243486" cy="523220"/>
+          </a:xfrm>
+          <a:prstGeom prst="rect">
+            <a:avLst/>
+          </a:prstGeom>
+          <a:noFill/>
+        </p:spPr>
+        <p:txBody>
+          <a:bodyPr wrap="square" rtlCol="0">
+            <a:spAutoFit/>
+          </a:bodyPr>
+          <a:lstStyle/>
+          <a:p>
+            <a:pPr algn="ctr"/>
+            <a:r>
+              <a:rPr lang="en-US" sz="2800" dirty="0"/>
+              <a:t>Using the Serial Plotter</a:t>
+            </a:r>
+          </a:p>
+        </p:txBody>
+      </p:sp>
+      <p:sp>
+        <p:nvSpPr>
+          <p:cNvPr id="13" name="TextBox 12">
+            <a:extLst>
+              <a:ext uri="{FF2B5EF4-FFF2-40B4-BE49-F238E27FC236}">
+                <a16:creationId xmlns:a16="http://schemas.microsoft.com/office/drawing/2014/main" id="{4D725B8F-F04E-B9B2-91F4-3D7667A3D9F0}"/>
+              </a:ext>
+            </a:extLst>
+          </p:cNvPr>
+          <p:cNvSpPr txBox="1"/>
+          <p:nvPr/>
+        </p:nvSpPr>
+        <p:spPr>
+          <a:xfrm>
+            <a:off x="789056" y="1503946"/>
+            <a:ext cx="3963418" cy="1200329"/>
+          </a:xfrm>
+          <a:prstGeom prst="rect">
+            <a:avLst/>
+          </a:prstGeom>
+          <a:noFill/>
+        </p:spPr>
+        <p:txBody>
+          <a:bodyPr wrap="square">
+            <a:spAutoFit/>
+          </a:bodyPr>
+          <a:lstStyle/>
+          <a:p>
+            <a:pPr marL="285750" indent="-285750">
+              <a:buFontTx/>
+              <a:buChar char="-"/>
+            </a:pPr>
+            <a:r>
+              <a:rPr lang="en-US" sz="1800" dirty="0"/>
+              <a:t>Just like Serial monitor</a:t>
+            </a:r>
+          </a:p>
+          <a:p>
+            <a:pPr marL="285750" indent="-285750">
+              <a:buFontTx/>
+              <a:buChar char="-"/>
+            </a:pPr>
+            <a:r>
+              <a:rPr lang="en-US" dirty="0"/>
+              <a:t>Plots values with time in x axis</a:t>
+            </a:r>
+          </a:p>
+          <a:p>
+            <a:pPr marL="285750" indent="-285750">
+              <a:buFontTx/>
+              <a:buChar char="-"/>
+            </a:pPr>
+            <a:r>
+              <a:rPr lang="en-US" sz="1800" dirty="0"/>
+              <a:t>Use </a:t>
+            </a:r>
+            <a:r>
+              <a:rPr lang="en-US" sz="1800" dirty="0" err="1"/>
+              <a:t>Serial.println</a:t>
+            </a:r>
+            <a:r>
+              <a:rPr lang="en-US" sz="1800" dirty="0"/>
+              <a:t>() instead of </a:t>
+            </a:r>
+            <a:r>
+              <a:rPr lang="en-US" sz="1800" dirty="0" err="1"/>
+              <a:t>Serial.print</a:t>
+            </a:r>
+            <a:r>
+              <a:rPr lang="en-US" sz="1800" dirty="0"/>
+              <a:t>()</a:t>
+            </a:r>
+          </a:p>
+        </p:txBody>
+      </p:sp>
+      <p:pic>
+        <p:nvPicPr>
+          <p:cNvPr id="5" name="Picture 4" descr="A screenshot of a graph">
+            <a:extLst>
+              <a:ext uri="{FF2B5EF4-FFF2-40B4-BE49-F238E27FC236}">
+                <a16:creationId xmlns:a16="http://schemas.microsoft.com/office/drawing/2014/main" id="{7ECEEC65-95B8-8524-BBF8-C7B6571D4430}"/>
+              </a:ext>
+            </a:extLst>
+          </p:cNvPr>
+          <p:cNvPicPr>
+            <a:picLocks noChangeAspect="1"/>
+          </p:cNvPicPr>
+          <p:nvPr/>
+        </p:nvPicPr>
+        <p:blipFill>
+          <a:blip r:embed="rId2">
+            <a:extLst>
+              <a:ext uri="{28A0092B-C50C-407E-A947-70E740481C1C}">
+                <a14:useLocalDpi xmlns:a14="http://schemas.microsoft.com/office/drawing/2010/main" val="0"/>
+              </a:ext>
+            </a:extLst>
+          </a:blip>
+          <a:stretch>
+            <a:fillRect/>
+          </a:stretch>
+        </p:blipFill>
+        <p:spPr>
+          <a:xfrm>
+            <a:off x="5089001" y="1407691"/>
+            <a:ext cx="6600872" cy="4093434"/>
+          </a:xfrm>
+          <a:prstGeom prst="rect">
+            <a:avLst/>
+          </a:prstGeom>
+        </p:spPr>
+      </p:pic>
+      <p:sp>
+        <p:nvSpPr>
+          <p:cNvPr id="8" name="TextBox 7">
+            <a:extLst>
+              <a:ext uri="{FF2B5EF4-FFF2-40B4-BE49-F238E27FC236}">
+                <a16:creationId xmlns:a16="http://schemas.microsoft.com/office/drawing/2014/main" id="{CF377AD5-D695-57AF-3925-24CD28B34D23}"/>
+              </a:ext>
+            </a:extLst>
+          </p:cNvPr>
+          <p:cNvSpPr txBox="1"/>
+          <p:nvPr/>
+        </p:nvSpPr>
+        <p:spPr>
+          <a:xfrm>
+            <a:off x="1228208" y="3105834"/>
+            <a:ext cx="3085114" cy="646331"/>
+          </a:xfrm>
+          <a:prstGeom prst="rect">
+            <a:avLst/>
+          </a:prstGeom>
+          <a:noFill/>
+        </p:spPr>
+        <p:txBody>
+          <a:bodyPr wrap="square">
+            <a:spAutoFit/>
+          </a:bodyPr>
+          <a:lstStyle/>
+          <a:p>
+            <a:r>
+              <a:rPr lang="en-US" sz="1800" dirty="0"/>
+              <a:t>Your serial plotter output should look like this</a:t>
+            </a:r>
+          </a:p>
+        </p:txBody>
+      </p:sp>
+      <p:cxnSp>
+        <p:nvCxnSpPr>
+          <p:cNvPr id="9" name="Straight Arrow Connector 8">
+            <a:extLst>
+              <a:ext uri="{FF2B5EF4-FFF2-40B4-BE49-F238E27FC236}">
+                <a16:creationId xmlns:a16="http://schemas.microsoft.com/office/drawing/2014/main" id="{20A9C3EA-AB6B-C55D-B4BC-69A748F301A1}"/>
+              </a:ext>
+            </a:extLst>
+          </p:cNvPr>
+          <p:cNvCxnSpPr>
+            <a:cxnSpLocks/>
+            <a:stCxn id="8" idx="3"/>
+            <a:endCxn id="5" idx="1"/>
+          </p:cNvCxnSpPr>
+          <p:nvPr/>
+        </p:nvCxnSpPr>
+        <p:spPr>
+          <a:xfrm>
+            <a:off x="4313322" y="3429000"/>
+            <a:ext cx="775679" cy="25408"/>
+          </a:xfrm>
+          <a:prstGeom prst="straightConnector1">
+            <a:avLst/>
+          </a:prstGeom>
+          <a:ln>
+            <a:tailEnd type="triangle"/>
+          </a:ln>
+          <a:effectLst/>
+        </p:spPr>
+        <p:style>
+          <a:lnRef idx="2">
+            <a:schemeClr val="dk1"/>
+          </a:lnRef>
+          <a:fillRef idx="0">
+            <a:schemeClr val="dk1"/>
+          </a:fillRef>
+          <a:effectRef idx="1">
+            <a:schemeClr val="dk1"/>
+          </a:effectRef>
+          <a:fontRef idx="minor">
+            <a:schemeClr val="tx1"/>
+          </a:fontRef>
+        </p:style>
+      </p:cxnSp>
+      <mc:AlternateContent xmlns:mc="http://schemas.openxmlformats.org/markup-compatibility/2006" xmlns:p14="http://schemas.microsoft.com/office/powerpoint/2010/main">
+        <mc:Choice Requires="p14">
+          <p:contentPart p14:bwMode="auto" r:id="rId3">
+            <p14:nvContentPartPr>
+              <p14:cNvPr id="2" name="Ink 1">
+                <a:extLst>
+                  <a:ext uri="{FF2B5EF4-FFF2-40B4-BE49-F238E27FC236}">
+                    <a16:creationId xmlns:a16="http://schemas.microsoft.com/office/drawing/2014/main" id="{43F8F56F-32E0-7DEF-1406-22F57E5D8518}"/>
+                  </a:ext>
+                </a:extLst>
+              </p14:cNvPr>
+              <p14:cNvContentPartPr/>
+              <p14:nvPr/>
+            </p14:nvContentPartPr>
+            <p14:xfrm>
+              <a:off x="3584160" y="4222800"/>
+              <a:ext cx="360" cy="360"/>
+            </p14:xfrm>
+          </p:contentPart>
+        </mc:Choice>
+        <mc:Fallback xmlns="">
+          <p:pic>
+            <p:nvPicPr>
+              <p:cNvPr id="2" name="Ink 1">
+                <a:extLst>
+                  <a:ext uri="{FF2B5EF4-FFF2-40B4-BE49-F238E27FC236}">
+                    <a16:creationId xmlns:a16="http://schemas.microsoft.com/office/drawing/2014/main" id="{43F8F56F-32E0-7DEF-1406-22F57E5D8518}"/>
+                  </a:ext>
+                </a:extLst>
+              </p:cNvPr>
+              <p:cNvPicPr/>
+              <p:nvPr/>
+            </p:nvPicPr>
+            <p:blipFill>
+              <a:blip r:embed="rId4"/>
+              <a:stretch>
+                <a:fillRect/>
+              </a:stretch>
+            </p:blipFill>
+            <p:spPr>
+              <a:xfrm>
+                <a:off x="3574800" y="4213440"/>
+                <a:ext cx="19080" cy="19080"/>
+              </a:xfrm>
+              <a:prstGeom prst="rect">
+                <a:avLst/>
+              </a:prstGeom>
+            </p:spPr>
+          </p:pic>
+        </mc:Fallback>
+      </mc:AlternateContent>
+    </p:spTree>
+    <p:extLst>
+      <p:ext uri="{BB962C8B-B14F-4D97-AF65-F5344CB8AC3E}">
+        <p14:creationId xmlns:p14="http://schemas.microsoft.com/office/powerpoint/2010/main" val="2327076991"/>
+      </p:ext>
+    </p:extLst>
+  </p:cSld>
+  <p:clrMapOvr>
+    <a:masterClrMapping/>
+  </p:clrMapOvr>
+</p:sld>
+</file>
+
+<file path=ppt/slides/slide12.xml><?xml version="1.0" encoding="utf-8"?>
+<p:sld xmlns:a="http://schemas.openxmlformats.org/drawingml/2006/main" xmlns:r="http://schemas.openxmlformats.org/officeDocument/2006/relationships" xmlns:p="http://schemas.openxmlformats.org/presentationml/2006/main">
+  <p:cSld>
+    <p:spTree>
+      <p:nvGrpSpPr>
+        <p:cNvPr id="1" name=""/>
+        <p:cNvGrpSpPr/>
+        <p:nvPr/>
+      </p:nvGrpSpPr>
+      <p:grpSpPr>
+        <a:xfrm>
+          <a:off x="0" y="0"/>
+          <a:ext cx="0" cy="0"/>
+          <a:chOff x="0" y="0"/>
+          <a:chExt cx="0" cy="0"/>
+        </a:xfrm>
+      </p:grpSpPr>
+      <p:sp>
+        <p:nvSpPr>
+          <p:cNvPr id="7" name="TextBox 6">
+            <a:extLst>
+              <a:ext uri="{FF2B5EF4-FFF2-40B4-BE49-F238E27FC236}">
+                <a16:creationId xmlns:a16="http://schemas.microsoft.com/office/drawing/2014/main" id="{D988588E-5773-6DA8-3962-F0C82EB6039D}"/>
+              </a:ext>
+            </a:extLst>
+          </p:cNvPr>
+          <p:cNvSpPr txBox="1"/>
+          <p:nvPr/>
+        </p:nvSpPr>
+        <p:spPr>
+          <a:xfrm>
+            <a:off x="703006" y="1539876"/>
+            <a:ext cx="7447935" cy="3477875"/>
+          </a:xfrm>
+          <a:prstGeom prst="rect">
+            <a:avLst/>
+          </a:prstGeom>
+          <a:noFill/>
+        </p:spPr>
+        <p:txBody>
+          <a:bodyPr wrap="square">
+            <a:spAutoFit/>
+          </a:bodyPr>
+          <a:lstStyle/>
+          <a:p>
+            <a:endParaRPr lang="en-US" sz="2000" b="1" dirty="0">
+              <a:solidFill>
+                <a:schemeClr val="bg2">
+                  <a:lumMod val="10000"/>
+                </a:schemeClr>
+              </a:solidFill>
+            </a:endParaRPr>
+          </a:p>
+          <a:p>
+            <a:pPr>
+              <a:buFont typeface="Arial" panose="020B0604020202020204" pitchFamily="34" charset="0"/>
+              <a:buChar char="•"/>
+            </a:pPr>
+            <a:r>
+              <a:rPr lang="en-US" sz="2000" b="1" dirty="0">
+                <a:solidFill>
+                  <a:schemeClr val="bg2">
+                    <a:lumMod val="10000"/>
+                  </a:schemeClr>
+                </a:solidFill>
+              </a:rPr>
+              <a:t>APDS9960</a:t>
+            </a:r>
+            <a:r>
+              <a:rPr lang="en-US" sz="2000" dirty="0">
+                <a:solidFill>
+                  <a:schemeClr val="bg2">
+                    <a:lumMod val="10000"/>
+                  </a:schemeClr>
+                </a:solidFill>
+              </a:rPr>
+              <a:t>: Detects ambient light, color, proximity, and gestures.</a:t>
+            </a:r>
+          </a:p>
+          <a:p>
+            <a:pPr>
+              <a:buFont typeface="Arial" panose="020B0604020202020204" pitchFamily="34" charset="0"/>
+              <a:buChar char="•"/>
+            </a:pPr>
+            <a:endParaRPr lang="en-US" sz="2000" dirty="0">
+              <a:solidFill>
+                <a:schemeClr val="bg2">
+                  <a:lumMod val="10000"/>
+                </a:schemeClr>
+              </a:solidFill>
+            </a:endParaRPr>
+          </a:p>
+          <a:p>
+            <a:pPr>
+              <a:buFont typeface="Arial" panose="020B0604020202020204" pitchFamily="34" charset="0"/>
+              <a:buChar char="•"/>
+            </a:pPr>
+            <a:r>
+              <a:rPr lang="en-US" sz="2000" b="1" dirty="0">
+                <a:solidFill>
+                  <a:schemeClr val="bg2">
+                    <a:lumMod val="10000"/>
+                  </a:schemeClr>
+                </a:solidFill>
+              </a:rPr>
+              <a:t>LPS22HB</a:t>
+            </a:r>
+            <a:r>
+              <a:rPr lang="en-US" sz="2000" dirty="0">
+                <a:solidFill>
+                  <a:schemeClr val="bg2">
+                    <a:lumMod val="10000"/>
+                  </a:schemeClr>
+                </a:solidFill>
+              </a:rPr>
+              <a:t>: Measures atmospheric pressure </a:t>
+            </a:r>
+          </a:p>
+          <a:p>
+            <a:pPr>
+              <a:buFont typeface="Arial" panose="020B0604020202020204" pitchFamily="34" charset="0"/>
+              <a:buChar char="•"/>
+            </a:pPr>
+            <a:endParaRPr lang="en-US" sz="2000" b="1" dirty="0">
+              <a:solidFill>
+                <a:schemeClr val="bg2">
+                  <a:lumMod val="10000"/>
+                </a:schemeClr>
+              </a:solidFill>
+            </a:endParaRPr>
+          </a:p>
+          <a:p>
+            <a:pPr>
+              <a:buFont typeface="Arial" panose="020B0604020202020204" pitchFamily="34" charset="0"/>
+              <a:buChar char="•"/>
+            </a:pPr>
+            <a:r>
+              <a:rPr lang="en-US" sz="2000" b="1" dirty="0">
+                <a:solidFill>
+                  <a:schemeClr val="bg2">
+                    <a:lumMod val="10000"/>
+                  </a:schemeClr>
+                </a:solidFill>
+              </a:rPr>
+              <a:t>LSM9DS1</a:t>
+            </a:r>
+            <a:r>
+              <a:rPr lang="en-US" sz="2000" dirty="0">
+                <a:solidFill>
+                  <a:schemeClr val="bg2">
+                    <a:lumMod val="10000"/>
+                  </a:schemeClr>
+                </a:solidFill>
+              </a:rPr>
+              <a:t>: Tracks acceleration, rotation, and magnetic field orientation.</a:t>
+            </a:r>
+          </a:p>
+          <a:p>
+            <a:pPr>
+              <a:buFont typeface="Arial" panose="020B0604020202020204" pitchFamily="34" charset="0"/>
+              <a:buChar char="•"/>
+            </a:pPr>
+            <a:endParaRPr lang="en-US" sz="2000" dirty="0">
+              <a:solidFill>
+                <a:schemeClr val="bg2">
+                  <a:lumMod val="10000"/>
+                </a:schemeClr>
+              </a:solidFill>
+            </a:endParaRPr>
+          </a:p>
+          <a:p>
+            <a:pPr>
+              <a:buFont typeface="Arial" panose="020B0604020202020204" pitchFamily="34" charset="0"/>
+              <a:buChar char="•"/>
+            </a:pPr>
+            <a:r>
+              <a:rPr lang="en-US" sz="2000" b="1" dirty="0">
+                <a:solidFill>
+                  <a:schemeClr val="bg2">
+                    <a:lumMod val="10000"/>
+                  </a:schemeClr>
+                </a:solidFill>
+              </a:rPr>
+              <a:t>PDM Microphone</a:t>
+            </a:r>
+            <a:r>
+              <a:rPr lang="en-US" sz="2000" dirty="0">
+                <a:solidFill>
+                  <a:schemeClr val="bg2">
+                    <a:lumMod val="10000"/>
+                  </a:schemeClr>
+                </a:solidFill>
+              </a:rPr>
+              <a:t>: Captures and analyzes sound signals.</a:t>
+            </a:r>
+          </a:p>
+          <a:p>
+            <a:pPr>
+              <a:buFont typeface="Arial" panose="020B0604020202020204" pitchFamily="34" charset="0"/>
+              <a:buChar char="•"/>
+            </a:pPr>
+            <a:endParaRPr lang="en-US" sz="2000" dirty="0">
+              <a:solidFill>
+                <a:schemeClr val="bg2">
+                  <a:lumMod val="10000"/>
+                </a:schemeClr>
+              </a:solidFill>
+            </a:endParaRPr>
+          </a:p>
+          <a:p>
+            <a:pPr>
+              <a:buFont typeface="Arial" panose="020B0604020202020204" pitchFamily="34" charset="0"/>
+              <a:buChar char="•"/>
+            </a:pPr>
+            <a:r>
+              <a:rPr lang="en-US" sz="2000" b="1" dirty="0">
+                <a:solidFill>
+                  <a:schemeClr val="bg2">
+                    <a:lumMod val="10000"/>
+                  </a:schemeClr>
+                </a:solidFill>
+              </a:rPr>
+              <a:t>RGB LED</a:t>
+            </a:r>
+            <a:r>
+              <a:rPr lang="en-US" sz="2000" dirty="0">
+                <a:solidFill>
+                  <a:schemeClr val="bg2">
+                    <a:lumMod val="10000"/>
+                  </a:schemeClr>
+                </a:solidFill>
+              </a:rPr>
+              <a:t>: Provides visual feedback with controllable colors.</a:t>
+            </a:r>
+          </a:p>
+        </p:txBody>
+      </p:sp>
+      <p:sp>
+        <p:nvSpPr>
+          <p:cNvPr id="9" name="TextBox 8">
+            <a:extLst>
+              <a:ext uri="{FF2B5EF4-FFF2-40B4-BE49-F238E27FC236}">
+                <a16:creationId xmlns:a16="http://schemas.microsoft.com/office/drawing/2014/main" id="{7B3C7893-6A91-3985-385C-EA2252DE6AF5}"/>
+              </a:ext>
+            </a:extLst>
+          </p:cNvPr>
+          <p:cNvSpPr txBox="1"/>
+          <p:nvPr/>
+        </p:nvSpPr>
+        <p:spPr>
+          <a:xfrm>
+            <a:off x="703006" y="339547"/>
+            <a:ext cx="9011265" cy="1200329"/>
+          </a:xfrm>
+          <a:prstGeom prst="rect">
+            <a:avLst/>
+          </a:prstGeom>
+          <a:noFill/>
+        </p:spPr>
+        <p:txBody>
+          <a:bodyPr wrap="square">
+            <a:spAutoFit/>
+          </a:bodyPr>
+          <a:lstStyle/>
+          <a:p>
+            <a:r>
+              <a:rPr lang="en-US" sz="2400" dirty="0"/>
+              <a:t>The Arduino Nano 33 BLE is equipped with several built-in sensors, making it a powerful tool for various applications without needing additional hardware.</a:t>
+            </a:r>
+          </a:p>
+        </p:txBody>
+      </p:sp>
+    </p:spTree>
+    <p:extLst>
+      <p:ext uri="{BB962C8B-B14F-4D97-AF65-F5344CB8AC3E}">
+        <p14:creationId xmlns:p14="http://schemas.microsoft.com/office/powerpoint/2010/main" val="974600972"/>
+      </p:ext>
+    </p:extLst>
+  </p:cSld>
+  <p:clrMapOvr>
+    <a:masterClrMapping/>
+  </p:clrMapOvr>
+</p:sld>
+</file>
+
+<file path=ppt/slides/slide13.xml><?xml version="1.0" encoding="utf-8"?>
+<p:sld xmlns:a="http://schemas.openxmlformats.org/drawingml/2006/main" xmlns:r="http://schemas.openxmlformats.org/officeDocument/2006/relationships" xmlns:p="http://schemas.openxmlformats.org/presentationml/2006/main">
+  <p:cSld>
+    <p:spTree>
+      <p:nvGrpSpPr>
+        <p:cNvPr id="1" name=""/>
+        <p:cNvGrpSpPr/>
+        <p:nvPr/>
+      </p:nvGrpSpPr>
+      <p:grpSpPr>
+        <a:xfrm>
+          <a:off x="0" y="0"/>
+          <a:ext cx="0" cy="0"/>
+          <a:chOff x="0" y="0"/>
+          <a:chExt cx="0" cy="0"/>
+        </a:xfrm>
+      </p:grpSpPr>
+      <p:sp>
+        <p:nvSpPr>
+          <p:cNvPr id="3" name="TextBox 2">
+            <a:extLst>
+              <a:ext uri="{FF2B5EF4-FFF2-40B4-BE49-F238E27FC236}">
+                <a16:creationId xmlns:a16="http://schemas.microsoft.com/office/drawing/2014/main" id="{8AA2FE09-3EF5-DFC1-4DC9-D94B77C5107C}"/>
+              </a:ext>
+            </a:extLst>
+          </p:cNvPr>
+          <p:cNvSpPr txBox="1"/>
+          <p:nvPr/>
+        </p:nvSpPr>
+        <p:spPr>
+          <a:xfrm>
+            <a:off x="526027" y="575306"/>
+            <a:ext cx="9198076" cy="1323439"/>
+          </a:xfrm>
+          <a:prstGeom prst="rect">
+            <a:avLst/>
+          </a:prstGeom>
+          <a:noFill/>
+        </p:spPr>
+        <p:txBody>
+          <a:bodyPr wrap="square">
+            <a:spAutoFit/>
+          </a:bodyPr>
+          <a:lstStyle/>
+          <a:p>
+            <a:pPr marL="342900" indent="-342900" algn="just">
+              <a:buFont typeface="Arial" panose="020B0604020202020204" pitchFamily="34" charset="0"/>
+              <a:buChar char="•"/>
+            </a:pPr>
+            <a:r>
+              <a:rPr lang="en-US" sz="2000" b="1" dirty="0">
+                <a:solidFill>
+                  <a:schemeClr val="bg2">
+                    <a:lumMod val="10000"/>
+                  </a:schemeClr>
+                </a:solidFill>
+              </a:rPr>
+              <a:t>Color Detection</a:t>
+            </a:r>
+            <a:r>
+              <a:rPr lang="en-US" sz="2000" dirty="0">
+                <a:solidFill>
+                  <a:schemeClr val="bg2">
+                    <a:lumMod val="10000"/>
+                  </a:schemeClr>
+                </a:solidFill>
+              </a:rPr>
+              <a:t>: The Colorimeter function in the web app is designed to detect and analyze the color of objects in the sensor's view. The APDS9960 sensor can measure the intensity of red, green, and blue light (RGB values) that is reflected from an object or present in the environment.</a:t>
+            </a:r>
+          </a:p>
+        </p:txBody>
+      </p:sp>
+      <p:sp>
+        <p:nvSpPr>
+          <p:cNvPr id="6" name="TextBox 5">
+            <a:extLst>
+              <a:ext uri="{FF2B5EF4-FFF2-40B4-BE49-F238E27FC236}">
+                <a16:creationId xmlns:a16="http://schemas.microsoft.com/office/drawing/2014/main" id="{9C1412C6-3CAC-C57A-89FE-E7D223CAF19B}"/>
+              </a:ext>
+            </a:extLst>
+          </p:cNvPr>
+          <p:cNvSpPr txBox="1"/>
+          <p:nvPr/>
+        </p:nvSpPr>
+        <p:spPr>
+          <a:xfrm>
+            <a:off x="526026" y="2093162"/>
+            <a:ext cx="9198077" cy="1015663"/>
+          </a:xfrm>
+          <a:prstGeom prst="rect">
+            <a:avLst/>
+          </a:prstGeom>
+          <a:noFill/>
+        </p:spPr>
+        <p:txBody>
+          <a:bodyPr wrap="square">
+            <a:spAutoFit/>
+          </a:bodyPr>
+          <a:lstStyle/>
+          <a:p>
+            <a:pPr marL="342900" indent="-342900" algn="just">
+              <a:buFont typeface="Arial" panose="020B0604020202020204" pitchFamily="34" charset="0"/>
+              <a:buChar char="•"/>
+            </a:pPr>
+            <a:r>
+              <a:rPr lang="en-US" sz="2000" b="1" dirty="0">
+                <a:solidFill>
+                  <a:schemeClr val="bg2">
+                    <a:lumMod val="10000"/>
+                  </a:schemeClr>
+                </a:solidFill>
+              </a:rPr>
+              <a:t>Proximity Sensor</a:t>
+            </a:r>
+            <a:r>
+              <a:rPr lang="en-US" sz="2000" dirty="0">
+                <a:solidFill>
+                  <a:schemeClr val="bg2">
+                    <a:lumMod val="10000"/>
+                  </a:schemeClr>
+                </a:solidFill>
+              </a:rPr>
+              <a:t>: This sensor can detect objects within a certain distance, ranging from a few centimeters up to about 10 centimeters. It is commonly used in gesture control applications, where you can interact with devices without physical contact.</a:t>
+            </a:r>
+          </a:p>
+        </p:txBody>
+      </p:sp>
+      <p:sp>
+        <p:nvSpPr>
+          <p:cNvPr id="9" name="TextBox 8">
+            <a:extLst>
+              <a:ext uri="{FF2B5EF4-FFF2-40B4-BE49-F238E27FC236}">
+                <a16:creationId xmlns:a16="http://schemas.microsoft.com/office/drawing/2014/main" id="{B36F0D72-9B8A-24B6-1E3D-76C6C23DC01B}"/>
+              </a:ext>
+            </a:extLst>
+          </p:cNvPr>
+          <p:cNvSpPr txBox="1"/>
+          <p:nvPr/>
+        </p:nvSpPr>
+        <p:spPr>
+          <a:xfrm>
+            <a:off x="526026" y="3438436"/>
+            <a:ext cx="9050594" cy="1015663"/>
+          </a:xfrm>
+          <a:prstGeom prst="rect">
+            <a:avLst/>
+          </a:prstGeom>
+          <a:noFill/>
+        </p:spPr>
+        <p:txBody>
+          <a:bodyPr wrap="square">
+            <a:spAutoFit/>
+          </a:bodyPr>
+          <a:lstStyle/>
+          <a:p>
+            <a:pPr marL="342900" indent="-342900" algn="just">
+              <a:buFont typeface="Arial" panose="020B0604020202020204" pitchFamily="34" charset="0"/>
+              <a:buChar char="•"/>
+            </a:pPr>
+            <a:r>
+              <a:rPr lang="en-US" sz="2000" b="1" dirty="0">
+                <a:solidFill>
+                  <a:schemeClr val="bg2">
+                    <a:lumMod val="10000"/>
+                  </a:schemeClr>
+                </a:solidFill>
+              </a:rPr>
+              <a:t>Gesture Detection</a:t>
+            </a:r>
+            <a:r>
+              <a:rPr lang="en-US" sz="2000" dirty="0">
+                <a:solidFill>
+                  <a:schemeClr val="bg2">
+                    <a:lumMod val="10000"/>
+                  </a:schemeClr>
+                </a:solidFill>
+              </a:rPr>
+              <a:t>: The APDS9960 can recognize simple gestures like up, down, left, and right swipes. This feature enables touchless interaction with devices, such as controlling media playback or navigating menus with hand gestures.</a:t>
+            </a:r>
+          </a:p>
+        </p:txBody>
+      </p:sp>
+    </p:spTree>
+    <p:extLst>
+      <p:ext uri="{BB962C8B-B14F-4D97-AF65-F5344CB8AC3E}">
+        <p14:creationId xmlns:p14="http://schemas.microsoft.com/office/powerpoint/2010/main" val="1428431566"/>
+      </p:ext>
+    </p:extLst>
+  </p:cSld>
+  <p:clrMapOvr>
+    <a:masterClrMapping/>
+  </p:clrMapOvr>
+</p:sld>
+</file>
+
+<file path=ppt/slides/slide14.xml><?xml version="1.0" encoding="utf-8"?>
+<p:sld xmlns:a="http://schemas.openxmlformats.org/drawingml/2006/main" xmlns:r="http://schemas.openxmlformats.org/officeDocument/2006/relationships" xmlns:p="http://schemas.openxmlformats.org/presentationml/2006/main">
+  <p:cSld>
+    <p:spTree>
+      <p:nvGrpSpPr>
+        <p:cNvPr id="1" name=""/>
+        <p:cNvGrpSpPr/>
+        <p:nvPr/>
+      </p:nvGrpSpPr>
+      <p:grpSpPr>
+        <a:xfrm>
+          <a:off x="0" y="0"/>
+          <a:ext cx="0" cy="0"/>
+          <a:chOff x="0" y="0"/>
+          <a:chExt cx="0" cy="0"/>
+        </a:xfrm>
+      </p:grpSpPr>
+      <p:sp>
+        <p:nvSpPr>
+          <p:cNvPr id="5" name="TextBox 4">
+            <a:extLst>
+              <a:ext uri="{FF2B5EF4-FFF2-40B4-BE49-F238E27FC236}">
+                <a16:creationId xmlns:a16="http://schemas.microsoft.com/office/drawing/2014/main" id="{64855747-0F27-8AF2-4D5B-0318A6442D41}"/>
+              </a:ext>
+            </a:extLst>
+          </p:cNvPr>
+          <p:cNvSpPr txBox="1"/>
+          <p:nvPr/>
+        </p:nvSpPr>
+        <p:spPr>
+          <a:xfrm>
+            <a:off x="929148" y="461380"/>
+            <a:ext cx="8971936" cy="3170099"/>
+          </a:xfrm>
+          <a:prstGeom prst="rect">
+            <a:avLst/>
+          </a:prstGeom>
+          <a:noFill/>
+        </p:spPr>
+        <p:txBody>
+          <a:bodyPr wrap="square">
+            <a:spAutoFit/>
+          </a:bodyPr>
+          <a:lstStyle/>
+          <a:p>
+            <a:pPr algn="just">
+              <a:buFont typeface="Arial" panose="020B0604020202020204" pitchFamily="34" charset="0"/>
+              <a:buChar char="•"/>
+            </a:pPr>
+            <a:r>
+              <a:rPr lang="en-US" sz="2000" b="1" dirty="0">
+                <a:solidFill>
+                  <a:schemeClr val="bg2">
+                    <a:lumMod val="10000"/>
+                  </a:schemeClr>
+                </a:solidFill>
+              </a:rPr>
+              <a:t>Accelerometer</a:t>
+            </a:r>
+            <a:r>
+              <a:rPr lang="en-US" sz="2000" dirty="0">
+                <a:solidFill>
+                  <a:schemeClr val="bg2">
+                    <a:lumMod val="10000"/>
+                  </a:schemeClr>
+                </a:solidFill>
+              </a:rPr>
+              <a:t>: This sensor measures acceleration forces along the X, Y, and Z axes. It is used to detect movement, orientation, and vibration. Applications include motion tracking, tilt sensing, and detecting free fall in devices like smartphones and wearables.</a:t>
+            </a:r>
+          </a:p>
+          <a:p>
+            <a:pPr algn="just">
+              <a:buFont typeface="Arial" panose="020B0604020202020204" pitchFamily="34" charset="0"/>
+              <a:buChar char="•"/>
+            </a:pPr>
+            <a:endParaRPr lang="en-US" sz="2000" dirty="0">
+              <a:solidFill>
+                <a:schemeClr val="bg2">
+                  <a:lumMod val="10000"/>
+                </a:schemeClr>
+              </a:solidFill>
+            </a:endParaRPr>
+          </a:p>
+          <a:p>
+            <a:pPr algn="just">
+              <a:buFont typeface="Arial" panose="020B0604020202020204" pitchFamily="34" charset="0"/>
+              <a:buChar char="•"/>
+            </a:pPr>
+            <a:r>
+              <a:rPr lang="en-US" sz="2000" b="1" dirty="0">
+                <a:solidFill>
+                  <a:schemeClr val="bg2">
+                    <a:lumMod val="10000"/>
+                  </a:schemeClr>
+                </a:solidFill>
+              </a:rPr>
+              <a:t>Gyroscope</a:t>
+            </a:r>
+            <a:r>
+              <a:rPr lang="en-US" sz="2000" dirty="0">
+                <a:solidFill>
+                  <a:schemeClr val="bg2">
+                    <a:lumMod val="10000"/>
+                  </a:schemeClr>
+                </a:solidFill>
+              </a:rPr>
+              <a:t>: The gyroscope measures angular velocity (rotation) around the X, Y, and Z axes. It is used to detect and control the orientation of an object in 3D space. Common applications include stabilization in drones, gesture recognition, and gaming controllers.</a:t>
+            </a:r>
+          </a:p>
+          <a:p>
+            <a:pPr algn="just">
+              <a:buFont typeface="Arial" panose="020B0604020202020204" pitchFamily="34" charset="0"/>
+              <a:buChar char="•"/>
+            </a:pPr>
+            <a:endParaRPr lang="en-US" sz="2000" dirty="0">
+              <a:solidFill>
+                <a:schemeClr val="bg2">
+                  <a:lumMod val="10000"/>
+                </a:schemeClr>
+              </a:solidFill>
+            </a:endParaRPr>
+          </a:p>
+        </p:txBody>
+      </p:sp>
+      <p:sp>
+        <p:nvSpPr>
+          <p:cNvPr id="7" name="TextBox 6">
+            <a:extLst>
+              <a:ext uri="{FF2B5EF4-FFF2-40B4-BE49-F238E27FC236}">
+                <a16:creationId xmlns:a16="http://schemas.microsoft.com/office/drawing/2014/main" id="{FEB119C0-D6DE-0F86-8AC0-EAC8215FBE29}"/>
+              </a:ext>
+            </a:extLst>
+          </p:cNvPr>
+          <p:cNvSpPr txBox="1"/>
+          <p:nvPr/>
+        </p:nvSpPr>
+        <p:spPr>
+          <a:xfrm>
+            <a:off x="929147" y="3429000"/>
+            <a:ext cx="8971937" cy="2246769"/>
+          </a:xfrm>
+          <a:prstGeom prst="rect">
+            <a:avLst/>
+          </a:prstGeom>
+          <a:noFill/>
+        </p:spPr>
+        <p:txBody>
+          <a:bodyPr wrap="square">
+            <a:spAutoFit/>
+          </a:bodyPr>
+          <a:lstStyle/>
+          <a:p>
+            <a:pPr algn="just">
+              <a:buFont typeface="Arial" panose="020B0604020202020204" pitchFamily="34" charset="0"/>
+              <a:buChar char="•"/>
+            </a:pPr>
+            <a:r>
+              <a:rPr lang="en-US" sz="2000" b="1" dirty="0">
+                <a:solidFill>
+                  <a:schemeClr val="bg2">
+                    <a:lumMod val="10000"/>
+                  </a:schemeClr>
+                </a:solidFill>
+              </a:rPr>
+              <a:t>Microphone</a:t>
+            </a:r>
+            <a:r>
+              <a:rPr lang="en-US" sz="2000" dirty="0">
+                <a:solidFill>
+                  <a:schemeClr val="bg2">
+                    <a:lumMod val="10000"/>
+                  </a:schemeClr>
+                </a:solidFill>
+              </a:rPr>
+              <a:t>: The PDM microphone captures audio signals by converting sound waves into electrical signals. The microphone’s data is processed using an FFT (Fast Fourier Transform) to analyze the frequency components of the sound. </a:t>
+            </a:r>
+          </a:p>
+          <a:p>
+            <a:pPr algn="just">
+              <a:buFont typeface="Arial" panose="020B0604020202020204" pitchFamily="34" charset="0"/>
+              <a:buChar char="•"/>
+            </a:pPr>
+            <a:r>
+              <a:rPr lang="en-US" sz="2000" dirty="0">
+                <a:solidFill>
+                  <a:schemeClr val="bg2">
+                    <a:lumMod val="10000"/>
+                  </a:schemeClr>
+                </a:solidFill>
+              </a:rPr>
+              <a:t>Spectrogram is a visual representation of the spectrum of frequencies in a signal as it varies with time. In this case, the code is generating a spectrogram from audio data captured by a microphone, likely using the PDM (Pulse Density Modulation) microphone on the Arduino Nano 33 BLE Sense</a:t>
+            </a:r>
+          </a:p>
+        </p:txBody>
+      </p:sp>
+    </p:spTree>
+    <p:extLst>
+      <p:ext uri="{BB962C8B-B14F-4D97-AF65-F5344CB8AC3E}">
+        <p14:creationId xmlns:p14="http://schemas.microsoft.com/office/powerpoint/2010/main" val="1314376407"/>
+      </p:ext>
+    </p:extLst>
+  </p:cSld>
+  <p:clrMapOvr>
+    <a:masterClrMapping/>
+  </p:clrMapOvr>
+</p:sld>
+</file>
+
+<file path=ppt/slides/slide15.xml><?xml version="1.0" encoding="utf-8"?>
+<p:sld xmlns:a="http://schemas.openxmlformats.org/drawingml/2006/main" xmlns:r="http://schemas.openxmlformats.org/officeDocument/2006/relationships" xmlns:p="http://schemas.openxmlformats.org/presentationml/2006/main" show="0">
+  <p:cSld>
+    <p:spTree>
+      <p:nvGrpSpPr>
         <p:cNvPr id="1" name=""/>
         <p:cNvGrpSpPr/>
         <p:nvPr/>
@@ -1591,9 +2931,10 @@
           </a:bodyPr>
           <a:lstStyle/>
           <a:p>
+            <a:pPr algn="ctr"/>
             <a:r>
               <a:rPr lang="en-US" sz="2800" dirty="0"/>
-              <a:t>Streaming Sensor Data to a Web App</a:t>
+              <a:t>Arduino Cloud</a:t>
             </a:r>
           </a:p>
         </p:txBody>
@@ -1749,8 +3090,8 @@
 </p:sld>
 </file>
 
-<file path=ppt/slides/slide11.xml><?xml version="1.0" encoding="utf-8"?>
-<p:sld xmlns:a="http://schemas.openxmlformats.org/drawingml/2006/main" xmlns:r="http://schemas.openxmlformats.org/officeDocument/2006/relationships" xmlns:p="http://schemas.openxmlformats.org/presentationml/2006/main">
+<file path=ppt/slides/slide16.xml><?xml version="1.0" encoding="utf-8"?>
+<p:sld xmlns:a="http://schemas.openxmlformats.org/drawingml/2006/main" xmlns:r="http://schemas.openxmlformats.org/officeDocument/2006/relationships" xmlns:p="http://schemas.openxmlformats.org/presentationml/2006/main" show="0">
   <p:cSld>
     <p:spTree>
       <p:nvGrpSpPr>
@@ -2069,7 +3410,193 @@
 </p:sld>
 </file>
 
-<file path=ppt/slides/slide12.xml><?xml version="1.0" encoding="utf-8"?>
+<file path=ppt/slides/slide17.xml><?xml version="1.0" encoding="utf-8"?>
+<p:sld xmlns:a="http://schemas.openxmlformats.org/drawingml/2006/main" xmlns:r="http://schemas.openxmlformats.org/officeDocument/2006/relationships" xmlns:p="http://schemas.openxmlformats.org/presentationml/2006/main" show="0">
+  <p:cSld>
+    <p:spTree>
+      <p:nvGrpSpPr>
+        <p:cNvPr id="1" name="">
+          <a:extLst>
+            <a:ext uri="{FF2B5EF4-FFF2-40B4-BE49-F238E27FC236}">
+              <a16:creationId xmlns:a16="http://schemas.microsoft.com/office/drawing/2014/main" id="{6D8E4083-A117-C882-9B12-1C0988EA2A84}"/>
+            </a:ext>
+          </a:extLst>
+        </p:cNvPr>
+        <p:cNvGrpSpPr/>
+        <p:nvPr/>
+      </p:nvGrpSpPr>
+      <p:grpSpPr>
+        <a:xfrm>
+          <a:off x="0" y="0"/>
+          <a:ext cx="0" cy="0"/>
+          <a:chOff x="0" y="0"/>
+          <a:chExt cx="0" cy="0"/>
+        </a:xfrm>
+      </p:grpSpPr>
+      <p:sp>
+        <p:nvSpPr>
+          <p:cNvPr id="7" name="TextBox 6">
+            <a:extLst>
+              <a:ext uri="{FF2B5EF4-FFF2-40B4-BE49-F238E27FC236}">
+                <a16:creationId xmlns:a16="http://schemas.microsoft.com/office/drawing/2014/main" id="{06B2F089-2F6B-34B0-431F-211732D2B9A6}"/>
+              </a:ext>
+            </a:extLst>
+          </p:cNvPr>
+          <p:cNvSpPr txBox="1"/>
+          <p:nvPr/>
+        </p:nvSpPr>
+        <p:spPr>
+          <a:xfrm>
+            <a:off x="594852" y="1191001"/>
+            <a:ext cx="9807678" cy="830997"/>
+          </a:xfrm>
+          <a:prstGeom prst="rect">
+            <a:avLst/>
+          </a:prstGeom>
+          <a:noFill/>
+        </p:spPr>
+        <p:txBody>
+          <a:bodyPr wrap="square">
+            <a:spAutoFit/>
+          </a:bodyPr>
+          <a:lstStyle/>
+          <a:p>
+            <a:pPr marL="342900" indent="-342900">
+              <a:buFont typeface="Arial" panose="020B0604020202020204" pitchFamily="34" charset="0"/>
+              <a:buChar char="•"/>
+            </a:pPr>
+            <a:r>
+              <a:rPr lang="en-US" sz="2400" dirty="0"/>
+              <a:t>Webapp link:</a:t>
+            </a:r>
+            <a:br>
+              <a:rPr lang="en-US" sz="2400" dirty="0"/>
+            </a:br>
+            <a:r>
+              <a:rPr lang="en-US" sz="2400" dirty="0">
+                <a:hlinkClick r:id="rId2"/>
+              </a:rPr>
+              <a:t>https://arduino.github.io/ArduinoAI/BLESense-test-dashboard/</a:t>
+            </a:r>
+            <a:endParaRPr lang="en-US" sz="2400" dirty="0"/>
+          </a:p>
+        </p:txBody>
+      </p:sp>
+      <p:sp>
+        <p:nvSpPr>
+          <p:cNvPr id="8" name="TextBox 7">
+            <a:extLst>
+              <a:ext uri="{FF2B5EF4-FFF2-40B4-BE49-F238E27FC236}">
+                <a16:creationId xmlns:a16="http://schemas.microsoft.com/office/drawing/2014/main" id="{199E37C6-A05B-4F1C-33B9-8611B1F5CFBB}"/>
+              </a:ext>
+            </a:extLst>
+          </p:cNvPr>
+          <p:cNvSpPr txBox="1"/>
+          <p:nvPr/>
+        </p:nvSpPr>
+        <p:spPr>
+          <a:xfrm>
+            <a:off x="594852" y="2277638"/>
+            <a:ext cx="9547122" cy="2308324"/>
+          </a:xfrm>
+          <a:prstGeom prst="rect">
+            <a:avLst/>
+          </a:prstGeom>
+          <a:noFill/>
+        </p:spPr>
+        <p:txBody>
+          <a:bodyPr wrap="square" rtlCol="0">
+            <a:spAutoFit/>
+          </a:bodyPr>
+          <a:lstStyle/>
+          <a:p>
+            <a:pPr marL="342900" indent="-342900">
+              <a:buFont typeface="Arial" panose="020B0604020202020204" pitchFamily="34" charset="0"/>
+              <a:buChar char="•"/>
+            </a:pPr>
+            <a:r>
+              <a:rPr lang="en-US" sz="2400" dirty="0"/>
+              <a:t>Upload  this code to Arduino nano 33 </a:t>
+            </a:r>
+            <a:r>
+              <a:rPr lang="en-US" sz="2400" dirty="0" err="1"/>
+              <a:t>ble</a:t>
+            </a:r>
+            <a:r>
+              <a:rPr lang="en-US" sz="2400" dirty="0"/>
+              <a:t> to be able to stream the sensor data to a webapp</a:t>
+            </a:r>
+          </a:p>
+          <a:p>
+            <a:r>
+              <a:rPr lang="en-US" sz="2400" dirty="0">
+                <a:hlinkClick r:id="rId3"/>
+              </a:rPr>
+              <a:t>https://app.arduino.cc/sketches/71cdba81-1380-4aee-9cb1-14cde2da7607?view-mode=preview</a:t>
+            </a:r>
+            <a:endParaRPr lang="en-US" sz="2400" dirty="0"/>
+          </a:p>
+          <a:p>
+            <a:endParaRPr lang="en-US" sz="2400" dirty="0"/>
+          </a:p>
+          <a:p>
+            <a:pPr marL="342900" indent="-342900">
+              <a:buFont typeface="Arial" panose="020B0604020202020204" pitchFamily="34" charset="0"/>
+              <a:buChar char="•"/>
+            </a:pPr>
+            <a:endParaRPr lang="en-US" sz="2400" dirty="0"/>
+          </a:p>
+        </p:txBody>
+      </p:sp>
+      <p:sp>
+        <p:nvSpPr>
+          <p:cNvPr id="9" name="TextBox 8">
+            <a:extLst>
+              <a:ext uri="{FF2B5EF4-FFF2-40B4-BE49-F238E27FC236}">
+                <a16:creationId xmlns:a16="http://schemas.microsoft.com/office/drawing/2014/main" id="{6DD1C3F1-E949-C848-3835-EA9D50588C0C}"/>
+              </a:ext>
+            </a:extLst>
+          </p:cNvPr>
+          <p:cNvSpPr txBox="1"/>
+          <p:nvPr/>
+        </p:nvSpPr>
+        <p:spPr>
+          <a:xfrm>
+            <a:off x="2654709" y="195833"/>
+            <a:ext cx="6243486" cy="523220"/>
+          </a:xfrm>
+          <a:prstGeom prst="rect">
+            <a:avLst/>
+          </a:prstGeom>
+          <a:noFill/>
+        </p:spPr>
+        <p:txBody>
+          <a:bodyPr wrap="square" rtlCol="0">
+            <a:spAutoFit/>
+          </a:bodyPr>
+          <a:lstStyle/>
+          <a:p>
+            <a:r>
+              <a:rPr lang="en-US" sz="2800" dirty="0"/>
+              <a:t>How can we monitor the streamed data?</a:t>
+            </a:r>
+          </a:p>
+        </p:txBody>
+      </p:sp>
+    </p:spTree>
+    <p:extLst>
+      <p:ext uri="{BB962C8B-B14F-4D97-AF65-F5344CB8AC3E}">
+        <p14:creationId xmlns:p14="http://schemas.microsoft.com/office/powerpoint/2010/main" val="1825518292"/>
+      </p:ext>
+    </p:extLst>
+  </p:cSld>
+  <p:clrMapOvr>
+    <a:masterClrMapping/>
+  </p:clrMapOvr>
+</p:sld>
+</file>
+
+<file path=ppt/slides/slide18.xml><?xml version="1.0" encoding="utf-8"?>
 <p:sld xmlns:a="http://schemas.openxmlformats.org/drawingml/2006/main" xmlns:r="http://schemas.openxmlformats.org/officeDocument/2006/relationships" xmlns:p="http://schemas.openxmlformats.org/presentationml/2006/main">
   <p:cSld>
     <p:spTree>
@@ -2101,7 +3628,7 @@
         <p:spPr>
           <a:xfrm>
             <a:off x="594852" y="1191001"/>
-            <a:ext cx="9807678" cy="830997"/>
+            <a:ext cx="9807678" cy="1569660"/>
           </a:xfrm>
           <a:prstGeom prst="rect">
             <a:avLst/>
@@ -2120,16 +3647,15 @@
             </a:pPr>
             <a:r>
               <a:rPr lang="en-US" sz="2400" dirty="0"/>
-              <a:t>Webapp link:</a:t>
-            </a:r>
-            <a:br>
-              <a:rPr lang="en-US" sz="2400" dirty="0"/>
-            </a:br>
+              <a:t>Download sketch (use only this sketch, do not use any other!), and open a new sketch: </a:t>
+            </a:r>
+          </a:p>
+          <a:p>
             <a:r>
               <a:rPr lang="en-US" sz="2400" dirty="0">
                 <a:hlinkClick r:id="rId2"/>
               </a:rPr>
-              <a:t>https://arduino.github.io/ArduinoAI/BLESense-test-dashboard/</a:t>
+              <a:t>https://drive.google.com/file/d/1rVNuucGmdxWt-trwBi6jaY9e4JQl2uYB/view?usp=sharing</a:t>
             </a:r>
             <a:endParaRPr lang="en-US" sz="2400" dirty="0"/>
           </a:p>
@@ -2149,8 +3675,8 @@
         </p:nvSpPr>
         <p:spPr>
           <a:xfrm>
-            <a:off x="594852" y="2277638"/>
-            <a:ext cx="9547122" cy="2308324"/>
+            <a:off x="594852" y="2953830"/>
+            <a:ext cx="9547122" cy="1569660"/>
           </a:xfrm>
           <a:prstGeom prst="rect">
             <a:avLst/>
@@ -2169,15 +3695,7 @@
             </a:pPr>
             <a:r>
               <a:rPr lang="en-US" sz="2400" dirty="0"/>
-              <a:t>Upload  this code to Arduino nano 33 </a:t>
-            </a:r>
-            <a:r>
-              <a:rPr lang="en-US" sz="2400" dirty="0" err="1"/>
-              <a:t>ble</a:t>
-            </a:r>
-            <a:r>
-              <a:rPr lang="en-US" sz="2400" dirty="0"/>
-              <a:t> to be able to stream the sensor data to a webapp</a:t>
+              <a:t>Download the libraries (all 5) needed to run the above script: </a:t>
             </a:r>
           </a:p>
           <a:p>
@@ -2185,11 +3703,8 @@
               <a:rPr lang="en-US" sz="2400" dirty="0">
                 <a:hlinkClick r:id="rId3"/>
               </a:rPr>
-              <a:t>https://app.arduino.cc/sketches/71cdba81-1380-4aee-9cb1-14cde2da7607?view-mode=preview</a:t>
-            </a:r>
-            <a:endParaRPr lang="en-US" sz="2400" dirty="0"/>
-          </a:p>
-          <a:p>
+              <a:t>https://drive.google.com/drive/folders/1Oyy5_PBZ5hQt2_54gSwvwhxyG7-0_8vd?usp=sharing</a:t>
+            </a:r>
             <a:endParaRPr lang="en-US" sz="2400" dirty="0"/>
           </a:p>
           <a:p>
@@ -2231,7 +3746,7 @@
           <a:p>
             <a:r>
               <a:rPr lang="en-US" sz="2800" dirty="0"/>
-              <a:t>How can we monitor the streamed data?</a:t>
+              <a:t>How can we monitor streamed data?</a:t>
             </a:r>
           </a:p>
         </p:txBody>
@@ -2249,7 +3764,669 @@
 </p:sld>
 </file>
 
-<file path=ppt/slides/slide13.xml><?xml version="1.0" encoding="utf-8"?>
+<file path=ppt/slides/slide19.xml><?xml version="1.0" encoding="utf-8"?>
+<p:sld xmlns:a="http://schemas.openxmlformats.org/drawingml/2006/main" xmlns:r="http://schemas.openxmlformats.org/officeDocument/2006/relationships" xmlns:p="http://schemas.openxmlformats.org/presentationml/2006/main">
+  <p:cSld>
+    <p:spTree>
+      <p:nvGrpSpPr>
+        <p:cNvPr id="1" name="">
+          <a:extLst>
+            <a:ext uri="{FF2B5EF4-FFF2-40B4-BE49-F238E27FC236}">
+              <a16:creationId xmlns:a16="http://schemas.microsoft.com/office/drawing/2014/main" id="{D70668F7-B3FD-2619-4475-8E6C828271A3}"/>
+            </a:ext>
+          </a:extLst>
+        </p:cNvPr>
+        <p:cNvGrpSpPr/>
+        <p:nvPr/>
+      </p:nvGrpSpPr>
+      <p:grpSpPr>
+        <a:xfrm>
+          <a:off x="0" y="0"/>
+          <a:ext cx="0" cy="0"/>
+          <a:chOff x="0" y="0"/>
+          <a:chExt cx="0" cy="0"/>
+        </a:xfrm>
+      </p:grpSpPr>
+      <p:sp>
+        <p:nvSpPr>
+          <p:cNvPr id="7" name="TextBox 6">
+            <a:extLst>
+              <a:ext uri="{FF2B5EF4-FFF2-40B4-BE49-F238E27FC236}">
+                <a16:creationId xmlns:a16="http://schemas.microsoft.com/office/drawing/2014/main" id="{CE4FADA1-5AAB-9710-6D48-AE0EA78A37FF}"/>
+              </a:ext>
+            </a:extLst>
+          </p:cNvPr>
+          <p:cNvSpPr txBox="1"/>
+          <p:nvPr/>
+        </p:nvSpPr>
+        <p:spPr>
+          <a:xfrm>
+            <a:off x="304888" y="1191001"/>
+            <a:ext cx="3135336" cy="2677656"/>
+          </a:xfrm>
+          <a:prstGeom prst="rect">
+            <a:avLst/>
+          </a:prstGeom>
+          <a:noFill/>
+        </p:spPr>
+        <p:txBody>
+          <a:bodyPr wrap="square">
+            <a:spAutoFit/>
+          </a:bodyPr>
+          <a:lstStyle/>
+          <a:p>
+            <a:r>
+              <a:rPr lang="en-US" sz="2400" dirty="0"/>
+              <a:t>Installing Libraries:</a:t>
+            </a:r>
+          </a:p>
+          <a:p>
+            <a:pPr marL="342900" indent="-342900">
+              <a:buFont typeface="Arial" panose="020B0604020202020204" pitchFamily="34" charset="0"/>
+              <a:buChar char="•"/>
+            </a:pPr>
+            <a:r>
+              <a:rPr lang="en-US" sz="2400" dirty="0"/>
+              <a:t>Sketch</a:t>
+            </a:r>
+          </a:p>
+          <a:p>
+            <a:pPr marL="342900" indent="-342900">
+              <a:buFont typeface="Arial" panose="020B0604020202020204" pitchFamily="34" charset="0"/>
+              <a:buChar char="•"/>
+            </a:pPr>
+            <a:r>
+              <a:rPr lang="en-US" sz="2400" dirty="0"/>
+              <a:t>Include Library</a:t>
+            </a:r>
+          </a:p>
+          <a:p>
+            <a:pPr marL="342900" indent="-342900">
+              <a:buFont typeface="Arial" panose="020B0604020202020204" pitchFamily="34" charset="0"/>
+              <a:buChar char="•"/>
+            </a:pPr>
+            <a:r>
+              <a:rPr lang="en-US" sz="2400" dirty="0"/>
+              <a:t>Add ZIP Library</a:t>
+            </a:r>
+          </a:p>
+          <a:p>
+            <a:pPr marL="342900" indent="-342900">
+              <a:buFont typeface="Arial" panose="020B0604020202020204" pitchFamily="34" charset="0"/>
+              <a:buChar char="•"/>
+            </a:pPr>
+            <a:r>
+              <a:rPr lang="en-US" sz="2400" dirty="0"/>
+              <a:t>Repeat for each downloaded Library</a:t>
+            </a:r>
+          </a:p>
+          <a:p>
+            <a:pPr marL="800100" lvl="1" indent="-342900">
+              <a:buFont typeface="Arial" panose="020B0604020202020204" pitchFamily="34" charset="0"/>
+              <a:buChar char="•"/>
+            </a:pPr>
+            <a:endParaRPr lang="en-US" sz="2400" dirty="0"/>
+          </a:p>
+        </p:txBody>
+      </p:sp>
+      <p:sp>
+        <p:nvSpPr>
+          <p:cNvPr id="9" name="TextBox 8">
+            <a:extLst>
+              <a:ext uri="{FF2B5EF4-FFF2-40B4-BE49-F238E27FC236}">
+                <a16:creationId xmlns:a16="http://schemas.microsoft.com/office/drawing/2014/main" id="{FC879526-B5D0-A3FD-196A-2A6B151FAD58}"/>
+              </a:ext>
+            </a:extLst>
+          </p:cNvPr>
+          <p:cNvSpPr txBox="1"/>
+          <p:nvPr/>
+        </p:nvSpPr>
+        <p:spPr>
+          <a:xfrm>
+            <a:off x="2654709" y="195833"/>
+            <a:ext cx="6243486" cy="523220"/>
+          </a:xfrm>
+          <a:prstGeom prst="rect">
+            <a:avLst/>
+          </a:prstGeom>
+          <a:noFill/>
+        </p:spPr>
+        <p:txBody>
+          <a:bodyPr wrap="square" rtlCol="0">
+            <a:spAutoFit/>
+          </a:bodyPr>
+          <a:lstStyle/>
+          <a:p>
+            <a:r>
+              <a:rPr lang="en-US" sz="2800" dirty="0"/>
+              <a:t>How can we monitor streamed data?</a:t>
+            </a:r>
+          </a:p>
+        </p:txBody>
+      </p:sp>
+      <p:pic>
+        <p:nvPicPr>
+          <p:cNvPr id="3" name="Picture 2">
+            <a:extLst>
+              <a:ext uri="{FF2B5EF4-FFF2-40B4-BE49-F238E27FC236}">
+                <a16:creationId xmlns:a16="http://schemas.microsoft.com/office/drawing/2014/main" id="{9C99DA14-ECED-0CD8-FEE4-70173B29CDA4}"/>
+              </a:ext>
+            </a:extLst>
+          </p:cNvPr>
+          <p:cNvPicPr>
+            <a:picLocks noChangeAspect="1"/>
+          </p:cNvPicPr>
+          <p:nvPr/>
+        </p:nvPicPr>
+        <p:blipFill>
+          <a:blip r:embed="rId2"/>
+          <a:srcRect r="53769"/>
+          <a:stretch>
+            <a:fillRect/>
+          </a:stretch>
+        </p:blipFill>
+        <p:spPr>
+          <a:xfrm>
+            <a:off x="3440224" y="719053"/>
+            <a:ext cx="3567615" cy="5033945"/>
+          </a:xfrm>
+          <a:prstGeom prst="rect">
+            <a:avLst/>
+          </a:prstGeom>
+        </p:spPr>
+      </p:pic>
+      <p:pic>
+        <p:nvPicPr>
+          <p:cNvPr id="5" name="Picture 4">
+            <a:extLst>
+              <a:ext uri="{FF2B5EF4-FFF2-40B4-BE49-F238E27FC236}">
+                <a16:creationId xmlns:a16="http://schemas.microsoft.com/office/drawing/2014/main" id="{4CF93246-A541-A381-F753-54B1F3FBB552}"/>
+              </a:ext>
+            </a:extLst>
+          </p:cNvPr>
+          <p:cNvPicPr>
+            <a:picLocks noChangeAspect="1"/>
+          </p:cNvPicPr>
+          <p:nvPr/>
+        </p:nvPicPr>
+        <p:blipFill>
+          <a:blip r:embed="rId3"/>
+          <a:stretch>
+            <a:fillRect/>
+          </a:stretch>
+        </p:blipFill>
+        <p:spPr>
+          <a:xfrm>
+            <a:off x="7122955" y="1705624"/>
+            <a:ext cx="4764157" cy="2681960"/>
+          </a:xfrm>
+          <a:prstGeom prst="rect">
+            <a:avLst/>
+          </a:prstGeom>
+        </p:spPr>
+      </p:pic>
+    </p:spTree>
+    <p:extLst>
+      <p:ext uri="{BB962C8B-B14F-4D97-AF65-F5344CB8AC3E}">
+        <p14:creationId xmlns:p14="http://schemas.microsoft.com/office/powerpoint/2010/main" val="67345920"/>
+      </p:ext>
+    </p:extLst>
+  </p:cSld>
+  <p:clrMapOvr>
+    <a:masterClrMapping/>
+  </p:clrMapOvr>
+</p:sld>
+</file>
+
+<file path=ppt/slides/slide2.xml><?xml version="1.0" encoding="utf-8"?>
+<p:sld xmlns:a="http://schemas.openxmlformats.org/drawingml/2006/main" xmlns:r="http://schemas.openxmlformats.org/officeDocument/2006/relationships" xmlns:p="http://schemas.openxmlformats.org/presentationml/2006/main">
+  <p:cSld>
+    <p:spTree>
+      <p:nvGrpSpPr>
+        <p:cNvPr id="1" name=""/>
+        <p:cNvGrpSpPr/>
+        <p:nvPr/>
+      </p:nvGrpSpPr>
+      <p:grpSpPr>
+        <a:xfrm>
+          <a:off x="0" y="0"/>
+          <a:ext cx="0" cy="0"/>
+          <a:chOff x="0" y="0"/>
+          <a:chExt cx="0" cy="0"/>
+        </a:xfrm>
+      </p:grpSpPr>
+      <p:sp>
+        <p:nvSpPr>
+          <p:cNvPr id="5" name="TextBox 4">
+            <a:extLst>
+              <a:ext uri="{FF2B5EF4-FFF2-40B4-BE49-F238E27FC236}">
+                <a16:creationId xmlns:a16="http://schemas.microsoft.com/office/drawing/2014/main" id="{7B380A12-92CC-1970-3BA9-4186A953231E}"/>
+              </a:ext>
+            </a:extLst>
+          </p:cNvPr>
+          <p:cNvSpPr txBox="1"/>
+          <p:nvPr/>
+        </p:nvSpPr>
+        <p:spPr>
+          <a:xfrm>
+            <a:off x="4390104" y="287283"/>
+            <a:ext cx="6145160" cy="523220"/>
+          </a:xfrm>
+          <a:prstGeom prst="rect">
+            <a:avLst/>
+          </a:prstGeom>
+          <a:noFill/>
+        </p:spPr>
+        <p:txBody>
+          <a:bodyPr wrap="square">
+            <a:spAutoFit/>
+          </a:bodyPr>
+          <a:lstStyle/>
+          <a:p>
+            <a:r>
+              <a:rPr lang="en-US" sz="2800" dirty="0"/>
+              <a:t>What is Arduino?</a:t>
+            </a:r>
+          </a:p>
+        </p:txBody>
+      </p:sp>
+      <p:pic>
+        <p:nvPicPr>
+          <p:cNvPr id="1026" name="Picture 2" descr="Arduino and its types - DEV Community">
+            <a:extLst>
+              <a:ext uri="{FF2B5EF4-FFF2-40B4-BE49-F238E27FC236}">
+                <a16:creationId xmlns:a16="http://schemas.microsoft.com/office/drawing/2014/main" id="{C778369A-EE11-2296-E4BC-C6EB1B78CD28}"/>
+              </a:ext>
+            </a:extLst>
+          </p:cNvPr>
+          <p:cNvPicPr>
+            <a:picLocks noChangeAspect="1" noChangeArrowheads="1"/>
+          </p:cNvPicPr>
+          <p:nvPr/>
+        </p:nvPicPr>
+        <p:blipFill>
+          <a:blip r:embed="rId3">
+            <a:extLst>
+              <a:ext uri="{28A0092B-C50C-407E-A947-70E740481C1C}">
+                <a14:useLocalDpi xmlns:a14="http://schemas.microsoft.com/office/drawing/2010/main" val="0"/>
+              </a:ext>
+            </a:extLst>
+          </a:blip>
+          <a:srcRect/>
+          <a:stretch>
+            <a:fillRect/>
+          </a:stretch>
+        </p:blipFill>
+        <p:spPr bwMode="auto">
+          <a:xfrm>
+            <a:off x="6966064" y="1175656"/>
+            <a:ext cx="5017024" cy="3624944"/>
+          </a:xfrm>
+          <a:prstGeom prst="rect">
+            <a:avLst/>
+          </a:prstGeom>
+          <a:noFill/>
+          <a:extLst>
+            <a:ext uri="{909E8E84-426E-40DD-AFC4-6F175D3DCCD1}">
+              <a14:hiddenFill xmlns:a14="http://schemas.microsoft.com/office/drawing/2010/main">
+                <a:solidFill>
+                  <a:srgbClr val="FFFFFF"/>
+                </a:solidFill>
+              </a14:hiddenFill>
+            </a:ext>
+          </a:extLst>
+        </p:spPr>
+      </p:pic>
+      <p:sp>
+        <p:nvSpPr>
+          <p:cNvPr id="2" name="TextBox 1">
+            <a:extLst>
+              <a:ext uri="{FF2B5EF4-FFF2-40B4-BE49-F238E27FC236}">
+                <a16:creationId xmlns:a16="http://schemas.microsoft.com/office/drawing/2014/main" id="{9C9E0CAC-8D3A-AE7A-063E-DFB534C1C921}"/>
+              </a:ext>
+            </a:extLst>
+          </p:cNvPr>
+          <p:cNvSpPr txBox="1"/>
+          <p:nvPr/>
+        </p:nvSpPr>
+        <p:spPr>
+          <a:xfrm>
+            <a:off x="522514" y="1175656"/>
+            <a:ext cx="4423455" cy="3970318"/>
+          </a:xfrm>
+          <a:prstGeom prst="rect">
+            <a:avLst/>
+          </a:prstGeom>
+          <a:noFill/>
+        </p:spPr>
+        <p:txBody>
+          <a:bodyPr wrap="none" rtlCol="0">
+            <a:spAutoFit/>
+          </a:bodyPr>
+          <a:lstStyle/>
+          <a:p>
+            <a:pPr marL="285750" indent="-285750">
+              <a:buFont typeface="Wingdings" pitchFamily="2" charset="2"/>
+              <a:buChar char="Ø"/>
+            </a:pPr>
+            <a:r>
+              <a:rPr lang="en-US" dirty="0"/>
+              <a:t>Microcontroller Development Board</a:t>
+            </a:r>
+          </a:p>
+          <a:p>
+            <a:pPr marL="285750" indent="-285750">
+              <a:buFont typeface="Wingdings" pitchFamily="2" charset="2"/>
+              <a:buChar char="Ø"/>
+            </a:pPr>
+            <a:r>
+              <a:rPr lang="en-US" dirty="0"/>
+              <a:t>Open-source hardware + software.</a:t>
+            </a:r>
+          </a:p>
+          <a:p>
+            <a:pPr marL="285750" indent="-285750">
+              <a:buFont typeface="Wingdings" pitchFamily="2" charset="2"/>
+              <a:buChar char="Ø"/>
+            </a:pPr>
+            <a:r>
+              <a:rPr lang="en-US" dirty="0"/>
+              <a:t>Simple programming with Arduino IDE.</a:t>
+            </a:r>
+          </a:p>
+          <a:p>
+            <a:pPr marL="285750" indent="-285750">
+              <a:buFont typeface="Wingdings" pitchFamily="2" charset="2"/>
+              <a:buChar char="Ø"/>
+            </a:pPr>
+            <a:r>
+              <a:rPr lang="en-US" dirty="0"/>
+              <a:t>Used for rapid prototyping.</a:t>
+            </a:r>
+          </a:p>
+          <a:p>
+            <a:pPr marL="285750" indent="-285750">
+              <a:buFont typeface="Wingdings" pitchFamily="2" charset="2"/>
+              <a:buChar char="Ø"/>
+            </a:pPr>
+            <a:endParaRPr lang="en-US" dirty="0"/>
+          </a:p>
+          <a:p>
+            <a:pPr marL="285750" indent="-285750">
+              <a:buFont typeface="Wingdings" pitchFamily="2" charset="2"/>
+              <a:buChar char="Ø"/>
+            </a:pPr>
+            <a:endParaRPr lang="en-US" dirty="0"/>
+          </a:p>
+          <a:p>
+            <a:r>
+              <a:rPr lang="en-US" b="1" dirty="0"/>
+              <a:t>Why use Arduino? </a:t>
+            </a:r>
+          </a:p>
+          <a:p>
+            <a:pPr marL="285750" indent="-285750">
+              <a:buFont typeface="Wingdings" pitchFamily="2" charset="2"/>
+              <a:buChar char="Ø"/>
+            </a:pPr>
+            <a:r>
+              <a:rPr lang="en-US" dirty="0"/>
+              <a:t>Low cost and widely available.</a:t>
+            </a:r>
+          </a:p>
+          <a:p>
+            <a:pPr marL="285750" indent="-285750">
+              <a:buFont typeface="Wingdings" pitchFamily="2" charset="2"/>
+              <a:buChar char="Ø"/>
+            </a:pPr>
+            <a:r>
+              <a:rPr lang="en-US" dirty="0"/>
+              <a:t>Large community and libraries.</a:t>
+            </a:r>
+          </a:p>
+          <a:p>
+            <a:pPr marL="285750" indent="-285750">
+              <a:buFont typeface="Wingdings" pitchFamily="2" charset="2"/>
+              <a:buChar char="Ø"/>
+            </a:pPr>
+            <a:r>
+              <a:rPr lang="en-US" dirty="0"/>
+              <a:t>Easy to connect sensors/actuators.</a:t>
+            </a:r>
+          </a:p>
+          <a:p>
+            <a:pPr marL="285750" indent="-285750">
+              <a:buFont typeface="Wingdings" pitchFamily="2" charset="2"/>
+              <a:buChar char="Ø"/>
+            </a:pPr>
+            <a:r>
+              <a:rPr lang="en-US" dirty="0"/>
+              <a:t>Good entry point into embedded systems.</a:t>
+            </a:r>
+          </a:p>
+          <a:p>
+            <a:pPr marL="285750" indent="-285750">
+              <a:buFont typeface="Wingdings" pitchFamily="2" charset="2"/>
+              <a:buChar char="Ø"/>
+            </a:pPr>
+            <a:endParaRPr lang="en-US" dirty="0"/>
+          </a:p>
+          <a:p>
+            <a:pPr marL="285750" indent="-285750">
+              <a:buFont typeface="Wingdings" pitchFamily="2" charset="2"/>
+              <a:buChar char="Ø"/>
+            </a:pPr>
+            <a:endParaRPr lang="en-US" dirty="0"/>
+          </a:p>
+          <a:p>
+            <a:pPr marL="285750" indent="-285750">
+              <a:buFont typeface="Wingdings" pitchFamily="2" charset="2"/>
+              <a:buChar char="Ø"/>
+            </a:pPr>
+            <a:endParaRPr lang="en-US" dirty="0"/>
+          </a:p>
+        </p:txBody>
+      </p:sp>
+      <p:sp>
+        <p:nvSpPr>
+          <p:cNvPr id="3" name="TextBox 2">
+            <a:extLst>
+              <a:ext uri="{FF2B5EF4-FFF2-40B4-BE49-F238E27FC236}">
+                <a16:creationId xmlns:a16="http://schemas.microsoft.com/office/drawing/2014/main" id="{D291537A-58E7-4ADE-5F1C-4D20BA9B84C8}"/>
+              </a:ext>
+            </a:extLst>
+          </p:cNvPr>
+          <p:cNvSpPr txBox="1"/>
+          <p:nvPr/>
+        </p:nvSpPr>
+        <p:spPr>
+          <a:xfrm>
+            <a:off x="7811396" y="4961308"/>
+            <a:ext cx="3326360" cy="369332"/>
+          </a:xfrm>
+          <a:prstGeom prst="rect">
+            <a:avLst/>
+          </a:prstGeom>
+          <a:noFill/>
+        </p:spPr>
+        <p:txBody>
+          <a:bodyPr wrap="none" rtlCol="0">
+            <a:spAutoFit/>
+          </a:bodyPr>
+          <a:lstStyle/>
+          <a:p>
+            <a:r>
+              <a:rPr lang="en-US" i="1" dirty="0"/>
+              <a:t>Different types of Arduino Boards</a:t>
+            </a:r>
+          </a:p>
+        </p:txBody>
+      </p:sp>
+    </p:spTree>
+    <p:extLst>
+      <p:ext uri="{BB962C8B-B14F-4D97-AF65-F5344CB8AC3E}">
+        <p14:creationId xmlns:p14="http://schemas.microsoft.com/office/powerpoint/2010/main" val="2755390366"/>
+      </p:ext>
+    </p:extLst>
+  </p:cSld>
+  <p:clrMapOvr>
+    <a:masterClrMapping/>
+  </p:clrMapOvr>
+</p:sld>
+</file>
+
+<file path=ppt/slides/slide20.xml><?xml version="1.0" encoding="utf-8"?>
+<p:sld xmlns:a="http://schemas.openxmlformats.org/drawingml/2006/main" xmlns:r="http://schemas.openxmlformats.org/officeDocument/2006/relationships" xmlns:p="http://schemas.openxmlformats.org/presentationml/2006/main">
+  <p:cSld>
+    <p:spTree>
+      <p:nvGrpSpPr>
+        <p:cNvPr id="1" name="">
+          <a:extLst>
+            <a:ext uri="{FF2B5EF4-FFF2-40B4-BE49-F238E27FC236}">
+              <a16:creationId xmlns:a16="http://schemas.microsoft.com/office/drawing/2014/main" id="{247FD450-15AC-DD00-21F5-F19D126DEEA1}"/>
+            </a:ext>
+          </a:extLst>
+        </p:cNvPr>
+        <p:cNvGrpSpPr/>
+        <p:nvPr/>
+      </p:nvGrpSpPr>
+      <p:grpSpPr>
+        <a:xfrm>
+          <a:off x="0" y="0"/>
+          <a:ext cx="0" cy="0"/>
+          <a:chOff x="0" y="0"/>
+          <a:chExt cx="0" cy="0"/>
+        </a:xfrm>
+      </p:grpSpPr>
+      <p:sp>
+        <p:nvSpPr>
+          <p:cNvPr id="7" name="TextBox 6">
+            <a:extLst>
+              <a:ext uri="{FF2B5EF4-FFF2-40B4-BE49-F238E27FC236}">
+                <a16:creationId xmlns:a16="http://schemas.microsoft.com/office/drawing/2014/main" id="{9E22A5BF-D1A0-1245-4F22-8E6550283C9D}"/>
+              </a:ext>
+            </a:extLst>
+          </p:cNvPr>
+          <p:cNvSpPr txBox="1"/>
+          <p:nvPr/>
+        </p:nvSpPr>
+        <p:spPr>
+          <a:xfrm>
+            <a:off x="304887" y="1191001"/>
+            <a:ext cx="11175059" cy="2308324"/>
+          </a:xfrm>
+          <a:prstGeom prst="rect">
+            <a:avLst/>
+          </a:prstGeom>
+          <a:noFill/>
+        </p:spPr>
+        <p:txBody>
+          <a:bodyPr wrap="square">
+            <a:spAutoFit/>
+          </a:bodyPr>
+          <a:lstStyle/>
+          <a:p>
+            <a:pPr marL="800100" lvl="1" indent="-342900">
+              <a:buFont typeface="Arial" panose="020B0604020202020204" pitchFamily="34" charset="0"/>
+              <a:buChar char="•"/>
+            </a:pPr>
+            <a:r>
+              <a:rPr lang="en-US" sz="2400" dirty="0"/>
+              <a:t>Verify and upload</a:t>
+            </a:r>
+          </a:p>
+          <a:p>
+            <a:pPr marL="800100" lvl="1" indent="-342900">
+              <a:buFont typeface="Arial" panose="020B0604020202020204" pitchFamily="34" charset="0"/>
+              <a:buChar char="•"/>
+            </a:pPr>
+            <a:r>
+              <a:rPr lang="en-US" sz="2400" dirty="0"/>
+              <a:t>Open the following link:</a:t>
+            </a:r>
+            <a:br>
+              <a:rPr lang="en-US" sz="2400" dirty="0"/>
+            </a:br>
+            <a:r>
+              <a:rPr lang="en-US" sz="2400" dirty="0">
+                <a:hlinkClick r:id="rId2"/>
+              </a:rPr>
+              <a:t>https://arduino.github.io/ArduinoAI/BLESense-test-dashboard/</a:t>
+            </a:r>
+            <a:endParaRPr lang="en-US" sz="2400" dirty="0"/>
+          </a:p>
+          <a:p>
+            <a:pPr marL="800100" lvl="1" indent="-342900">
+              <a:buFont typeface="Arial" panose="020B0604020202020204" pitchFamily="34" charset="0"/>
+              <a:buChar char="•"/>
+            </a:pPr>
+            <a:endParaRPr lang="en-US" sz="2400" dirty="0"/>
+          </a:p>
+          <a:p>
+            <a:pPr marL="1257300" lvl="2" indent="-342900">
+              <a:buFont typeface="Arial" panose="020B0604020202020204" pitchFamily="34" charset="0"/>
+              <a:buChar char="•"/>
+            </a:pPr>
+            <a:endParaRPr lang="en-US" sz="2400" dirty="0"/>
+          </a:p>
+          <a:p>
+            <a:pPr marL="800100" lvl="1" indent="-342900">
+              <a:buFont typeface="Arial" panose="020B0604020202020204" pitchFamily="34" charset="0"/>
+              <a:buChar char="•"/>
+            </a:pPr>
+            <a:endParaRPr lang="en-US" sz="2400" dirty="0"/>
+          </a:p>
+        </p:txBody>
+      </p:sp>
+      <p:sp>
+        <p:nvSpPr>
+          <p:cNvPr id="9" name="TextBox 8">
+            <a:extLst>
+              <a:ext uri="{FF2B5EF4-FFF2-40B4-BE49-F238E27FC236}">
+                <a16:creationId xmlns:a16="http://schemas.microsoft.com/office/drawing/2014/main" id="{ADB4CEF6-05C7-4D9E-76DE-BEFF4182FF9D}"/>
+              </a:ext>
+            </a:extLst>
+          </p:cNvPr>
+          <p:cNvSpPr txBox="1"/>
+          <p:nvPr/>
+        </p:nvSpPr>
+        <p:spPr>
+          <a:xfrm>
+            <a:off x="2654709" y="195833"/>
+            <a:ext cx="6243486" cy="523220"/>
+          </a:xfrm>
+          <a:prstGeom prst="rect">
+            <a:avLst/>
+          </a:prstGeom>
+          <a:noFill/>
+        </p:spPr>
+        <p:txBody>
+          <a:bodyPr wrap="square" rtlCol="0">
+            <a:spAutoFit/>
+          </a:bodyPr>
+          <a:lstStyle/>
+          <a:p>
+            <a:r>
+              <a:rPr lang="en-US" sz="2800" dirty="0"/>
+              <a:t>How can we monitor streamed data?</a:t>
+            </a:r>
+          </a:p>
+        </p:txBody>
+      </p:sp>
+    </p:spTree>
+    <p:extLst>
+      <p:ext uri="{BB962C8B-B14F-4D97-AF65-F5344CB8AC3E}">
+        <p14:creationId xmlns:p14="http://schemas.microsoft.com/office/powerpoint/2010/main" val="3892923088"/>
+      </p:ext>
+    </p:extLst>
+  </p:cSld>
+  <p:clrMapOvr>
+    <a:masterClrMapping/>
+  </p:clrMapOvr>
+</p:sld>
+</file>
+
+<file path=ppt/slides/slide21.xml><?xml version="1.0" encoding="utf-8"?>
 <p:sld xmlns:a="http://schemas.openxmlformats.org/drawingml/2006/main" xmlns:r="http://schemas.openxmlformats.org/officeDocument/2006/relationships" xmlns:p="http://schemas.openxmlformats.org/presentationml/2006/main">
   <p:cSld>
     <p:spTree>
@@ -2492,1185 +4669,7 @@
 </p:sld>
 </file>
 
-<file path=ppt/slides/slide14.xml><?xml version="1.0" encoding="utf-8"?>
-<p:sld xmlns:a="http://schemas.openxmlformats.org/drawingml/2006/main" xmlns:r="http://schemas.openxmlformats.org/officeDocument/2006/relationships" xmlns:p="http://schemas.openxmlformats.org/presentationml/2006/main">
-  <p:cSld>
-    <p:spTree>
-      <p:nvGrpSpPr>
-        <p:cNvPr id="1" name="">
-          <a:extLst>
-            <a:ext uri="{FF2B5EF4-FFF2-40B4-BE49-F238E27FC236}">
-              <a16:creationId xmlns:a16="http://schemas.microsoft.com/office/drawing/2014/main" id="{622F81C9-E395-46DA-46EF-3A95608E6E3B}"/>
-            </a:ext>
-          </a:extLst>
-        </p:cNvPr>
-        <p:cNvGrpSpPr/>
-        <p:nvPr/>
-      </p:nvGrpSpPr>
-      <p:grpSpPr>
-        <a:xfrm>
-          <a:off x="0" y="0"/>
-          <a:ext cx="0" cy="0"/>
-          <a:chOff x="0" y="0"/>
-          <a:chExt cx="0" cy="0"/>
-        </a:xfrm>
-      </p:grpSpPr>
-      <p:sp>
-        <p:nvSpPr>
-          <p:cNvPr id="3" name="TextBox 2">
-            <a:extLst>
-              <a:ext uri="{FF2B5EF4-FFF2-40B4-BE49-F238E27FC236}">
-                <a16:creationId xmlns:a16="http://schemas.microsoft.com/office/drawing/2014/main" id="{9034C2C8-4EEB-BA59-E965-DA2CF9E9FCB5}"/>
-              </a:ext>
-            </a:extLst>
-          </p:cNvPr>
-          <p:cNvSpPr txBox="1"/>
-          <p:nvPr/>
-        </p:nvSpPr>
-        <p:spPr>
-          <a:xfrm>
-            <a:off x="587829" y="942592"/>
-            <a:ext cx="6139542" cy="923330"/>
-          </a:xfrm>
-          <a:prstGeom prst="rect">
-            <a:avLst/>
-          </a:prstGeom>
-          <a:noFill/>
-        </p:spPr>
-        <p:txBody>
-          <a:bodyPr wrap="square">
-            <a:spAutoFit/>
-          </a:bodyPr>
-          <a:lstStyle/>
-          <a:p>
-            <a:pPr marL="342900" indent="-342900">
-              <a:buFont typeface="Arial" panose="020B0604020202020204" pitchFamily="34" charset="0"/>
-              <a:buChar char="•"/>
-            </a:pPr>
-            <a:r>
-              <a:rPr lang="en-US" sz="1800" dirty="0"/>
-              <a:t>Testing pressure sensor</a:t>
-            </a:r>
-          </a:p>
-          <a:p>
-            <a:r>
-              <a:rPr lang="en-US" sz="1800" dirty="0">
-                <a:hlinkClick r:id="rId2"/>
-              </a:rPr>
-              <a:t>https://app.arduino.cc/sketches/4573b54c-d240-41b0-94a4-4ac0dca97e66?view-mode=preview</a:t>
-            </a:r>
-            <a:endParaRPr lang="en-US" sz="1800" dirty="0"/>
-          </a:p>
-        </p:txBody>
-      </p:sp>
-      <p:sp>
-        <p:nvSpPr>
-          <p:cNvPr id="4" name="TextBox 3">
-            <a:extLst>
-              <a:ext uri="{FF2B5EF4-FFF2-40B4-BE49-F238E27FC236}">
-                <a16:creationId xmlns:a16="http://schemas.microsoft.com/office/drawing/2014/main" id="{14E84F60-52DF-1554-8009-3D200F7E70EB}"/>
-              </a:ext>
-            </a:extLst>
-          </p:cNvPr>
-          <p:cNvSpPr txBox="1"/>
-          <p:nvPr/>
-        </p:nvSpPr>
-        <p:spPr>
-          <a:xfrm>
-            <a:off x="2654709" y="195833"/>
-            <a:ext cx="6243486" cy="523220"/>
-          </a:xfrm>
-          <a:prstGeom prst="rect">
-            <a:avLst/>
-          </a:prstGeom>
-          <a:noFill/>
-        </p:spPr>
-        <p:txBody>
-          <a:bodyPr wrap="square" rtlCol="0">
-            <a:spAutoFit/>
-          </a:bodyPr>
-          <a:lstStyle/>
-          <a:p>
-            <a:pPr algn="ctr"/>
-            <a:r>
-              <a:rPr lang="en-US" sz="2800" dirty="0"/>
-              <a:t>Using the Serial Monitor</a:t>
-            </a:r>
-          </a:p>
-        </p:txBody>
-      </p:sp>
-      <p:pic>
-        <p:nvPicPr>
-          <p:cNvPr id="6" name="Picture 5">
-            <a:extLst>
-              <a:ext uri="{FF2B5EF4-FFF2-40B4-BE49-F238E27FC236}">
-                <a16:creationId xmlns:a16="http://schemas.microsoft.com/office/drawing/2014/main" id="{7A76D8E6-1AD9-9F8E-F839-199E19BDFB35}"/>
-              </a:ext>
-            </a:extLst>
-          </p:cNvPr>
-          <p:cNvPicPr>
-            <a:picLocks noChangeAspect="1"/>
-          </p:cNvPicPr>
-          <p:nvPr/>
-        </p:nvPicPr>
-        <p:blipFill>
-          <a:blip r:embed="rId3"/>
-          <a:stretch>
-            <a:fillRect/>
-          </a:stretch>
-        </p:blipFill>
-        <p:spPr>
-          <a:xfrm>
-            <a:off x="7313161" y="942592"/>
-            <a:ext cx="4462013" cy="4288971"/>
-          </a:xfrm>
-          <a:prstGeom prst="rect">
-            <a:avLst/>
-          </a:prstGeom>
-        </p:spPr>
-      </p:pic>
-      <p:sp>
-        <p:nvSpPr>
-          <p:cNvPr id="13" name="TextBox 12">
-            <a:extLst>
-              <a:ext uri="{FF2B5EF4-FFF2-40B4-BE49-F238E27FC236}">
-                <a16:creationId xmlns:a16="http://schemas.microsoft.com/office/drawing/2014/main" id="{4D725B8F-F04E-B9B2-91F4-3D7667A3D9F0}"/>
-              </a:ext>
-            </a:extLst>
-          </p:cNvPr>
-          <p:cNvSpPr txBox="1"/>
-          <p:nvPr/>
-        </p:nvSpPr>
-        <p:spPr>
-          <a:xfrm>
-            <a:off x="1522981" y="3320534"/>
-            <a:ext cx="4573019" cy="369332"/>
-          </a:xfrm>
-          <a:prstGeom prst="rect">
-            <a:avLst/>
-          </a:prstGeom>
-          <a:noFill/>
-        </p:spPr>
-        <p:txBody>
-          <a:bodyPr wrap="square">
-            <a:spAutoFit/>
-          </a:bodyPr>
-          <a:lstStyle/>
-          <a:p>
-            <a:r>
-              <a:rPr lang="en-US" sz="1800" dirty="0"/>
-              <a:t>Your serial monitor output should look like this</a:t>
-            </a:r>
-          </a:p>
-        </p:txBody>
-      </p:sp>
-      <p:cxnSp>
-        <p:nvCxnSpPr>
-          <p:cNvPr id="15" name="Straight Arrow Connector 14">
-            <a:extLst>
-              <a:ext uri="{FF2B5EF4-FFF2-40B4-BE49-F238E27FC236}">
-                <a16:creationId xmlns:a16="http://schemas.microsoft.com/office/drawing/2014/main" id="{DD7E77A0-645D-5E3A-D792-327603742F47}"/>
-              </a:ext>
-            </a:extLst>
-          </p:cNvPr>
-          <p:cNvCxnSpPr>
-            <a:cxnSpLocks/>
-            <a:stCxn id="13" idx="3"/>
-          </p:cNvCxnSpPr>
-          <p:nvPr/>
-        </p:nvCxnSpPr>
-        <p:spPr>
-          <a:xfrm>
-            <a:off x="6096000" y="3505200"/>
-            <a:ext cx="1217161" cy="0"/>
-          </a:xfrm>
-          <a:prstGeom prst="straightConnector1">
-            <a:avLst/>
-          </a:prstGeom>
-          <a:ln>
-            <a:tailEnd type="triangle"/>
-          </a:ln>
-          <a:effectLst/>
-        </p:spPr>
-        <p:style>
-          <a:lnRef idx="2">
-            <a:schemeClr val="dk1"/>
-          </a:lnRef>
-          <a:fillRef idx="0">
-            <a:schemeClr val="dk1"/>
-          </a:fillRef>
-          <a:effectRef idx="1">
-            <a:schemeClr val="dk1"/>
-          </a:effectRef>
-          <a:fontRef idx="minor">
-            <a:schemeClr val="tx1"/>
-          </a:fontRef>
-        </p:style>
-      </p:cxnSp>
-    </p:spTree>
-    <p:extLst>
-      <p:ext uri="{BB962C8B-B14F-4D97-AF65-F5344CB8AC3E}">
-        <p14:creationId xmlns:p14="http://schemas.microsoft.com/office/powerpoint/2010/main" val="1904014361"/>
-      </p:ext>
-    </p:extLst>
-  </p:cSld>
-  <p:clrMapOvr>
-    <a:masterClrMapping/>
-  </p:clrMapOvr>
-</p:sld>
-</file>
-
-<file path=ppt/slides/slide15.xml><?xml version="1.0" encoding="utf-8"?>
-<p:sld xmlns:a="http://schemas.openxmlformats.org/drawingml/2006/main" xmlns:r="http://schemas.openxmlformats.org/officeDocument/2006/relationships" xmlns:p="http://schemas.openxmlformats.org/presentationml/2006/main">
-  <p:cSld>
-    <p:spTree>
-      <p:nvGrpSpPr>
-        <p:cNvPr id="1" name="">
-          <a:extLst>
-            <a:ext uri="{FF2B5EF4-FFF2-40B4-BE49-F238E27FC236}">
-              <a16:creationId xmlns:a16="http://schemas.microsoft.com/office/drawing/2014/main" id="{622F81C9-E395-46DA-46EF-3A95608E6E3B}"/>
-            </a:ext>
-          </a:extLst>
-        </p:cNvPr>
-        <p:cNvGrpSpPr/>
-        <p:nvPr/>
-      </p:nvGrpSpPr>
-      <p:grpSpPr>
-        <a:xfrm>
-          <a:off x="0" y="0"/>
-          <a:ext cx="0" cy="0"/>
-          <a:chOff x="0" y="0"/>
-          <a:chExt cx="0" cy="0"/>
-        </a:xfrm>
-      </p:grpSpPr>
-      <p:sp>
-        <p:nvSpPr>
-          <p:cNvPr id="4" name="TextBox 3">
-            <a:extLst>
-              <a:ext uri="{FF2B5EF4-FFF2-40B4-BE49-F238E27FC236}">
-                <a16:creationId xmlns:a16="http://schemas.microsoft.com/office/drawing/2014/main" id="{14E84F60-52DF-1554-8009-3D200F7E70EB}"/>
-              </a:ext>
-            </a:extLst>
-          </p:cNvPr>
-          <p:cNvSpPr txBox="1"/>
-          <p:nvPr/>
-        </p:nvSpPr>
-        <p:spPr>
-          <a:xfrm>
-            <a:off x="2654709" y="195833"/>
-            <a:ext cx="6243486" cy="523220"/>
-          </a:xfrm>
-          <a:prstGeom prst="rect">
-            <a:avLst/>
-          </a:prstGeom>
-          <a:noFill/>
-        </p:spPr>
-        <p:txBody>
-          <a:bodyPr wrap="square" rtlCol="0">
-            <a:spAutoFit/>
-          </a:bodyPr>
-          <a:lstStyle/>
-          <a:p>
-            <a:pPr algn="ctr"/>
-            <a:r>
-              <a:rPr lang="en-US" sz="2800" dirty="0"/>
-              <a:t>Using the Serial Plotter</a:t>
-            </a:r>
-          </a:p>
-        </p:txBody>
-      </p:sp>
-      <p:sp>
-        <p:nvSpPr>
-          <p:cNvPr id="13" name="TextBox 12">
-            <a:extLst>
-              <a:ext uri="{FF2B5EF4-FFF2-40B4-BE49-F238E27FC236}">
-                <a16:creationId xmlns:a16="http://schemas.microsoft.com/office/drawing/2014/main" id="{4D725B8F-F04E-B9B2-91F4-3D7667A3D9F0}"/>
-              </a:ext>
-            </a:extLst>
-          </p:cNvPr>
-          <p:cNvSpPr txBox="1"/>
-          <p:nvPr/>
-        </p:nvSpPr>
-        <p:spPr>
-          <a:xfrm>
-            <a:off x="789056" y="1503946"/>
-            <a:ext cx="3963418" cy="1200329"/>
-          </a:xfrm>
-          <a:prstGeom prst="rect">
-            <a:avLst/>
-          </a:prstGeom>
-          <a:noFill/>
-        </p:spPr>
-        <p:txBody>
-          <a:bodyPr wrap="square">
-            <a:spAutoFit/>
-          </a:bodyPr>
-          <a:lstStyle/>
-          <a:p>
-            <a:pPr marL="285750" indent="-285750">
-              <a:buFontTx/>
-              <a:buChar char="-"/>
-            </a:pPr>
-            <a:r>
-              <a:rPr lang="en-US" sz="1800" dirty="0"/>
-              <a:t>Just like Serial monitor</a:t>
-            </a:r>
-          </a:p>
-          <a:p>
-            <a:pPr marL="285750" indent="-285750">
-              <a:buFontTx/>
-              <a:buChar char="-"/>
-            </a:pPr>
-            <a:r>
-              <a:rPr lang="en-US" dirty="0"/>
-              <a:t>Plots values with time in x axis</a:t>
-            </a:r>
-          </a:p>
-          <a:p>
-            <a:pPr marL="285750" indent="-285750">
-              <a:buFontTx/>
-              <a:buChar char="-"/>
-            </a:pPr>
-            <a:r>
-              <a:rPr lang="en-US" sz="1800" dirty="0"/>
-              <a:t>Use </a:t>
-            </a:r>
-            <a:r>
-              <a:rPr lang="en-US" sz="1800" dirty="0" err="1"/>
-              <a:t>Serial.println</a:t>
-            </a:r>
-            <a:r>
-              <a:rPr lang="en-US" sz="1800" dirty="0"/>
-              <a:t>() instead of </a:t>
-            </a:r>
-            <a:r>
-              <a:rPr lang="en-US" sz="1800" dirty="0" err="1"/>
-              <a:t>Serial.print</a:t>
-            </a:r>
-            <a:r>
-              <a:rPr lang="en-US" sz="1800" dirty="0"/>
-              <a:t>()</a:t>
-            </a:r>
-          </a:p>
-        </p:txBody>
-      </p:sp>
-      <p:pic>
-        <p:nvPicPr>
-          <p:cNvPr id="5" name="Picture 4" descr="A screenshot of a graph">
-            <a:extLst>
-              <a:ext uri="{FF2B5EF4-FFF2-40B4-BE49-F238E27FC236}">
-                <a16:creationId xmlns:a16="http://schemas.microsoft.com/office/drawing/2014/main" id="{7ECEEC65-95B8-8524-BBF8-C7B6571D4430}"/>
-              </a:ext>
-            </a:extLst>
-          </p:cNvPr>
-          <p:cNvPicPr>
-            <a:picLocks noChangeAspect="1"/>
-          </p:cNvPicPr>
-          <p:nvPr/>
-        </p:nvPicPr>
-        <p:blipFill>
-          <a:blip r:embed="rId2">
-            <a:extLst>
-              <a:ext uri="{28A0092B-C50C-407E-A947-70E740481C1C}">
-                <a14:useLocalDpi xmlns:a14="http://schemas.microsoft.com/office/drawing/2010/main" val="0"/>
-              </a:ext>
-            </a:extLst>
-          </a:blip>
-          <a:stretch>
-            <a:fillRect/>
-          </a:stretch>
-        </p:blipFill>
-        <p:spPr>
-          <a:xfrm>
-            <a:off x="5089001" y="1407691"/>
-            <a:ext cx="6600872" cy="4093434"/>
-          </a:xfrm>
-          <a:prstGeom prst="rect">
-            <a:avLst/>
-          </a:prstGeom>
-        </p:spPr>
-      </p:pic>
-      <p:sp>
-        <p:nvSpPr>
-          <p:cNvPr id="8" name="TextBox 7">
-            <a:extLst>
-              <a:ext uri="{FF2B5EF4-FFF2-40B4-BE49-F238E27FC236}">
-                <a16:creationId xmlns:a16="http://schemas.microsoft.com/office/drawing/2014/main" id="{CF377AD5-D695-57AF-3925-24CD28B34D23}"/>
-              </a:ext>
-            </a:extLst>
-          </p:cNvPr>
-          <p:cNvSpPr txBox="1"/>
-          <p:nvPr/>
-        </p:nvSpPr>
-        <p:spPr>
-          <a:xfrm>
-            <a:off x="1228208" y="3105834"/>
-            <a:ext cx="3085114" cy="646331"/>
-          </a:xfrm>
-          <a:prstGeom prst="rect">
-            <a:avLst/>
-          </a:prstGeom>
-          <a:noFill/>
-        </p:spPr>
-        <p:txBody>
-          <a:bodyPr wrap="square">
-            <a:spAutoFit/>
-          </a:bodyPr>
-          <a:lstStyle/>
-          <a:p>
-            <a:r>
-              <a:rPr lang="en-US" sz="1800" dirty="0"/>
-              <a:t>Your serial plotter output should look like this</a:t>
-            </a:r>
-          </a:p>
-        </p:txBody>
-      </p:sp>
-      <p:cxnSp>
-        <p:nvCxnSpPr>
-          <p:cNvPr id="9" name="Straight Arrow Connector 8">
-            <a:extLst>
-              <a:ext uri="{FF2B5EF4-FFF2-40B4-BE49-F238E27FC236}">
-                <a16:creationId xmlns:a16="http://schemas.microsoft.com/office/drawing/2014/main" id="{20A9C3EA-AB6B-C55D-B4BC-69A748F301A1}"/>
-              </a:ext>
-            </a:extLst>
-          </p:cNvPr>
-          <p:cNvCxnSpPr>
-            <a:cxnSpLocks/>
-            <a:stCxn id="8" idx="3"/>
-            <a:endCxn id="5" idx="1"/>
-          </p:cNvCxnSpPr>
-          <p:nvPr/>
-        </p:nvCxnSpPr>
-        <p:spPr>
-          <a:xfrm>
-            <a:off x="4313322" y="3429000"/>
-            <a:ext cx="775679" cy="25408"/>
-          </a:xfrm>
-          <a:prstGeom prst="straightConnector1">
-            <a:avLst/>
-          </a:prstGeom>
-          <a:ln>
-            <a:tailEnd type="triangle"/>
-          </a:ln>
-          <a:effectLst/>
-        </p:spPr>
-        <p:style>
-          <a:lnRef idx="2">
-            <a:schemeClr val="dk1"/>
-          </a:lnRef>
-          <a:fillRef idx="0">
-            <a:schemeClr val="dk1"/>
-          </a:fillRef>
-          <a:effectRef idx="1">
-            <a:schemeClr val="dk1"/>
-          </a:effectRef>
-          <a:fontRef idx="minor">
-            <a:schemeClr val="tx1"/>
-          </a:fontRef>
-        </p:style>
-      </p:cxnSp>
-    </p:spTree>
-    <p:extLst>
-      <p:ext uri="{BB962C8B-B14F-4D97-AF65-F5344CB8AC3E}">
-        <p14:creationId xmlns:p14="http://schemas.microsoft.com/office/powerpoint/2010/main" val="2327076991"/>
-      </p:ext>
-    </p:extLst>
-  </p:cSld>
-  <p:clrMapOvr>
-    <a:masterClrMapping/>
-  </p:clrMapOvr>
-</p:sld>
-</file>
-
-<file path=ppt/slides/slide16.xml><?xml version="1.0" encoding="utf-8"?>
-<p:sld xmlns:a="http://schemas.openxmlformats.org/drawingml/2006/main" xmlns:r="http://schemas.openxmlformats.org/officeDocument/2006/relationships" xmlns:p="http://schemas.openxmlformats.org/presentationml/2006/main">
-  <p:cSld>
-    <p:spTree>
-      <p:nvGrpSpPr>
-        <p:cNvPr id="1" name=""/>
-        <p:cNvGrpSpPr/>
-        <p:nvPr/>
-      </p:nvGrpSpPr>
-      <p:grpSpPr>
-        <a:xfrm>
-          <a:off x="0" y="0"/>
-          <a:ext cx="0" cy="0"/>
-          <a:chOff x="0" y="0"/>
-          <a:chExt cx="0" cy="0"/>
-        </a:xfrm>
-      </p:grpSpPr>
-      <p:sp>
-        <p:nvSpPr>
-          <p:cNvPr id="7" name="TextBox 6">
-            <a:extLst>
-              <a:ext uri="{FF2B5EF4-FFF2-40B4-BE49-F238E27FC236}">
-                <a16:creationId xmlns:a16="http://schemas.microsoft.com/office/drawing/2014/main" id="{D988588E-5773-6DA8-3962-F0C82EB6039D}"/>
-              </a:ext>
-            </a:extLst>
-          </p:cNvPr>
-          <p:cNvSpPr txBox="1"/>
-          <p:nvPr/>
-        </p:nvSpPr>
-        <p:spPr>
-          <a:xfrm>
-            <a:off x="703006" y="1539876"/>
-            <a:ext cx="7447935" cy="3477875"/>
-          </a:xfrm>
-          <a:prstGeom prst="rect">
-            <a:avLst/>
-          </a:prstGeom>
-          <a:noFill/>
-        </p:spPr>
-        <p:txBody>
-          <a:bodyPr wrap="square">
-            <a:spAutoFit/>
-          </a:bodyPr>
-          <a:lstStyle/>
-          <a:p>
-            <a:endParaRPr lang="en-US" sz="2000" b="1" dirty="0">
-              <a:solidFill>
-                <a:schemeClr val="bg2">
-                  <a:lumMod val="10000"/>
-                </a:schemeClr>
-              </a:solidFill>
-            </a:endParaRPr>
-          </a:p>
-          <a:p>
-            <a:pPr>
-              <a:buFont typeface="Arial" panose="020B0604020202020204" pitchFamily="34" charset="0"/>
-              <a:buChar char="•"/>
-            </a:pPr>
-            <a:r>
-              <a:rPr lang="en-US" sz="2000" b="1" dirty="0">
-                <a:solidFill>
-                  <a:schemeClr val="bg2">
-                    <a:lumMod val="10000"/>
-                  </a:schemeClr>
-                </a:solidFill>
-              </a:rPr>
-              <a:t>APDS9960</a:t>
-            </a:r>
-            <a:r>
-              <a:rPr lang="en-US" sz="2000" dirty="0">
-                <a:solidFill>
-                  <a:schemeClr val="bg2">
-                    <a:lumMod val="10000"/>
-                  </a:schemeClr>
-                </a:solidFill>
-              </a:rPr>
-              <a:t>: Detects ambient light, color, proximity, and gestures.</a:t>
-            </a:r>
-          </a:p>
-          <a:p>
-            <a:pPr>
-              <a:buFont typeface="Arial" panose="020B0604020202020204" pitchFamily="34" charset="0"/>
-              <a:buChar char="•"/>
-            </a:pPr>
-            <a:endParaRPr lang="en-US" sz="2000" dirty="0">
-              <a:solidFill>
-                <a:schemeClr val="bg2">
-                  <a:lumMod val="10000"/>
-                </a:schemeClr>
-              </a:solidFill>
-            </a:endParaRPr>
-          </a:p>
-          <a:p>
-            <a:pPr>
-              <a:buFont typeface="Arial" panose="020B0604020202020204" pitchFamily="34" charset="0"/>
-              <a:buChar char="•"/>
-            </a:pPr>
-            <a:r>
-              <a:rPr lang="en-US" sz="2000" b="1" dirty="0">
-                <a:solidFill>
-                  <a:schemeClr val="bg2">
-                    <a:lumMod val="10000"/>
-                  </a:schemeClr>
-                </a:solidFill>
-              </a:rPr>
-              <a:t>LPS22HB</a:t>
-            </a:r>
-            <a:r>
-              <a:rPr lang="en-US" sz="2000" dirty="0">
-                <a:solidFill>
-                  <a:schemeClr val="bg2">
-                    <a:lumMod val="10000"/>
-                  </a:schemeClr>
-                </a:solidFill>
-              </a:rPr>
-              <a:t>: Measures atmospheric pressure </a:t>
-            </a:r>
-          </a:p>
-          <a:p>
-            <a:pPr>
-              <a:buFont typeface="Arial" panose="020B0604020202020204" pitchFamily="34" charset="0"/>
-              <a:buChar char="•"/>
-            </a:pPr>
-            <a:endParaRPr lang="en-US" sz="2000" b="1" dirty="0">
-              <a:solidFill>
-                <a:schemeClr val="bg2">
-                  <a:lumMod val="10000"/>
-                </a:schemeClr>
-              </a:solidFill>
-            </a:endParaRPr>
-          </a:p>
-          <a:p>
-            <a:pPr>
-              <a:buFont typeface="Arial" panose="020B0604020202020204" pitchFamily="34" charset="0"/>
-              <a:buChar char="•"/>
-            </a:pPr>
-            <a:r>
-              <a:rPr lang="en-US" sz="2000" b="1" dirty="0">
-                <a:solidFill>
-                  <a:schemeClr val="bg2">
-                    <a:lumMod val="10000"/>
-                  </a:schemeClr>
-                </a:solidFill>
-              </a:rPr>
-              <a:t>LSM9DS1</a:t>
-            </a:r>
-            <a:r>
-              <a:rPr lang="en-US" sz="2000" dirty="0">
-                <a:solidFill>
-                  <a:schemeClr val="bg2">
-                    <a:lumMod val="10000"/>
-                  </a:schemeClr>
-                </a:solidFill>
-              </a:rPr>
-              <a:t>: Tracks acceleration, rotation, and magnetic field orientation.</a:t>
-            </a:r>
-          </a:p>
-          <a:p>
-            <a:pPr>
-              <a:buFont typeface="Arial" panose="020B0604020202020204" pitchFamily="34" charset="0"/>
-              <a:buChar char="•"/>
-            </a:pPr>
-            <a:endParaRPr lang="en-US" sz="2000" dirty="0">
-              <a:solidFill>
-                <a:schemeClr val="bg2">
-                  <a:lumMod val="10000"/>
-                </a:schemeClr>
-              </a:solidFill>
-            </a:endParaRPr>
-          </a:p>
-          <a:p>
-            <a:pPr>
-              <a:buFont typeface="Arial" panose="020B0604020202020204" pitchFamily="34" charset="0"/>
-              <a:buChar char="•"/>
-            </a:pPr>
-            <a:r>
-              <a:rPr lang="en-US" sz="2000" b="1" dirty="0">
-                <a:solidFill>
-                  <a:schemeClr val="bg2">
-                    <a:lumMod val="10000"/>
-                  </a:schemeClr>
-                </a:solidFill>
-              </a:rPr>
-              <a:t>PDM Microphone</a:t>
-            </a:r>
-            <a:r>
-              <a:rPr lang="en-US" sz="2000" dirty="0">
-                <a:solidFill>
-                  <a:schemeClr val="bg2">
-                    <a:lumMod val="10000"/>
-                  </a:schemeClr>
-                </a:solidFill>
-              </a:rPr>
-              <a:t>: Captures and analyzes sound signals.</a:t>
-            </a:r>
-          </a:p>
-          <a:p>
-            <a:pPr>
-              <a:buFont typeface="Arial" panose="020B0604020202020204" pitchFamily="34" charset="0"/>
-              <a:buChar char="•"/>
-            </a:pPr>
-            <a:endParaRPr lang="en-US" sz="2000" dirty="0">
-              <a:solidFill>
-                <a:schemeClr val="bg2">
-                  <a:lumMod val="10000"/>
-                </a:schemeClr>
-              </a:solidFill>
-            </a:endParaRPr>
-          </a:p>
-          <a:p>
-            <a:pPr>
-              <a:buFont typeface="Arial" panose="020B0604020202020204" pitchFamily="34" charset="0"/>
-              <a:buChar char="•"/>
-            </a:pPr>
-            <a:r>
-              <a:rPr lang="en-US" sz="2000" b="1" dirty="0">
-                <a:solidFill>
-                  <a:schemeClr val="bg2">
-                    <a:lumMod val="10000"/>
-                  </a:schemeClr>
-                </a:solidFill>
-              </a:rPr>
-              <a:t>RGB LED</a:t>
-            </a:r>
-            <a:r>
-              <a:rPr lang="en-US" sz="2000" dirty="0">
-                <a:solidFill>
-                  <a:schemeClr val="bg2">
-                    <a:lumMod val="10000"/>
-                  </a:schemeClr>
-                </a:solidFill>
-              </a:rPr>
-              <a:t>: Provides visual feedback with controllable colors.</a:t>
-            </a:r>
-          </a:p>
-        </p:txBody>
-      </p:sp>
-      <p:sp>
-        <p:nvSpPr>
-          <p:cNvPr id="9" name="TextBox 8">
-            <a:extLst>
-              <a:ext uri="{FF2B5EF4-FFF2-40B4-BE49-F238E27FC236}">
-                <a16:creationId xmlns:a16="http://schemas.microsoft.com/office/drawing/2014/main" id="{7B3C7893-6A91-3985-385C-EA2252DE6AF5}"/>
-              </a:ext>
-            </a:extLst>
-          </p:cNvPr>
-          <p:cNvSpPr txBox="1"/>
-          <p:nvPr/>
-        </p:nvSpPr>
-        <p:spPr>
-          <a:xfrm>
-            <a:off x="703006" y="339547"/>
-            <a:ext cx="9011265" cy="1200329"/>
-          </a:xfrm>
-          <a:prstGeom prst="rect">
-            <a:avLst/>
-          </a:prstGeom>
-          <a:noFill/>
-        </p:spPr>
-        <p:txBody>
-          <a:bodyPr wrap="square">
-            <a:spAutoFit/>
-          </a:bodyPr>
-          <a:lstStyle/>
-          <a:p>
-            <a:r>
-              <a:rPr lang="en-US" sz="2400" dirty="0"/>
-              <a:t>The Arduino Nano 33 BLE is equipped with several built-in sensors, making it a powerful tool for various applications without needing additional hardware.</a:t>
-            </a:r>
-          </a:p>
-        </p:txBody>
-      </p:sp>
-    </p:spTree>
-    <p:extLst>
-      <p:ext uri="{BB962C8B-B14F-4D97-AF65-F5344CB8AC3E}">
-        <p14:creationId xmlns:p14="http://schemas.microsoft.com/office/powerpoint/2010/main" val="974600972"/>
-      </p:ext>
-    </p:extLst>
-  </p:cSld>
-  <p:clrMapOvr>
-    <a:masterClrMapping/>
-  </p:clrMapOvr>
-</p:sld>
-</file>
-
-<file path=ppt/slides/slide17.xml><?xml version="1.0" encoding="utf-8"?>
-<p:sld xmlns:a="http://schemas.openxmlformats.org/drawingml/2006/main" xmlns:r="http://schemas.openxmlformats.org/officeDocument/2006/relationships" xmlns:p="http://schemas.openxmlformats.org/presentationml/2006/main">
-  <p:cSld>
-    <p:spTree>
-      <p:nvGrpSpPr>
-        <p:cNvPr id="1" name=""/>
-        <p:cNvGrpSpPr/>
-        <p:nvPr/>
-      </p:nvGrpSpPr>
-      <p:grpSpPr>
-        <a:xfrm>
-          <a:off x="0" y="0"/>
-          <a:ext cx="0" cy="0"/>
-          <a:chOff x="0" y="0"/>
-          <a:chExt cx="0" cy="0"/>
-        </a:xfrm>
-      </p:grpSpPr>
-      <p:sp>
-        <p:nvSpPr>
-          <p:cNvPr id="3" name="TextBox 2">
-            <a:extLst>
-              <a:ext uri="{FF2B5EF4-FFF2-40B4-BE49-F238E27FC236}">
-                <a16:creationId xmlns:a16="http://schemas.microsoft.com/office/drawing/2014/main" id="{8AA2FE09-3EF5-DFC1-4DC9-D94B77C5107C}"/>
-              </a:ext>
-            </a:extLst>
-          </p:cNvPr>
-          <p:cNvSpPr txBox="1"/>
-          <p:nvPr/>
-        </p:nvSpPr>
-        <p:spPr>
-          <a:xfrm>
-            <a:off x="526027" y="575306"/>
-            <a:ext cx="9198076" cy="1323439"/>
-          </a:xfrm>
-          <a:prstGeom prst="rect">
-            <a:avLst/>
-          </a:prstGeom>
-          <a:noFill/>
-        </p:spPr>
-        <p:txBody>
-          <a:bodyPr wrap="square">
-            <a:spAutoFit/>
-          </a:bodyPr>
-          <a:lstStyle/>
-          <a:p>
-            <a:pPr marL="342900" indent="-342900" algn="just">
-              <a:buFont typeface="Arial" panose="020B0604020202020204" pitchFamily="34" charset="0"/>
-              <a:buChar char="•"/>
-            </a:pPr>
-            <a:r>
-              <a:rPr lang="en-US" sz="2000" b="1" dirty="0">
-                <a:solidFill>
-                  <a:schemeClr val="bg2">
-                    <a:lumMod val="10000"/>
-                  </a:schemeClr>
-                </a:solidFill>
-              </a:rPr>
-              <a:t>Color Detection</a:t>
-            </a:r>
-            <a:r>
-              <a:rPr lang="en-US" sz="2000" dirty="0">
-                <a:solidFill>
-                  <a:schemeClr val="bg2">
-                    <a:lumMod val="10000"/>
-                  </a:schemeClr>
-                </a:solidFill>
-              </a:rPr>
-              <a:t>: The Colorimeter function in the web app is designed to detect and analyze the color of objects in the sensor's view. The APDS9960 sensor can measure the intensity of red, green, and blue light (RGB values) that is reflected from an object or present in the environment.</a:t>
-            </a:r>
-          </a:p>
-        </p:txBody>
-      </p:sp>
-      <p:sp>
-        <p:nvSpPr>
-          <p:cNvPr id="6" name="TextBox 5">
-            <a:extLst>
-              <a:ext uri="{FF2B5EF4-FFF2-40B4-BE49-F238E27FC236}">
-                <a16:creationId xmlns:a16="http://schemas.microsoft.com/office/drawing/2014/main" id="{9C1412C6-3CAC-C57A-89FE-E7D223CAF19B}"/>
-              </a:ext>
-            </a:extLst>
-          </p:cNvPr>
-          <p:cNvSpPr txBox="1"/>
-          <p:nvPr/>
-        </p:nvSpPr>
-        <p:spPr>
-          <a:xfrm>
-            <a:off x="526026" y="2093162"/>
-            <a:ext cx="9198077" cy="1015663"/>
-          </a:xfrm>
-          <a:prstGeom prst="rect">
-            <a:avLst/>
-          </a:prstGeom>
-          <a:noFill/>
-        </p:spPr>
-        <p:txBody>
-          <a:bodyPr wrap="square">
-            <a:spAutoFit/>
-          </a:bodyPr>
-          <a:lstStyle/>
-          <a:p>
-            <a:pPr marL="342900" indent="-342900" algn="just">
-              <a:buFont typeface="Arial" panose="020B0604020202020204" pitchFamily="34" charset="0"/>
-              <a:buChar char="•"/>
-            </a:pPr>
-            <a:r>
-              <a:rPr lang="en-US" sz="2000" b="1" dirty="0">
-                <a:solidFill>
-                  <a:schemeClr val="bg2">
-                    <a:lumMod val="10000"/>
-                  </a:schemeClr>
-                </a:solidFill>
-              </a:rPr>
-              <a:t>Proximity Sensor</a:t>
-            </a:r>
-            <a:r>
-              <a:rPr lang="en-US" sz="2000" dirty="0">
-                <a:solidFill>
-                  <a:schemeClr val="bg2">
-                    <a:lumMod val="10000"/>
-                  </a:schemeClr>
-                </a:solidFill>
-              </a:rPr>
-              <a:t>: This sensor can detect objects within a certain distance, ranging from a few centimeters up to about 10 centimeters. It is commonly used in gesture control applications, where you can interact with devices without physical contact.</a:t>
-            </a:r>
-          </a:p>
-        </p:txBody>
-      </p:sp>
-      <p:sp>
-        <p:nvSpPr>
-          <p:cNvPr id="9" name="TextBox 8">
-            <a:extLst>
-              <a:ext uri="{FF2B5EF4-FFF2-40B4-BE49-F238E27FC236}">
-                <a16:creationId xmlns:a16="http://schemas.microsoft.com/office/drawing/2014/main" id="{B36F0D72-9B8A-24B6-1E3D-76C6C23DC01B}"/>
-              </a:ext>
-            </a:extLst>
-          </p:cNvPr>
-          <p:cNvSpPr txBox="1"/>
-          <p:nvPr/>
-        </p:nvSpPr>
-        <p:spPr>
-          <a:xfrm>
-            <a:off x="526026" y="3438436"/>
-            <a:ext cx="9050594" cy="1015663"/>
-          </a:xfrm>
-          <a:prstGeom prst="rect">
-            <a:avLst/>
-          </a:prstGeom>
-          <a:noFill/>
-        </p:spPr>
-        <p:txBody>
-          <a:bodyPr wrap="square">
-            <a:spAutoFit/>
-          </a:bodyPr>
-          <a:lstStyle/>
-          <a:p>
-            <a:pPr marL="342900" indent="-342900" algn="just">
-              <a:buFont typeface="Arial" panose="020B0604020202020204" pitchFamily="34" charset="0"/>
-              <a:buChar char="•"/>
-            </a:pPr>
-            <a:r>
-              <a:rPr lang="en-US" sz="2000" b="1" dirty="0">
-                <a:solidFill>
-                  <a:schemeClr val="bg2">
-                    <a:lumMod val="10000"/>
-                  </a:schemeClr>
-                </a:solidFill>
-              </a:rPr>
-              <a:t>Gesture Detection</a:t>
-            </a:r>
-            <a:r>
-              <a:rPr lang="en-US" sz="2000" dirty="0">
-                <a:solidFill>
-                  <a:schemeClr val="bg2">
-                    <a:lumMod val="10000"/>
-                  </a:schemeClr>
-                </a:solidFill>
-              </a:rPr>
-              <a:t>: The APDS9960 can recognize simple gestures like up, down, left, and right swipes. This feature enables touchless interaction with devices, such as controlling media playback or navigating menus with hand gestures.</a:t>
-            </a:r>
-          </a:p>
-        </p:txBody>
-      </p:sp>
-    </p:spTree>
-    <p:extLst>
-      <p:ext uri="{BB962C8B-B14F-4D97-AF65-F5344CB8AC3E}">
-        <p14:creationId xmlns:p14="http://schemas.microsoft.com/office/powerpoint/2010/main" val="1428431566"/>
-      </p:ext>
-    </p:extLst>
-  </p:cSld>
-  <p:clrMapOvr>
-    <a:masterClrMapping/>
-  </p:clrMapOvr>
-</p:sld>
-</file>
-
-<file path=ppt/slides/slide18.xml><?xml version="1.0" encoding="utf-8"?>
-<p:sld xmlns:a="http://schemas.openxmlformats.org/drawingml/2006/main" xmlns:r="http://schemas.openxmlformats.org/officeDocument/2006/relationships" xmlns:p="http://schemas.openxmlformats.org/presentationml/2006/main">
-  <p:cSld>
-    <p:spTree>
-      <p:nvGrpSpPr>
-        <p:cNvPr id="1" name=""/>
-        <p:cNvGrpSpPr/>
-        <p:nvPr/>
-      </p:nvGrpSpPr>
-      <p:grpSpPr>
-        <a:xfrm>
-          <a:off x="0" y="0"/>
-          <a:ext cx="0" cy="0"/>
-          <a:chOff x="0" y="0"/>
-          <a:chExt cx="0" cy="0"/>
-        </a:xfrm>
-      </p:grpSpPr>
-      <p:sp>
-        <p:nvSpPr>
-          <p:cNvPr id="5" name="TextBox 4">
-            <a:extLst>
-              <a:ext uri="{FF2B5EF4-FFF2-40B4-BE49-F238E27FC236}">
-                <a16:creationId xmlns:a16="http://schemas.microsoft.com/office/drawing/2014/main" id="{64855747-0F27-8AF2-4D5B-0318A6442D41}"/>
-              </a:ext>
-            </a:extLst>
-          </p:cNvPr>
-          <p:cNvSpPr txBox="1"/>
-          <p:nvPr/>
-        </p:nvSpPr>
-        <p:spPr>
-          <a:xfrm>
-            <a:off x="929148" y="461380"/>
-            <a:ext cx="8971936" cy="3170099"/>
-          </a:xfrm>
-          <a:prstGeom prst="rect">
-            <a:avLst/>
-          </a:prstGeom>
-          <a:noFill/>
-        </p:spPr>
-        <p:txBody>
-          <a:bodyPr wrap="square">
-            <a:spAutoFit/>
-          </a:bodyPr>
-          <a:lstStyle/>
-          <a:p>
-            <a:pPr algn="just">
-              <a:buFont typeface="Arial" panose="020B0604020202020204" pitchFamily="34" charset="0"/>
-              <a:buChar char="•"/>
-            </a:pPr>
-            <a:r>
-              <a:rPr lang="en-US" sz="2000" b="1" dirty="0">
-                <a:solidFill>
-                  <a:schemeClr val="bg2">
-                    <a:lumMod val="10000"/>
-                  </a:schemeClr>
-                </a:solidFill>
-              </a:rPr>
-              <a:t>Accelerometer</a:t>
-            </a:r>
-            <a:r>
-              <a:rPr lang="en-US" sz="2000" dirty="0">
-                <a:solidFill>
-                  <a:schemeClr val="bg2">
-                    <a:lumMod val="10000"/>
-                  </a:schemeClr>
-                </a:solidFill>
-              </a:rPr>
-              <a:t>: This sensor measures acceleration forces along the X, Y, and Z axes. It is used to detect movement, orientation, and vibration. Applications include motion tracking, tilt sensing, and detecting free fall in devices like smartphones and wearables.</a:t>
-            </a:r>
-          </a:p>
-          <a:p>
-            <a:pPr algn="just">
-              <a:buFont typeface="Arial" panose="020B0604020202020204" pitchFamily="34" charset="0"/>
-              <a:buChar char="•"/>
-            </a:pPr>
-            <a:endParaRPr lang="en-US" sz="2000" dirty="0">
-              <a:solidFill>
-                <a:schemeClr val="bg2">
-                  <a:lumMod val="10000"/>
-                </a:schemeClr>
-              </a:solidFill>
-            </a:endParaRPr>
-          </a:p>
-          <a:p>
-            <a:pPr algn="just">
-              <a:buFont typeface="Arial" panose="020B0604020202020204" pitchFamily="34" charset="0"/>
-              <a:buChar char="•"/>
-            </a:pPr>
-            <a:r>
-              <a:rPr lang="en-US" sz="2000" b="1" dirty="0">
-                <a:solidFill>
-                  <a:schemeClr val="bg2">
-                    <a:lumMod val="10000"/>
-                  </a:schemeClr>
-                </a:solidFill>
-              </a:rPr>
-              <a:t>Gyroscope</a:t>
-            </a:r>
-            <a:r>
-              <a:rPr lang="en-US" sz="2000" dirty="0">
-                <a:solidFill>
-                  <a:schemeClr val="bg2">
-                    <a:lumMod val="10000"/>
-                  </a:schemeClr>
-                </a:solidFill>
-              </a:rPr>
-              <a:t>: The gyroscope measures angular velocity (rotation) around the X, Y, and Z axes. It is used to detect and control the orientation of an object in 3D space. Common applications include stabilization in drones, gesture recognition, and gaming controllers.</a:t>
-            </a:r>
-          </a:p>
-          <a:p>
-            <a:pPr algn="just">
-              <a:buFont typeface="Arial" panose="020B0604020202020204" pitchFamily="34" charset="0"/>
-              <a:buChar char="•"/>
-            </a:pPr>
-            <a:endParaRPr lang="en-US" sz="2000" dirty="0">
-              <a:solidFill>
-                <a:schemeClr val="bg2">
-                  <a:lumMod val="10000"/>
-                </a:schemeClr>
-              </a:solidFill>
-            </a:endParaRPr>
-          </a:p>
-        </p:txBody>
-      </p:sp>
-      <p:sp>
-        <p:nvSpPr>
-          <p:cNvPr id="7" name="TextBox 6">
-            <a:extLst>
-              <a:ext uri="{FF2B5EF4-FFF2-40B4-BE49-F238E27FC236}">
-                <a16:creationId xmlns:a16="http://schemas.microsoft.com/office/drawing/2014/main" id="{FEB119C0-D6DE-0F86-8AC0-EAC8215FBE29}"/>
-              </a:ext>
-            </a:extLst>
-          </p:cNvPr>
-          <p:cNvSpPr txBox="1"/>
-          <p:nvPr/>
-        </p:nvSpPr>
-        <p:spPr>
-          <a:xfrm>
-            <a:off x="929147" y="3429000"/>
-            <a:ext cx="8971937" cy="2246769"/>
-          </a:xfrm>
-          <a:prstGeom prst="rect">
-            <a:avLst/>
-          </a:prstGeom>
-          <a:noFill/>
-        </p:spPr>
-        <p:txBody>
-          <a:bodyPr wrap="square">
-            <a:spAutoFit/>
-          </a:bodyPr>
-          <a:lstStyle/>
-          <a:p>
-            <a:pPr algn="just">
-              <a:buFont typeface="Arial" panose="020B0604020202020204" pitchFamily="34" charset="0"/>
-              <a:buChar char="•"/>
-            </a:pPr>
-            <a:r>
-              <a:rPr lang="en-US" sz="2000" b="1" dirty="0">
-                <a:solidFill>
-                  <a:schemeClr val="bg2">
-                    <a:lumMod val="10000"/>
-                  </a:schemeClr>
-                </a:solidFill>
-              </a:rPr>
-              <a:t>Microphone</a:t>
-            </a:r>
-            <a:r>
-              <a:rPr lang="en-US" sz="2000" dirty="0">
-                <a:solidFill>
-                  <a:schemeClr val="bg2">
-                    <a:lumMod val="10000"/>
-                  </a:schemeClr>
-                </a:solidFill>
-              </a:rPr>
-              <a:t>: The PDM microphone captures audio signals by converting sound waves into electrical signals. The microphone’s data is processed using an FFT (Fast Fourier Transform) to analyze the frequency components of the sound. </a:t>
-            </a:r>
-          </a:p>
-          <a:p>
-            <a:pPr algn="just">
-              <a:buFont typeface="Arial" panose="020B0604020202020204" pitchFamily="34" charset="0"/>
-              <a:buChar char="•"/>
-            </a:pPr>
-            <a:r>
-              <a:rPr lang="en-US" sz="2000" dirty="0">
-                <a:solidFill>
-                  <a:schemeClr val="bg2">
-                    <a:lumMod val="10000"/>
-                  </a:schemeClr>
-                </a:solidFill>
-              </a:rPr>
-              <a:t>Spectrogram is a visual representation of the spectrum of frequencies in a signal as it varies with time. In this case, the code is generating a spectrogram from audio data captured by a microphone, likely using the PDM (Pulse Density Modulation) microphone on the Arduino Nano 33 BLE Sense</a:t>
-            </a:r>
-          </a:p>
-        </p:txBody>
-      </p:sp>
-    </p:spTree>
-    <p:extLst>
-      <p:ext uri="{BB962C8B-B14F-4D97-AF65-F5344CB8AC3E}">
-        <p14:creationId xmlns:p14="http://schemas.microsoft.com/office/powerpoint/2010/main" val="1314376407"/>
-      </p:ext>
-    </p:extLst>
-  </p:cSld>
-  <p:clrMapOvr>
-    <a:masterClrMapping/>
-  </p:clrMapOvr>
-</p:sld>
-</file>
-
-<file path=ppt/slides/slide19.xml><?xml version="1.0" encoding="utf-8"?>
+<file path=ppt/slides/slide22.xml><?xml version="1.0" encoding="utf-8"?>
 <p:sld xmlns:a="http://schemas.openxmlformats.org/drawingml/2006/main" xmlns:r="http://schemas.openxmlformats.org/officeDocument/2006/relationships" xmlns:p="http://schemas.openxmlformats.org/presentationml/2006/main">
   <p:cSld>
     <p:spTree>
@@ -4067,303 +5066,6 @@
     <p:extLst>
       <p:ext uri="{BB962C8B-B14F-4D97-AF65-F5344CB8AC3E}">
         <p14:creationId xmlns:p14="http://schemas.microsoft.com/office/powerpoint/2010/main" val="2573659865"/>
-      </p:ext>
-    </p:extLst>
-  </p:cSld>
-  <p:clrMapOvr>
-    <a:masterClrMapping/>
-  </p:clrMapOvr>
-</p:sld>
-</file>
-
-<file path=ppt/slides/slide2.xml><?xml version="1.0" encoding="utf-8"?>
-<p:sld xmlns:a="http://schemas.openxmlformats.org/drawingml/2006/main" xmlns:r="http://schemas.openxmlformats.org/officeDocument/2006/relationships" xmlns:p="http://schemas.openxmlformats.org/presentationml/2006/main">
-  <p:cSld>
-    <p:spTree>
-      <p:nvGrpSpPr>
-        <p:cNvPr id="1" name=""/>
-        <p:cNvGrpSpPr/>
-        <p:nvPr/>
-      </p:nvGrpSpPr>
-      <p:grpSpPr>
-        <a:xfrm>
-          <a:off x="0" y="0"/>
-          <a:ext cx="0" cy="0"/>
-          <a:chOff x="0" y="0"/>
-          <a:chExt cx="0" cy="0"/>
-        </a:xfrm>
-      </p:grpSpPr>
-      <p:sp>
-        <p:nvSpPr>
-          <p:cNvPr id="5" name="TextBox 4">
-            <a:extLst>
-              <a:ext uri="{FF2B5EF4-FFF2-40B4-BE49-F238E27FC236}">
-                <a16:creationId xmlns:a16="http://schemas.microsoft.com/office/drawing/2014/main" id="{7B380A12-92CC-1970-3BA9-4186A953231E}"/>
-              </a:ext>
-            </a:extLst>
-          </p:cNvPr>
-          <p:cNvSpPr txBox="1"/>
-          <p:nvPr/>
-        </p:nvSpPr>
-        <p:spPr>
-          <a:xfrm>
-            <a:off x="4390104" y="287283"/>
-            <a:ext cx="6145160" cy="523220"/>
-          </a:xfrm>
-          <a:prstGeom prst="rect">
-            <a:avLst/>
-          </a:prstGeom>
-          <a:noFill/>
-        </p:spPr>
-        <p:txBody>
-          <a:bodyPr wrap="square">
-            <a:spAutoFit/>
-          </a:bodyPr>
-          <a:lstStyle/>
-          <a:p>
-            <a:r>
-              <a:rPr lang="en-US" sz="2800" dirty="0"/>
-              <a:t>What is Arduino?</a:t>
-            </a:r>
-          </a:p>
-        </p:txBody>
-      </p:sp>
-      <p:pic>
-        <p:nvPicPr>
-          <p:cNvPr id="1026" name="Picture 2" descr="Arduino and its types - DEV Community">
-            <a:extLst>
-              <a:ext uri="{FF2B5EF4-FFF2-40B4-BE49-F238E27FC236}">
-                <a16:creationId xmlns:a16="http://schemas.microsoft.com/office/drawing/2014/main" id="{C778369A-EE11-2296-E4BC-C6EB1B78CD28}"/>
-              </a:ext>
-            </a:extLst>
-          </p:cNvPr>
-          <p:cNvPicPr>
-            <a:picLocks noChangeAspect="1" noChangeArrowheads="1"/>
-          </p:cNvPicPr>
-          <p:nvPr/>
-        </p:nvPicPr>
-        <p:blipFill>
-          <a:blip r:embed="rId3">
-            <a:extLst>
-              <a:ext uri="{28A0092B-C50C-407E-A947-70E740481C1C}">
-                <a14:useLocalDpi xmlns:a14="http://schemas.microsoft.com/office/drawing/2010/main" val="0"/>
-              </a:ext>
-            </a:extLst>
-          </a:blip>
-          <a:srcRect/>
-          <a:stretch>
-            <a:fillRect/>
-          </a:stretch>
-        </p:blipFill>
-        <p:spPr bwMode="auto">
-          <a:xfrm>
-            <a:off x="6966064" y="1175656"/>
-            <a:ext cx="5017024" cy="3624944"/>
-          </a:xfrm>
-          <a:prstGeom prst="rect">
-            <a:avLst/>
-          </a:prstGeom>
-          <a:noFill/>
-          <a:extLst>
-            <a:ext uri="{909E8E84-426E-40DD-AFC4-6F175D3DCCD1}">
-              <a14:hiddenFill xmlns:a14="http://schemas.microsoft.com/office/drawing/2010/main">
-                <a:solidFill>
-                  <a:srgbClr val="FFFFFF"/>
-                </a:solidFill>
-              </a14:hiddenFill>
-            </a:ext>
-          </a:extLst>
-        </p:spPr>
-      </p:pic>
-      <p:sp>
-        <p:nvSpPr>
-          <p:cNvPr id="2" name="TextBox 1">
-            <a:extLst>
-              <a:ext uri="{FF2B5EF4-FFF2-40B4-BE49-F238E27FC236}">
-                <a16:creationId xmlns:a16="http://schemas.microsoft.com/office/drawing/2014/main" id="{9C9E0CAC-8D3A-AE7A-063E-DFB534C1C921}"/>
-              </a:ext>
-            </a:extLst>
-          </p:cNvPr>
-          <p:cNvSpPr txBox="1"/>
-          <p:nvPr/>
-        </p:nvSpPr>
-        <p:spPr>
-          <a:xfrm>
-            <a:off x="522514" y="1175656"/>
-            <a:ext cx="4423455" cy="3970318"/>
-          </a:xfrm>
-          <a:prstGeom prst="rect">
-            <a:avLst/>
-          </a:prstGeom>
-          <a:noFill/>
-        </p:spPr>
-        <p:txBody>
-          <a:bodyPr wrap="none" rtlCol="0">
-            <a:spAutoFit/>
-          </a:bodyPr>
-          <a:lstStyle/>
-          <a:p>
-            <a:pPr marL="285750" indent="-285750">
-              <a:buFont typeface="Wingdings" pitchFamily="2" charset="2"/>
-              <a:buChar char="Ø"/>
-            </a:pPr>
-            <a:r>
-              <a:rPr lang="en-US" dirty="0"/>
-              <a:t>Microcontroller Development Board</a:t>
-            </a:r>
-          </a:p>
-          <a:p>
-            <a:pPr marL="285750" indent="-285750">
-              <a:buFont typeface="Wingdings" pitchFamily="2" charset="2"/>
-              <a:buChar char="Ø"/>
-            </a:pPr>
-            <a:r>
-              <a:rPr lang="en-US" dirty="0"/>
-              <a:t>Open-source hardware + software.</a:t>
-            </a:r>
-          </a:p>
-          <a:p>
-            <a:pPr marL="285750" indent="-285750">
-              <a:buFont typeface="Wingdings" pitchFamily="2" charset="2"/>
-              <a:buChar char="Ø"/>
-            </a:pPr>
-            <a:r>
-              <a:rPr lang="en-US" dirty="0"/>
-              <a:t>Simple programming with Arduino IDE.</a:t>
-            </a:r>
-          </a:p>
-          <a:p>
-            <a:pPr marL="285750" indent="-285750">
-              <a:buFont typeface="Wingdings" pitchFamily="2" charset="2"/>
-              <a:buChar char="Ø"/>
-            </a:pPr>
-            <a:r>
-              <a:rPr lang="en-US" dirty="0"/>
-              <a:t>Used for rapid prototyping.</a:t>
-            </a:r>
-          </a:p>
-          <a:p>
-            <a:pPr marL="285750" indent="-285750">
-              <a:buFont typeface="Wingdings" pitchFamily="2" charset="2"/>
-              <a:buChar char="Ø"/>
-            </a:pPr>
-            <a:endParaRPr lang="en-US" dirty="0"/>
-          </a:p>
-          <a:p>
-            <a:pPr marL="285750" indent="-285750">
-              <a:buFont typeface="Wingdings" pitchFamily="2" charset="2"/>
-              <a:buChar char="Ø"/>
-            </a:pPr>
-            <a:endParaRPr lang="en-US" dirty="0"/>
-          </a:p>
-          <a:p>
-            <a:r>
-              <a:rPr lang="en-US" b="1" dirty="0"/>
-              <a:t>Why use Arduino? </a:t>
-            </a:r>
-          </a:p>
-          <a:p>
-            <a:pPr marL="285750" indent="-285750">
-              <a:buFont typeface="Wingdings" pitchFamily="2" charset="2"/>
-              <a:buChar char="Ø"/>
-            </a:pPr>
-            <a:r>
-              <a:rPr lang="en-US" dirty="0"/>
-              <a:t>Low cost and widely available.</a:t>
-            </a:r>
-          </a:p>
-          <a:p>
-            <a:pPr marL="285750" indent="-285750">
-              <a:buFont typeface="Wingdings" pitchFamily="2" charset="2"/>
-              <a:buChar char="Ø"/>
-            </a:pPr>
-            <a:r>
-              <a:rPr lang="en-US" dirty="0"/>
-              <a:t>Large community and libraries.</a:t>
-            </a:r>
-          </a:p>
-          <a:p>
-            <a:pPr marL="285750" indent="-285750">
-              <a:buFont typeface="Wingdings" pitchFamily="2" charset="2"/>
-              <a:buChar char="Ø"/>
-            </a:pPr>
-            <a:r>
-              <a:rPr lang="en-US" dirty="0"/>
-              <a:t>Easy to connect sensors/actuators.</a:t>
-            </a:r>
-          </a:p>
-          <a:p>
-            <a:pPr marL="285750" indent="-285750">
-              <a:buFont typeface="Wingdings" pitchFamily="2" charset="2"/>
-              <a:buChar char="Ø"/>
-            </a:pPr>
-            <a:r>
-              <a:rPr lang="en-US" dirty="0"/>
-              <a:t>Good entry point into embedded systems.</a:t>
-            </a:r>
-          </a:p>
-          <a:p>
-            <a:pPr marL="285750" indent="-285750">
-              <a:buFont typeface="Wingdings" pitchFamily="2" charset="2"/>
-              <a:buChar char="Ø"/>
-            </a:pPr>
-            <a:endParaRPr lang="en-US" dirty="0"/>
-          </a:p>
-          <a:p>
-            <a:pPr marL="285750" indent="-285750">
-              <a:buFont typeface="Wingdings" pitchFamily="2" charset="2"/>
-              <a:buChar char="Ø"/>
-            </a:pPr>
-            <a:endParaRPr lang="en-US" dirty="0"/>
-          </a:p>
-          <a:p>
-            <a:pPr marL="285750" indent="-285750">
-              <a:buFont typeface="Wingdings" pitchFamily="2" charset="2"/>
-              <a:buChar char="Ø"/>
-            </a:pPr>
-            <a:endParaRPr lang="en-US" dirty="0"/>
-          </a:p>
-        </p:txBody>
-      </p:sp>
-      <p:sp>
-        <p:nvSpPr>
-          <p:cNvPr id="3" name="TextBox 2">
-            <a:extLst>
-              <a:ext uri="{FF2B5EF4-FFF2-40B4-BE49-F238E27FC236}">
-                <a16:creationId xmlns:a16="http://schemas.microsoft.com/office/drawing/2014/main" id="{D291537A-58E7-4ADE-5F1C-4D20BA9B84C8}"/>
-              </a:ext>
-            </a:extLst>
-          </p:cNvPr>
-          <p:cNvSpPr txBox="1"/>
-          <p:nvPr/>
-        </p:nvSpPr>
-        <p:spPr>
-          <a:xfrm>
-            <a:off x="7811396" y="4961308"/>
-            <a:ext cx="3326360" cy="369332"/>
-          </a:xfrm>
-          <a:prstGeom prst="rect">
-            <a:avLst/>
-          </a:prstGeom>
-          <a:noFill/>
-        </p:spPr>
-        <p:txBody>
-          <a:bodyPr wrap="none" rtlCol="0">
-            <a:spAutoFit/>
-          </a:bodyPr>
-          <a:lstStyle/>
-          <a:p>
-            <a:r>
-              <a:rPr lang="en-US" i="1" dirty="0"/>
-              <a:t>Different types of Arduino Boards</a:t>
-            </a:r>
-          </a:p>
-        </p:txBody>
-      </p:sp>
-    </p:spTree>
-    <p:extLst>
-      <p:ext uri="{BB962C8B-B14F-4D97-AF65-F5344CB8AC3E}">
-        <p14:creationId xmlns:p14="http://schemas.microsoft.com/office/powerpoint/2010/main" val="2755390366"/>
       </p:ext>
     </p:extLst>
   </p:cSld>
@@ -8693,4 +9395,187 @@
     </a:ext>
   </a:extLst>
 </a:theme>
+</file>
+
+<file path=customXml/item1.xml><?xml version="1.0" encoding="utf-8"?>
+<?mso-contentType ?>
+<FormTemplates xmlns="http://schemas.microsoft.com/sharepoint/v3/contenttype/forms">
+  <Display>DocumentLibraryForm</Display>
+  <Edit>DocumentLibraryForm</Edit>
+  <New>DocumentLibraryForm</New>
+</FormTemplates>
+</file>
+
+<file path=customXml/item2.xml><?xml version="1.0" encoding="utf-8"?>
+<ct:contentTypeSchema xmlns:ct="http://schemas.microsoft.com/office/2006/metadata/contentType" xmlns:ma="http://schemas.microsoft.com/office/2006/metadata/properties/metaAttributes" ct:_="" ma:_="" ma:contentTypeName="Document" ma:contentTypeID="0x01010045E8830D8F5C0345B634BD517E3BED1E" ma:contentTypeVersion="1" ma:contentTypeDescription="Create a new document." ma:contentTypeScope="" ma:versionID="391786f9f4db55461262f98c6eb12590">
+  <xsd:schema xmlns:xsd="http://www.w3.org/2001/XMLSchema" xmlns:xs="http://www.w3.org/2001/XMLSchema" xmlns:p="http://schemas.microsoft.com/office/2006/metadata/properties" xmlns:ns3="c8860c6a-0f60-4b2d-b72d-6dfdab106698" targetNamespace="http://schemas.microsoft.com/office/2006/metadata/properties" ma:root="true" ma:fieldsID="57891ac659e9d2d688a66f15060defd4" ns3:_="">
+    <xsd:import namespace="c8860c6a-0f60-4b2d-b72d-6dfdab106698"/>
+    <xsd:element name="properties">
+      <xsd:complexType>
+        <xsd:sequence>
+          <xsd:element name="documentManagement">
+            <xsd:complexType>
+              <xsd:all>
+                <xsd:element ref="ns3:MediaServiceDateTaken" minOccurs="0"/>
+              </xsd:all>
+            </xsd:complexType>
+          </xsd:element>
+        </xsd:sequence>
+      </xsd:complexType>
+    </xsd:element>
+  </xsd:schema>
+  <xsd:schema xmlns:xsd="http://www.w3.org/2001/XMLSchema" xmlns:xs="http://www.w3.org/2001/XMLSchema" xmlns:dms="http://schemas.microsoft.com/office/2006/documentManagement/types" xmlns:pc="http://schemas.microsoft.com/office/infopath/2007/PartnerControls" targetNamespace="c8860c6a-0f60-4b2d-b72d-6dfdab106698" elementFormDefault="qualified">
+    <xsd:import namespace="http://schemas.microsoft.com/office/2006/documentManagement/types"/>
+    <xsd:import namespace="http://schemas.microsoft.com/office/infopath/2007/PartnerControls"/>
+    <xsd:element name="MediaServiceDateTaken" ma:index="8" nillable="true" ma:displayName="MediaServiceDateTaken" ma:hidden="true" ma:indexed="true" ma:internalName="MediaServiceDateTaken" ma:readOnly="true">
+      <xsd:simpleType>
+        <xsd:restriction base="dms:Text"/>
+      </xsd:simpleType>
+    </xsd:element>
+  </xsd:schema>
+  <xsd:schema xmlns="http://schemas.openxmlformats.org/package/2006/metadata/core-properties" xmlns:xsd="http://www.w3.org/2001/XMLSchema" xmlns:xsi="http://www.w3.org/2001/XMLSchema-instance" xmlns:dc="http://purl.org/dc/elements/1.1/" xmlns:dcterms="http://purl.org/dc/terms/" xmlns:odoc="http://schemas.microsoft.com/internal/obd" targetNamespace="http://schemas.openxmlformats.org/package/2006/metadata/core-properties" elementFormDefault="qualified" attributeFormDefault="unqualified" blockDefault="#all">
+    <xsd:import namespace="http://purl.org/dc/elements/1.1/" schemaLocation="http://dublincore.org/schemas/xmls/qdc/2003/04/02/dc.xsd"/>
+    <xsd:import namespace="http://purl.org/dc/terms/" schemaLocation="http://dublincore.org/schemas/xmls/qdc/2003/04/02/dcterms.xsd"/>
+    <xsd:element name="coreProperties" type="CT_coreProperties"/>
+    <xsd:complexType name="CT_coreProperties">
+      <xsd:all>
+        <xsd:element ref="dc:creator" minOccurs="0" maxOccurs="1"/>
+        <xsd:element ref="dcterms:created" minOccurs="0" maxOccurs="1"/>
+        <xsd:element ref="dc:identifier" minOccurs="0" maxOccurs="1"/>
+        <xsd:element name="contentType" minOccurs="0" maxOccurs="1" type="xsd:string" ma:index="0" ma:displayName="Content Type"/>
+        <xsd:element ref="dc:title" minOccurs="0" maxOccurs="1" ma:index="4" ma:displayName="Title"/>
+        <xsd:element ref="dc:subject" minOccurs="0" maxOccurs="1"/>
+        <xsd:element ref="dc:description" minOccurs="0" maxOccurs="1"/>
+        <xsd:element name="keywords" minOccurs="0" maxOccurs="1" type="xsd:string"/>
+        <xsd:element ref="dc:language" minOccurs="0" maxOccurs="1"/>
+        <xsd:element name="category" minOccurs="0" maxOccurs="1" type="xsd:string"/>
+        <xsd:element name="version" minOccurs="0" maxOccurs="1" type="xsd:string"/>
+        <xsd:element name="revision" minOccurs="0" maxOccurs="1" type="xsd:string">
+          <xsd:annotation>
+            <xsd:documentation>
+                        This value indicates the number of saves or revisions. The application is responsible for updating this value after each revision.
+                    </xsd:documentation>
+          </xsd:annotation>
+        </xsd:element>
+        <xsd:element name="lastModifiedBy" minOccurs="0" maxOccurs="1" type="xsd:string"/>
+        <xsd:element ref="dcterms:modified" minOccurs="0" maxOccurs="1"/>
+        <xsd:element name="contentStatus" minOccurs="0" maxOccurs="1" type="xsd:string"/>
+      </xsd:all>
+    </xsd:complexType>
+  </xsd:schema>
+  <xs:schema xmlns:pc="http://schemas.microsoft.com/office/infopath/2007/PartnerControls" xmlns:xs="http://www.w3.org/2001/XMLSchema" targetNamespace="http://schemas.microsoft.com/office/infopath/2007/PartnerControls" elementFormDefault="qualified" attributeFormDefault="unqualified">
+    <xs:element name="Person">
+      <xs:complexType>
+        <xs:sequence>
+          <xs:element ref="pc:DisplayName" minOccurs="0"/>
+          <xs:element ref="pc:AccountId" minOccurs="0"/>
+          <xs:element ref="pc:AccountType" minOccurs="0"/>
+        </xs:sequence>
+      </xs:complexType>
+    </xs:element>
+    <xs:element name="DisplayName" type="xs:string"/>
+    <xs:element name="AccountId" type="xs:string"/>
+    <xs:element name="AccountType" type="xs:string"/>
+    <xs:element name="BDCAssociatedEntity">
+      <xs:complexType>
+        <xs:sequence>
+          <xs:element ref="pc:BDCEntity" minOccurs="0" maxOccurs="unbounded"/>
+        </xs:sequence>
+        <xs:attribute ref="pc:EntityNamespace"/>
+        <xs:attribute ref="pc:EntityName"/>
+        <xs:attribute ref="pc:SystemInstanceName"/>
+        <xs:attribute ref="pc:AssociationName"/>
+      </xs:complexType>
+    </xs:element>
+    <xs:attribute name="EntityNamespace" type="xs:string"/>
+    <xs:attribute name="EntityName" type="xs:string"/>
+    <xs:attribute name="SystemInstanceName" type="xs:string"/>
+    <xs:attribute name="AssociationName" type="xs:string"/>
+    <xs:element name="BDCEntity">
+      <xs:complexType>
+        <xs:sequence>
+          <xs:element ref="pc:EntityDisplayName" minOccurs="0"/>
+          <xs:element ref="pc:EntityInstanceReference" minOccurs="0"/>
+          <xs:element ref="pc:EntityId1" minOccurs="0"/>
+          <xs:element ref="pc:EntityId2" minOccurs="0"/>
+          <xs:element ref="pc:EntityId3" minOccurs="0"/>
+          <xs:element ref="pc:EntityId4" minOccurs="0"/>
+          <xs:element ref="pc:EntityId5" minOccurs="0"/>
+        </xs:sequence>
+      </xs:complexType>
+    </xs:element>
+    <xs:element name="EntityDisplayName" type="xs:string"/>
+    <xs:element name="EntityInstanceReference" type="xs:string"/>
+    <xs:element name="EntityId1" type="xs:string"/>
+    <xs:element name="EntityId2" type="xs:string"/>
+    <xs:element name="EntityId3" type="xs:string"/>
+    <xs:element name="EntityId4" type="xs:string"/>
+    <xs:element name="EntityId5" type="xs:string"/>
+    <xs:element name="Terms">
+      <xs:complexType>
+        <xs:sequence>
+          <xs:element ref="pc:TermInfo" minOccurs="0" maxOccurs="unbounded"/>
+        </xs:sequence>
+      </xs:complexType>
+    </xs:element>
+    <xs:element name="TermInfo">
+      <xs:complexType>
+        <xs:sequence>
+          <xs:element ref="pc:TermName" minOccurs="0"/>
+          <xs:element ref="pc:TermId" minOccurs="0"/>
+        </xs:sequence>
+      </xs:complexType>
+    </xs:element>
+    <xs:element name="TermName" type="xs:string"/>
+    <xs:element name="TermId" type="xs:string"/>
+  </xs:schema>
+</ct:contentTypeSchema>
+</file>
+
+<file path=customXml/item3.xml><?xml version="1.0" encoding="utf-8"?>
+<p:properties xmlns:p="http://schemas.microsoft.com/office/2006/metadata/properties" xmlns:xsi="http://www.w3.org/2001/XMLSchema-instance" xmlns:pc="http://schemas.microsoft.com/office/infopath/2007/PartnerControls">
+  <documentManagement/>
+</p:properties>
+</file>
+
+<file path=customXml/itemProps1.xml><?xml version="1.0" encoding="utf-8"?>
+<ds:datastoreItem xmlns:ds="http://schemas.openxmlformats.org/officeDocument/2006/customXml" ds:itemID="{97B9E820-6D78-4774-9551-C0A7E3EE1875}">
+  <ds:schemaRefs>
+    <ds:schemaRef ds:uri="http://schemas.microsoft.com/sharepoint/v3/contenttype/forms"/>
+  </ds:schemaRefs>
+</ds:datastoreItem>
+</file>
+
+<file path=customXml/itemProps2.xml><?xml version="1.0" encoding="utf-8"?>
+<ds:datastoreItem xmlns:ds="http://schemas.openxmlformats.org/officeDocument/2006/customXml" ds:itemID="{77A5586E-8D7D-4547-8749-BD9BA6196A8E}">
+  <ds:schemaRefs>
+    <ds:schemaRef ds:uri="http://schemas.microsoft.com/office/2006/metadata/contentType"/>
+    <ds:schemaRef ds:uri="http://schemas.microsoft.com/office/2006/metadata/properties/metaAttributes"/>
+    <ds:schemaRef ds:uri="http://www.w3.org/2001/XMLSchema"/>
+    <ds:schemaRef ds:uri="http://schemas.microsoft.com/office/2006/metadata/properties"/>
+    <ds:schemaRef ds:uri="c8860c6a-0f60-4b2d-b72d-6dfdab106698"/>
+    <ds:schemaRef ds:uri="http://schemas.microsoft.com/office/2006/documentManagement/types"/>
+    <ds:schemaRef ds:uri="http://schemas.microsoft.com/office/infopath/2007/PartnerControls"/>
+    <ds:schemaRef ds:uri="http://schemas.openxmlformats.org/package/2006/metadata/core-properties"/>
+    <ds:schemaRef ds:uri="http://purl.org/dc/elements/1.1/"/>
+    <ds:schemaRef ds:uri="http://purl.org/dc/terms/"/>
+    <ds:schemaRef ds:uri="http://schemas.microsoft.com/internal/obd"/>
+  </ds:schemaRefs>
+</ds:datastoreItem>
+</file>
+
+<file path=customXml/itemProps3.xml><?xml version="1.0" encoding="utf-8"?>
+<ds:datastoreItem xmlns:ds="http://schemas.openxmlformats.org/officeDocument/2006/customXml" ds:itemID="{53DF7C83-9C55-4FDA-8C2C-00AA7CD9C3C7}">
+  <ds:schemaRefs>
+    <ds:schemaRef ds:uri="http://schemas.microsoft.com/office/2006/metadata/properties"/>
+    <ds:schemaRef ds:uri="http://www.w3.org/XML/1998/namespace"/>
+    <ds:schemaRef ds:uri="http://purl.org/dc/dcmitype/"/>
+    <ds:schemaRef ds:uri="http://purl.org/dc/elements/1.1/"/>
+    <ds:schemaRef ds:uri="c8860c6a-0f60-4b2d-b72d-6dfdab106698"/>
+    <ds:schemaRef ds:uri="http://schemas.microsoft.com/office/2006/documentManagement/types"/>
+    <ds:schemaRef ds:uri="http://schemas.microsoft.com/office/infopath/2007/PartnerControls"/>
+    <ds:schemaRef ds:uri="http://schemas.openxmlformats.org/package/2006/metadata/core-properties"/>
+    <ds:schemaRef ds:uri="http://purl.org/dc/terms/"/>
+  </ds:schemaRefs>
+</ds:datastoreItem>
 </file>